--- a/presentation.pptx
+++ b/presentation.pptx
@@ -473,8 +473,7 @@
           <a:lstStyle xmlns:a="http://schemas.openxmlformats.org/drawingml/2006/main"/>
           <a:p xmlns:a="http://schemas.openxmlformats.org/drawingml/2006/main">
             <a:r>
-              <a:rPr lang="zh-CN"/>
-              <a:t>先说使用者和问题，不讲课程日名称代替问题。指出真实输入和产品边界。目标 30 秒。</a:t>
+              <a:t>大家好，我们是好难起名组。今天要解决的问题是：为设施维护团队做一个混凝土裂缝的初步筛查器。他们的工作流程是先大量拍照、再人工复核，非常耗时。我们希望模型先筛出疑似裂缝的照片，让维护人员优先复核这些，从而减少无效的复核工作量。需要强调，这个筛查器只用来排序复核优先级，不能替代现场检查、工程师判断或结构安全结论。</a:t>
             </a:r>
           </a:p>
         </p:txBody>
@@ -528,8 +527,7 @@
           <a:lstStyle xmlns:a="http://schemas.openxmlformats.org/drawingml/2006/main"/>
           <a:p xmlns:a="http://schemas.openxmlformats.org/drawingml/2006/main">
             <a:r>
-              <a:rPr lang="zh-CN"/>
-              <a:t>说明基线为何简单、候选只复杂哪一步，以及比较条件如何保持相同。目标 45 秒。</a:t>
+              <a:t>我们的真实数据来自 Kaggle 的 Surface Crack Detection 数据集，Positive 和 Negative 各两万张，用 --check-data 验证通过。先看最简单的多数类基线：把所有图都判为裂缝，准确率只有 0.5，而且误报了 150 张无裂缝图，几乎不可用。候选方法是我们自己实现的小型 CNN，两层卷积加池化再接全连接。我们保持了数据的划分、指标和训练流程都不变，只改了模型本身。</a:t>
             </a:r>
           </a:p>
         </p:txBody>
@@ -583,8 +581,7 @@
           <a:lstStyle xmlns:a="http://schemas.openxmlformats.org/drawingml/2006/main"/>
           <a:p xmlns:a="http://schemas.openxmlformats.org/drawingml/2006/main">
             <a:r>
-              <a:rPr lang="zh-CN"/>
-              <a:t>只选择一条最能回答问题的证据。说出命令、指标含义和一个真实样本。目标 60 秒。</a:t>
+              <a:t>这是最重要的一条证据。在同样 900 训练、300 测试的划分下，CNN 训练 8 个 epoch 后准确率 0.943，漏检 14 张裂缝，误报只有 3 张，而基线误报了 150 张，误报率大幅下降。左边这个案例是一张被漏检的真实裂缝 04283.jpg，模型把它判成了无裂缝，而且它在 2 个 epoch 和 8 个 epoch 时都被漏检。这提醒我们，虽然误报大幅减少，但漏检还没清零，而漏检恰恰是筛查场景最需要警惕的。</a:t>
             </a:r>
           </a:p>
         </p:txBody>
@@ -638,8 +635,7 @@
           <a:lstStyle xmlns:a="http://schemas.openxmlformats.org/drawingml/2006/main"/>
           <a:p xmlns:a="http://schemas.openxmlformats.org/drawingml/2006/main">
             <a:r>
-              <a:rPr lang="zh-CN"/>
-              <a:t>用失败收尾，明确不能声称什么和下一项最小检查。不要说泛泛的“数据不够”。目标 45 秒。</a:t>
+              <a:t>最后是失败、限制与下一步。我们的 CNN 仍然漏检 14 张裂缝，比 2 个 epoch 的 43 张已经大幅改善，但没有清零。必须强调的是，这个模型只能用于安排人工复核的顺序，不能替代现场检查、工程师判断或结构安全结论。而且数据是由高分辨率照片切块生成的，随机拆分存在泄漏风险，数字可能偏乐观。下一步的最小检查是查看错误图像网格，归纳漏检样本的共性，比如亮度、裂缝粗细或对比度，再决定是否做针对性数据增强。谢谢大家。</a:t>
             </a:r>
           </a:p>
         </p:txBody>
@@ -1063,7 +1059,7 @@
                 <a:latin typeface="Microsoft YaHei"/>
                 <a:ea typeface="Microsoft YaHei"/>
               </a:rPr>
-              <a:t>设施维护团队需先从大量混凝土照片中筛出疑似裂缝、再安排人工复核。输入：混凝土表面照片；输出：疑似裂缝/无裂缝；用于决定哪些照片优先复核。</a:t>
+              <a:t>设施维护团队需先从大量混凝土照片中筛出疑似裂缝、再安排人工复核。输入：混凝土表面照片；输出：疑似裂缝 / 无裂缝；用于决定哪些照片优先复核。模型只排序复核优先级，不替代现场检查与工程判断。</a:t>
             </a:r>
           </a:p>
         </p:txBody>
@@ -1271,8 +1267,8 @@
                 <a:latin typeface="Microsoft YaHei"/>
                 <a:ea typeface="Microsoft YaHei"/>
               </a:rPr>
-              <a:t>Kaggle Surface Crack Detection
-Positive / Negative 各 20000 张
+              <a:t>来源：Kaggle Surface Crack Detection
+Positive / Negative 各 20000 张（227×227 RGB）
 python train.py --check-data 通过</a:t>
             </a:r>
           </a:p>
@@ -1327,8 +1323,9 @@
                 <a:latin typeface="Microsoft YaHei"/>
                 <a:ea typeface="Microsoft YaHei"/>
               </a:rPr>
-              <a:t>多数类：全部判为裂缝
-acc 0.50 ｜ 误报 150</a:t>
+              <a:t>多数类：所有图判为裂缝
+acc 0.50 ｜ recall 1.0
+误报 150 / 300</a:t>
             </a:r>
           </a:p>
         </p:txBody>
@@ -1383,7 +1380,8 @@
                 <a:ea typeface="Microsoft YaHei"/>
               </a:rPr>
               <a:t>SmallCNN（2 卷积 + 2 池化 + 线性）
-acc 0.943 ｜ 漏检 14 ｜ 误报 3</a:t>
+acc 0.943 ｜ recall 0.907
+漏检 14 ｜ 误报 3</a:t>
             </a:r>
           </a:p>
         </p:txBody>
@@ -1418,7 +1416,7 @@
                 <a:latin typeface="Microsoft YaHei"/>
                 <a:ea typeface="Microsoft YaHei"/>
               </a:rPr>
-              <a:t>数据划分：每类最多 600、75/25、seed 2026；指标 accuracy / 漏检 / 误报均未改动。</a:t>
+              <a:t>不变条件：数据划分每类最多 600、75/25、seed 2026；指标与训练流程均未改动。</a:t>
             </a:r>
           </a:p>
         </p:txBody>
@@ -1593,7 +1591,8 @@
               </a:rPr>
               <a:t>CNN 8ep：acc 0.943
 漏检 14 ｜ 误报 3（基线误报 150）
-900 训练 / 300 测试</a:t>
+900 训练 / 300 测试
+train_loss 0.68 → 0.20</a:t>
             </a:r>
           </a:p>
         </p:txBody>
@@ -1648,7 +1647,8 @@
                 <a:ea typeface="Microsoft YaHei"/>
               </a:rPr>
               <a:t>漏检裂缝 data/raw/Positive/04283.jpg
-true=crack，predicted=no_crack</a:t>
+true=crack，predicted=no_crack
+在 2ep 与 8ep 中均被漏检</a:t>
             </a:r>
           </a:p>
         </p:txBody>
@@ -1683,7 +1683,7 @@
                 <a:latin typeface="Microsoft YaHei"/>
                 <a:ea typeface="Microsoft YaHei"/>
               </a:rPr>
-              <a:t>由 python train.py --model cnn --epochs 8 生成；数字见 runs/cnn.json。</a:t>
+              <a:t>由 python train.py --model cnn --epochs 8 生成；数字见 runs/cnn.json，可复现。</a:t>
             </a:r>
           </a:p>
         </p:txBody>
@@ -1795,7 +1795,8 @@
                 <a:ea typeface="Microsoft YaHei"/>
               </a:rPr>
               <a:t>CNN 8ep 仍漏检 14 张裂缝
-（2ep 为 43，明显改善但未清零）</a:t>
+2ep 为 43 → 8ep 为 14，未清零
+漏检是筛查场景最危险的错误</a:t>
             </a:r>
           </a:p>
         </p:txBody>
@@ -1850,7 +1851,8 @@
                 <a:ea typeface="Microsoft YaHei"/>
               </a:rPr>
               <a:t>不能替代现场检查 / 工程师判断 / 安全决策
-切块数据存在泄漏，数字偏乐观</a:t>
+切块数据存在泄漏，数字偏乐观
+仅用于安排复核排序</a:t>
             </a:r>
           </a:p>
         </p:txBody>
@@ -1905,7 +1907,8 @@
                 <a:ea typeface="Microsoft YaHei"/>
               </a:rPr>
               <a:t>查看 runs/cnn-errors.png 归纳漏检共性
-（亮度 / 裂缝粗细 / 对比度），考虑数据增强</a:t>
+（亮度 / 裂缝粗细 / 对比度）
+再考虑针对性数据增强</a:t>
             </a:r>
           </a:p>
         </p:txBody>

--- a/presentation.pptx
+++ b/presentation.pptx
@@ -4330,7 +4330,7 @@
           <a:p>
             <a:pPr algn="ctr"/>
             <a:r>
-              <a:rPr sz="4400" b="1" i="0">
+              <a:rPr sz="4400" b="1">
                 <a:solidFill>
                   <a:srgbClr val="FFFFFF"/>
                 </a:solidFill>
@@ -4366,7 +4366,7 @@
           <a:p>
             <a:pPr algn="ctr"/>
             <a:r>
-              <a:rPr sz="2000" b="0" i="0">
+              <a:rPr sz="2000" b="0">
                 <a:solidFill>
                   <a:srgbClr val="CFDDEC"/>
                 </a:solidFill>
@@ -4402,7 +4402,7 @@
           <a:p>
             <a:pPr algn="ctr"/>
             <a:r>
-              <a:rPr sz="1600" b="0" i="0">
+              <a:rPr sz="1600" b="0">
                 <a:solidFill>
                   <a:srgbClr val="E8E8E8"/>
                 </a:solidFill>
@@ -4415,7 +4415,7 @@
           <a:p>
             <a:pPr algn="ctr"/>
             <a:r>
-              <a:rPr sz="1400" b="0" i="0">
+              <a:rPr sz="1400" b="0">
                 <a:solidFill>
                   <a:srgbClr val="AFC2D6"/>
                 </a:solidFill>
@@ -4512,7 +4512,7 @@
           <a:lstStyle/>
           <a:p>
             <a:r>
-              <a:rPr sz="3000" b="1" i="0">
+              <a:rPr sz="3000" b="1">
                 <a:solidFill>
                   <a:srgbClr val="FFFFFF"/>
                 </a:solidFill>
@@ -4596,14 +4596,14 @@
               </a:spcAft>
             </a:pPr>
             <a:r>
-              <a:rPr sz="2000" b="1" i="0">
+              <a:rPr sz="2000" b="1">
                 <a:solidFill>
                   <a:srgbClr val="1F3A5F"/>
                 </a:solidFill>
                 <a:latin typeface="Microsoft YaHei"/>
                 <a:ea typeface="Microsoft YaHei"/>
               </a:rPr>
-              <a:t>•  </a:t>
+              <a:t>•  CNN 8ep 仍漏检 14 张裂缝（2ep 为 43，已大幅改善但未清零）</a:t>
             </a:r>
           </a:p>
           <a:p>
@@ -4613,14 +4613,14 @@
               </a:spcAft>
             </a:pPr>
             <a:r>
-              <a:rPr sz="2000" b="1" i="0">
+              <a:rPr sz="2000" b="1">
                 <a:solidFill>
                   <a:srgbClr val="1F3A5F"/>
                 </a:solidFill>
                 <a:latin typeface="Microsoft YaHei"/>
                 <a:ea typeface="Microsoft YaHei"/>
               </a:rPr>
-              <a:t>•  </a:t>
+              <a:t>•  不能替代现场检查 / 工程师判断 / 结构安全决策</a:t>
             </a:r>
           </a:p>
           <a:p>
@@ -4630,14 +4630,14 @@
               </a:spcAft>
             </a:pPr>
             <a:r>
-              <a:rPr sz="2000" b="0" i="0">
+              <a:rPr sz="2000" b="0">
                 <a:solidFill>
                   <a:srgbClr val="1F3A5F"/>
                 </a:solidFill>
                 <a:latin typeface="Microsoft YaHei"/>
                 <a:ea typeface="Microsoft YaHei"/>
               </a:rPr>
-              <a:t>•  </a:t>
+              <a:t>•  切块数据存在泄漏，数字可能偏乐观</a:t>
             </a:r>
           </a:p>
           <a:p>
@@ -4647,14 +4647,14 @@
               </a:spcAft>
             </a:pPr>
             <a:r>
-              <a:rPr sz="2000" b="0" i="0">
+              <a:rPr sz="2000" b="0">
                 <a:solidFill>
                   <a:srgbClr val="1F3A5F"/>
                 </a:solidFill>
                 <a:latin typeface="Microsoft YaHei"/>
                 <a:ea typeface="Microsoft YaHei"/>
               </a:rPr>
-              <a:t>•  </a:t>
+              <a:t>•  只用于安排人工复核排序</a:t>
             </a:r>
           </a:p>
         </p:txBody>
@@ -4683,7 +4683,7 @@
           <a:p>
             <a:pPr algn="r"/>
             <a:r>
-              <a:rPr sz="1200" b="0" i="0">
+              <a:rPr sz="1200" b="0">
                 <a:solidFill>
                   <a:srgbClr val="4A4A4A"/>
                 </a:solidFill>
@@ -4780,7 +4780,7 @@
           <a:lstStyle/>
           <a:p>
             <a:r>
-              <a:rPr sz="3000" b="1" i="0">
+              <a:rPr sz="3000" b="1">
                 <a:solidFill>
                   <a:srgbClr val="FFFFFF"/>
                 </a:solidFill>
@@ -4864,14 +4864,14 @@
               </a:spcAft>
             </a:pPr>
             <a:r>
-              <a:rPr sz="2000" b="1" i="0">
+              <a:rPr sz="2000" b="1">
                 <a:solidFill>
                   <a:srgbClr val="1F3A5F"/>
                 </a:solidFill>
                 <a:latin typeface="Microsoft YaHei"/>
                 <a:ea typeface="Microsoft YaHei"/>
               </a:rPr>
-              <a:t>•  </a:t>
+              <a:t>•  结论：CNN 显著优于多数类基线，大幅减少人工复核量</a:t>
             </a:r>
           </a:p>
           <a:p>
@@ -4881,14 +4881,14 @@
               </a:spcAft>
             </a:pPr>
             <a:r>
-              <a:rPr sz="2000" b="0" i="0">
+              <a:rPr sz="2000" b="0">
                 <a:solidFill>
                   <a:srgbClr val="1F3A5F"/>
                 </a:solidFill>
                 <a:latin typeface="Microsoft YaHei"/>
                 <a:ea typeface="Microsoft YaHei"/>
               </a:rPr>
-              <a:t>•  </a:t>
+              <a:t>•  下一步：查看漏检图像共性（亮度 / 裂缝粗细 / 对比度）</a:t>
             </a:r>
           </a:p>
           <a:p>
@@ -4898,14 +4898,14 @@
               </a:spcAft>
             </a:pPr>
             <a:r>
-              <a:rPr sz="2000" b="0" i="0">
+              <a:rPr sz="2000" b="0">
                 <a:solidFill>
                   <a:srgbClr val="1F3A5F"/>
                 </a:solidFill>
                 <a:latin typeface="Microsoft YaHei"/>
                 <a:ea typeface="Microsoft YaHei"/>
               </a:rPr>
-              <a:t>•  </a:t>
+              <a:t>•  考虑针对性数据增强后再训练</a:t>
             </a:r>
           </a:p>
           <a:p>
@@ -4915,14 +4915,14 @@
               </a:spcAft>
             </a:pPr>
             <a:r>
-              <a:rPr sz="2200" b="1" i="0">
+              <a:rPr sz="2200" b="1">
                 <a:solidFill>
                   <a:srgbClr val="1F3A5F"/>
                 </a:solidFill>
                 <a:latin typeface="Microsoft YaHei"/>
                 <a:ea typeface="Microsoft YaHei"/>
               </a:rPr>
-              <a:t>•  </a:t>
+              <a:t>•  谢谢！</a:t>
             </a:r>
           </a:p>
         </p:txBody>
@@ -4951,7 +4951,7 @@
           <a:p>
             <a:pPr algn="r"/>
             <a:r>
-              <a:rPr sz="1200" b="0" i="0">
+              <a:rPr sz="1200" b="0">
                 <a:solidFill>
                   <a:srgbClr val="4A4A4A"/>
                 </a:solidFill>
@@ -5048,7 +5048,7 @@
           <a:lstStyle/>
           <a:p>
             <a:r>
-              <a:rPr sz="3000" b="1" i="0">
+              <a:rPr sz="3000" b="1">
                 <a:solidFill>
                   <a:srgbClr val="FFFFFF"/>
                 </a:solidFill>
@@ -5132,14 +5132,14 @@
               </a:spcAft>
             </a:pPr>
             <a:r>
-              <a:rPr sz="2000" b="1" i="0">
+              <a:rPr sz="2000" b="1">
                 <a:solidFill>
                   <a:srgbClr val="1F3A5F"/>
                 </a:solidFill>
                 <a:latin typeface="Microsoft YaHei"/>
                 <a:ea typeface="Microsoft YaHei"/>
               </a:rPr>
-              <a:t>•  </a:t>
+              <a:t>•  使用者：设施维护团队</a:t>
             </a:r>
           </a:p>
           <a:p>
@@ -5149,14 +5149,14 @@
               </a:spcAft>
             </a:pPr>
             <a:r>
-              <a:rPr sz="2000" b="1" i="0">
+              <a:rPr sz="2000" b="1">
                 <a:solidFill>
                   <a:srgbClr val="1F3A5F"/>
                 </a:solidFill>
                 <a:latin typeface="Microsoft YaHei"/>
                 <a:ea typeface="Microsoft YaHei"/>
               </a:rPr>
-              <a:t>•  </a:t>
+              <a:t>•  真实输入：混凝土表面照片</a:t>
             </a:r>
           </a:p>
           <a:p>
@@ -5166,14 +5166,14 @@
               </a:spcAft>
             </a:pPr>
             <a:r>
-              <a:rPr sz="2000" b="0" i="0">
+              <a:rPr sz="2000" b="0">
                 <a:solidFill>
                   <a:srgbClr val="1F3A5F"/>
                 </a:solidFill>
                 <a:latin typeface="Microsoft YaHei"/>
                 <a:ea typeface="Microsoft YaHei"/>
               </a:rPr>
-              <a:t>•  </a:t>
+              <a:t>•  需要的输出：疑似裂缝 / 无裂缝，用于安排人工复核的顺序</a:t>
             </a:r>
           </a:p>
           <a:p>
@@ -5183,14 +5183,14 @@
               </a:spcAft>
             </a:pPr>
             <a:r>
-              <a:rPr sz="2000" b="0" i="0">
+              <a:rPr sz="2000" b="0">
                 <a:solidFill>
                   <a:srgbClr val="1F3A5F"/>
                 </a:solidFill>
                 <a:latin typeface="Microsoft YaHei"/>
                 <a:ea typeface="Microsoft YaHei"/>
               </a:rPr>
-              <a:t>•  </a:t>
+              <a:t>•  产品边界：只用于复核排序，不替代现场检查、工程师判断或安全决策</a:t>
             </a:r>
           </a:p>
           <a:p>
@@ -5200,14 +5200,14 @@
               </a:spcAft>
             </a:pPr>
             <a:r>
-              <a:rPr sz="2000" b="1" i="0">
+              <a:rPr sz="2000" b="1">
                 <a:solidFill>
                   <a:srgbClr val="1F3A5F"/>
                 </a:solidFill>
                 <a:latin typeface="Microsoft YaHei"/>
                 <a:ea typeface="Microsoft YaHei"/>
               </a:rPr>
-              <a:t>•  </a:t>
+              <a:t>•  最危险的错误：漏检裂缝（真实裂缝被标成无裂缝，不会被送去复核）</a:t>
             </a:r>
           </a:p>
         </p:txBody>
@@ -5236,7 +5236,7 @@
           <a:p>
             <a:pPr algn="r"/>
             <a:r>
-              <a:rPr sz="1200" b="0" i="0">
+              <a:rPr sz="1200" b="0">
                 <a:solidFill>
                   <a:srgbClr val="4A4A4A"/>
                 </a:solidFill>
@@ -5333,7 +5333,7 @@
           <a:lstStyle/>
           <a:p>
             <a:r>
-              <a:rPr sz="3000" b="1" i="0">
+              <a:rPr sz="3000" b="1">
                 <a:solidFill>
                   <a:srgbClr val="FFFFFF"/>
                 </a:solidFill>
@@ -5417,14 +5417,14 @@
               </a:spcAft>
             </a:pPr>
             <a:r>
-              <a:rPr sz="2000" b="1" i="0">
+              <a:rPr sz="2000" b="1">
                 <a:solidFill>
                   <a:srgbClr val="1F3A5F"/>
                 </a:solidFill>
                 <a:latin typeface="Microsoft YaHei"/>
                 <a:ea typeface="Microsoft YaHei"/>
               </a:rPr>
-              <a:t>•  </a:t>
+              <a:t>•  来源：Kaggle Surface Crack Detection</a:t>
             </a:r>
           </a:p>
           <a:p>
@@ -5434,14 +5434,14 @@
               </a:spcAft>
             </a:pPr>
             <a:r>
-              <a:rPr sz="2000" b="0" i="0">
+              <a:rPr sz="2000" b="0">
                 <a:solidFill>
                   <a:srgbClr val="1F3A5F"/>
                 </a:solidFill>
                 <a:latin typeface="Microsoft YaHei"/>
                 <a:ea typeface="Microsoft YaHei"/>
               </a:rPr>
-              <a:t>•  </a:t>
+              <a:t>•  Positive / Negative 各 20000 张，227×227 RGB</a:t>
             </a:r>
           </a:p>
           <a:p>
@@ -5451,14 +5451,14 @@
               </a:spcAft>
             </a:pPr>
             <a:r>
-              <a:rPr sz="2000" b="0" i="0">
+              <a:rPr sz="2000" b="0">
                 <a:solidFill>
                   <a:srgbClr val="1F3A5F"/>
                 </a:solidFill>
                 <a:latin typeface="Microsoft YaHei"/>
                 <a:ea typeface="Microsoft YaHei"/>
               </a:rPr>
-              <a:t>•  </a:t>
+              <a:t>•  检查命令：python train.py --check-data</a:t>
             </a:r>
           </a:p>
           <a:p>
@@ -5468,14 +5468,14 @@
               </a:spcAft>
             </a:pPr>
             <a:r>
-              <a:rPr sz="2000" b="0" i="0">
+              <a:rPr sz="2000" b="0">
                 <a:solidFill>
                   <a:srgbClr val="1F3A5F"/>
                 </a:solidFill>
                 <a:latin typeface="Microsoft YaHei"/>
                 <a:ea typeface="Microsoft YaHei"/>
               </a:rPr>
-              <a:t>•  </a:t>
+              <a:t>•  结果：REAL DATA CHECK PASSED（两文件夹各 20000）</a:t>
             </a:r>
           </a:p>
           <a:p>
@@ -5485,14 +5485,14 @@
               </a:spcAft>
             </a:pPr>
             <a:r>
-              <a:rPr sz="2000" b="1" i="0">
+              <a:rPr sz="2000" b="1">
                 <a:solidFill>
                   <a:srgbClr val="1F3A5F"/>
                 </a:solidFill>
                 <a:latin typeface="Microsoft YaHei"/>
                 <a:ea typeface="Microsoft YaHei"/>
               </a:rPr>
-              <a:t>•  </a:t>
+              <a:t>•  风险：由 458 张高分辨率图切块生成，随机拆分存在数据泄漏</a:t>
             </a:r>
           </a:p>
         </p:txBody>
@@ -5521,7 +5521,7 @@
           <a:p>
             <a:pPr algn="r"/>
             <a:r>
-              <a:rPr sz="1200" b="0" i="0">
+              <a:rPr sz="1200" b="0">
                 <a:solidFill>
                   <a:srgbClr val="4A4A4A"/>
                 </a:solidFill>
@@ -5618,7 +5618,7 @@
           <a:lstStyle/>
           <a:p>
             <a:r>
-              <a:rPr sz="3000" b="1" i="0">
+              <a:rPr sz="3000" b="1">
                 <a:solidFill>
                   <a:srgbClr val="FFFFFF"/>
                 </a:solidFill>
@@ -5702,14 +5702,14 @@
               </a:spcAft>
             </a:pPr>
             <a:r>
-              <a:rPr sz="2000" b="1" i="0">
+              <a:rPr sz="2000" b="1">
                 <a:solidFill>
                   <a:srgbClr val="1F3A5F"/>
                 </a:solidFill>
                 <a:latin typeface="Microsoft YaHei"/>
                 <a:ea typeface="Microsoft YaHei"/>
               </a:rPr>
-              <a:t>•  </a:t>
+              <a:t>•  方法：把所有测试图都判为裂缝</a:t>
             </a:r>
           </a:p>
           <a:p>
@@ -5719,14 +5719,14 @@
               </a:spcAft>
             </a:pPr>
             <a:r>
-              <a:rPr sz="2000" b="0" i="0">
+              <a:rPr sz="2000" b="0">
                 <a:solidFill>
                   <a:srgbClr val="1F3A5F"/>
                 </a:solidFill>
                 <a:latin typeface="Microsoft YaHei"/>
                 <a:ea typeface="Microsoft YaHei"/>
               </a:rPr>
-              <a:t>•  </a:t>
+              <a:t>•  accuracy 0.50，crack_recall 1.0</a:t>
             </a:r>
           </a:p>
           <a:p>
@@ -5736,14 +5736,14 @@
               </a:spcAft>
             </a:pPr>
             <a:r>
-              <a:rPr sz="2000" b="0" i="0">
+              <a:rPr sz="2000" b="0">
                 <a:solidFill>
                   <a:srgbClr val="1F3A5F"/>
                 </a:solidFill>
                 <a:latin typeface="Microsoft YaHei"/>
                 <a:ea typeface="Microsoft YaHei"/>
               </a:rPr>
-              <a:t>•  </a:t>
+              <a:t>•  误报 150 / 300（全部无裂缝图都被标成裂缝）</a:t>
             </a:r>
           </a:p>
           <a:p>
@@ -5753,14 +5753,14 @@
               </a:spcAft>
             </a:pPr>
             <a:r>
-              <a:rPr sz="2000" b="1" i="0">
+              <a:rPr sz="2000" b="1">
                 <a:solidFill>
                   <a:srgbClr val="1F3A5F"/>
                 </a:solidFill>
                 <a:latin typeface="Microsoft YaHei"/>
                 <a:ea typeface="Microsoft YaHei"/>
               </a:rPr>
-              <a:t>•  </a:t>
+              <a:t>•  结论：作为筛查器几乎不可用，是改进的起点</a:t>
             </a:r>
           </a:p>
         </p:txBody>
@@ -5789,7 +5789,7 @@
           <a:p>
             <a:pPr algn="r"/>
             <a:r>
-              <a:rPr sz="1200" b="0" i="0">
+              <a:rPr sz="1200" b="0">
                 <a:solidFill>
                   <a:srgbClr val="4A4A4A"/>
                 </a:solidFill>
@@ -5886,7 +5886,7 @@
           <a:lstStyle/>
           <a:p>
             <a:r>
-              <a:rPr sz="3000" b="1" i="0">
+              <a:rPr sz="3000" b="1">
                 <a:solidFill>
                   <a:srgbClr val="FFFFFF"/>
                 </a:solidFill>
@@ -5970,14 +5970,14 @@
               </a:spcAft>
             </a:pPr>
             <a:r>
-              <a:rPr sz="1800" b="1" i="0">
+              <a:rPr sz="1800" b="1">
                 <a:solidFill>
                   <a:srgbClr val="1F3A5F"/>
                 </a:solidFill>
                 <a:latin typeface="Microsoft YaHei"/>
                 <a:ea typeface="Microsoft YaHei"/>
               </a:rPr>
-              <a:t>•  </a:t>
+              <a:t>•  结构：Conv(3→8) → ReLU → Pool → Conv(8→16) → ReLU → Pool → Flatten → Linear</a:t>
             </a:r>
           </a:p>
           <a:p>
@@ -5987,14 +5987,14 @@
               </a:spcAft>
             </a:pPr>
             <a:r>
-              <a:rPr sz="1800" b="0" i="0">
+              <a:rPr sz="1800" b="0">
                 <a:solidFill>
                   <a:srgbClr val="1F3A5F"/>
                 </a:solidFill>
                 <a:latin typeface="Microsoft YaHei"/>
                 <a:ea typeface="Microsoft YaHei"/>
               </a:rPr>
-              <a:t>•  </a:t>
+              <a:t>•  输入 64×64×3，输出 2 类（无裂缝 / 裂缝）</a:t>
             </a:r>
           </a:p>
           <a:p>
@@ -6004,14 +6004,14 @@
               </a:spcAft>
             </a:pPr>
             <a:r>
-              <a:rPr sz="1800" b="0" i="0">
+              <a:rPr sz="1800" b="0">
                 <a:solidFill>
                   <a:srgbClr val="1F3A5F"/>
                 </a:solidFill>
                 <a:latin typeface="Microsoft YaHei"/>
                 <a:ea typeface="Microsoft YaHei"/>
               </a:rPr>
-              <a:t>•  </a:t>
+              <a:t>•  只实现 models.py 中的 SmallCNN</a:t>
             </a:r>
           </a:p>
           <a:p>
@@ -6021,14 +6021,14 @@
               </a:spcAft>
             </a:pPr>
             <a:r>
-              <a:rPr sz="1800" b="1" i="0">
+              <a:rPr sz="1800" b="1">
                 <a:solidFill>
                   <a:srgbClr val="1F3A5F"/>
                 </a:solidFill>
                 <a:latin typeface="Microsoft YaHei"/>
                 <a:ea typeface="Microsoft YaHei"/>
               </a:rPr>
-              <a:t>•  </a:t>
+              <a:t>•  保持不变：数据、划分、指标与训练流程均未改动</a:t>
             </a:r>
           </a:p>
         </p:txBody>
@@ -6057,7 +6057,7 @@
           <a:p>
             <a:pPr algn="r"/>
             <a:r>
-              <a:rPr sz="1200" b="0" i="0">
+              <a:rPr sz="1200" b="0">
                 <a:solidFill>
                   <a:srgbClr val="4A4A4A"/>
                 </a:solidFill>
@@ -6154,7 +6154,7 @@
           <a:lstStyle/>
           <a:p>
             <a:r>
-              <a:rPr sz="3000" b="1" i="0">
+              <a:rPr sz="3000" b="1">
                 <a:solidFill>
                   <a:srgbClr val="FFFFFF"/>
                 </a:solidFill>
@@ -6238,14 +6238,14 @@
               </a:spcAft>
             </a:pPr>
             <a:r>
-              <a:rPr sz="2000" b="1" i="0">
+              <a:rPr sz="2000" b="1">
                 <a:solidFill>
                   <a:srgbClr val="1F3A5F"/>
                 </a:solidFill>
                 <a:latin typeface="Microsoft YaHei"/>
                 <a:ea typeface="Microsoft YaHei"/>
               </a:rPr>
-              <a:t>•  </a:t>
+              <a:t>•  划分：每类最多 600 张，75/25 拆分，seed=2026</a:t>
             </a:r>
           </a:p>
           <a:p>
@@ -6255,14 +6255,14 @@
               </a:spcAft>
             </a:pPr>
             <a:r>
-              <a:rPr sz="2000" b="0" i="0">
+              <a:rPr sz="2000" b="0">
                 <a:solidFill>
                   <a:srgbClr val="1F3A5F"/>
                 </a:solidFill>
                 <a:latin typeface="Microsoft YaHei"/>
                 <a:ea typeface="Microsoft YaHei"/>
               </a:rPr>
-              <a:t>•  </a:t>
+              <a:t>•  规模：900 训练 / 300 测试</a:t>
             </a:r>
           </a:p>
           <a:p>
@@ -6272,14 +6272,14 @@
               </a:spcAft>
             </a:pPr>
             <a:r>
-              <a:rPr sz="2000" b="0" i="0">
+              <a:rPr sz="2000" b="0">
                 <a:solidFill>
                   <a:srgbClr val="1F3A5F"/>
                 </a:solidFill>
                 <a:latin typeface="Microsoft YaHei"/>
                 <a:ea typeface="Microsoft YaHei"/>
               </a:rPr>
-              <a:t>•  </a:t>
+              <a:t>•  训练：8 epochs，Adam(lr=0.001)，CrossEntropy</a:t>
             </a:r>
           </a:p>
           <a:p>
@@ -6289,14 +6289,14 @@
               </a:spcAft>
             </a:pPr>
             <a:r>
-              <a:rPr sz="2000" b="0" i="0">
+              <a:rPr sz="2000" b="0">
                 <a:solidFill>
                   <a:srgbClr val="1F3A5F"/>
                 </a:solidFill>
                 <a:latin typeface="Microsoft YaHei"/>
                 <a:ea typeface="Microsoft YaHei"/>
               </a:rPr>
-              <a:t>•  </a:t>
+              <a:t>•  指标：accuracy / 漏检 FN / 误报 FP（同一条件下比较）</a:t>
             </a:r>
           </a:p>
         </p:txBody>
@@ -6325,7 +6325,7 @@
           <a:p>
             <a:pPr algn="r"/>
             <a:r>
-              <a:rPr sz="1200" b="0" i="0">
+              <a:rPr sz="1200" b="0">
                 <a:solidFill>
                   <a:srgbClr val="4A4A4A"/>
                 </a:solidFill>
@@ -6422,7 +6422,7 @@
           <a:lstStyle/>
           <a:p>
             <a:r>
-              <a:rPr sz="3000" b="1" i="0">
+              <a:rPr sz="3000" b="1">
                 <a:solidFill>
                   <a:srgbClr val="FFFFFF"/>
                 </a:solidFill>
@@ -6506,14 +6506,14 @@
               </a:spcAft>
             </a:pPr>
             <a:r>
-              <a:rPr sz="2200" b="1" i="0">
+              <a:rPr sz="2200" b="1">
                 <a:solidFill>
                   <a:srgbClr val="1F3A5F"/>
                 </a:solidFill>
                 <a:latin typeface="Microsoft YaHei"/>
                 <a:ea typeface="Microsoft YaHei"/>
               </a:rPr>
-              <a:t>•  </a:t>
+              <a:t>•  多数类基线：accuracy 0.50 ｜ 误报 150</a:t>
             </a:r>
           </a:p>
           <a:p>
@@ -6523,14 +6523,14 @@
               </a:spcAft>
             </a:pPr>
             <a:r>
-              <a:rPr sz="2200" b="1" i="0">
+              <a:rPr sz="2200" b="1">
                 <a:solidFill>
                   <a:srgbClr val="1F3A5F"/>
                 </a:solidFill>
                 <a:latin typeface="Microsoft YaHei"/>
                 <a:ea typeface="Microsoft YaHei"/>
               </a:rPr>
-              <a:t>•  </a:t>
+              <a:t>•  SmallCNN（8ep）：accuracy 0.943 ｜ 漏检 14 ｜ 误报 3</a:t>
             </a:r>
           </a:p>
           <a:p>
@@ -6540,14 +6540,14 @@
               </a:spcAft>
             </a:pPr>
             <a:r>
-              <a:rPr sz="2000" b="0" i="0">
+              <a:rPr sz="2000" b="0">
                 <a:solidFill>
                   <a:srgbClr val="1F3A5F"/>
                 </a:solidFill>
                 <a:latin typeface="Microsoft YaHei"/>
                 <a:ea typeface="Microsoft YaHei"/>
               </a:rPr>
-              <a:t>•  </a:t>
+              <a:t>•  误报大幅下降，漏检明显减少，筛查器可用</a:t>
             </a:r>
           </a:p>
         </p:txBody>
@@ -6576,7 +6576,7 @@
           <a:p>
             <a:pPr algn="r"/>
             <a:r>
-              <a:rPr sz="1200" b="0" i="0">
+              <a:rPr sz="1200" b="0">
                 <a:solidFill>
                   <a:srgbClr val="4A4A4A"/>
                 </a:solidFill>
@@ -6673,7 +6673,7 @@
           <a:lstStyle/>
           <a:p>
             <a:r>
-              <a:rPr sz="3000" b="1" i="0">
+              <a:rPr sz="3000" b="1">
                 <a:solidFill>
                   <a:srgbClr val="FFFFFF"/>
                 </a:solidFill>
@@ -6757,14 +6757,14 @@
               </a:spcAft>
             </a:pPr>
             <a:r>
-              <a:rPr sz="2200" b="1" i="0">
+              <a:rPr sz="2200" b="1">
                 <a:solidFill>
                   <a:srgbClr val="1F3A5F"/>
                 </a:solidFill>
                 <a:latin typeface="Microsoft YaHei"/>
                 <a:ea typeface="Microsoft YaHei"/>
               </a:rPr>
-              <a:t>•  </a:t>
+              <a:t>•  CNN 8ep：accuracy 0.943</a:t>
             </a:r>
           </a:p>
           <a:p>
@@ -6774,14 +6774,14 @@
               </a:spcAft>
             </a:pPr>
             <a:r>
-              <a:rPr sz="2000" b="0" i="0">
+              <a:rPr sz="2000" b="0">
                 <a:solidFill>
                   <a:srgbClr val="1F3A5F"/>
                 </a:solidFill>
                 <a:latin typeface="Microsoft YaHei"/>
                 <a:ea typeface="Microsoft YaHei"/>
               </a:rPr>
-              <a:t>•  </a:t>
+              <a:t>•  漏检 14 ｜ 误报 3（基线误报 150）</a:t>
             </a:r>
           </a:p>
           <a:p>
@@ -6791,14 +6791,14 @@
               </a:spcAft>
             </a:pPr>
             <a:r>
-              <a:rPr sz="2000" b="0" i="0">
+              <a:rPr sz="2000" b="0">
                 <a:solidFill>
                   <a:srgbClr val="1F3A5F"/>
                 </a:solidFill>
                 <a:latin typeface="Microsoft YaHei"/>
                 <a:ea typeface="Microsoft YaHei"/>
               </a:rPr>
-              <a:t>•  </a:t>
+              <a:t>•  train_loss 0.68 → 0.20（明显收敛）</a:t>
             </a:r>
           </a:p>
           <a:p>
@@ -6808,14 +6808,14 @@
               </a:spcAft>
             </a:pPr>
             <a:r>
-              <a:rPr sz="1800" b="0" i="0">
+              <a:rPr sz="1800" b="0">
                 <a:solidFill>
                   <a:srgbClr val="1F3A5F"/>
                 </a:solidFill>
                 <a:latin typeface="Microsoft YaHei"/>
                 <a:ea typeface="Microsoft YaHei"/>
               </a:rPr>
-              <a:t>•  </a:t>
+              <a:t>•  900 训练 / 300 测试，可复现</a:t>
             </a:r>
           </a:p>
         </p:txBody>
@@ -6844,7 +6844,7 @@
           <a:p>
             <a:pPr algn="r"/>
             <a:r>
-              <a:rPr sz="1200" b="0" i="0">
+              <a:rPr sz="1200" b="0">
                 <a:solidFill>
                   <a:srgbClr val="4A4A4A"/>
                 </a:solidFill>
@@ -6941,7 +6941,7 @@
           <a:lstStyle/>
           <a:p>
             <a:r>
-              <a:rPr sz="3000" b="1" i="0">
+              <a:rPr sz="3000" b="1">
                 <a:solidFill>
                   <a:srgbClr val="FFFFFF"/>
                 </a:solidFill>
@@ -7025,14 +7025,14 @@
               </a:spcAft>
             </a:pPr>
             <a:r>
-              <a:rPr sz="2000" b="1" i="0">
+              <a:rPr sz="2000" b="1">
                 <a:solidFill>
                   <a:srgbClr val="1F3A5F"/>
                 </a:solidFill>
                 <a:latin typeface="Microsoft YaHei"/>
                 <a:ea typeface="Microsoft YaHei"/>
               </a:rPr>
-              <a:t>•  </a:t>
+              <a:t>•  样本：data/raw/Positive/04283.jpg</a:t>
             </a:r>
           </a:p>
           <a:p>
@@ -7042,14 +7042,14 @@
               </a:spcAft>
             </a:pPr>
             <a:r>
-              <a:rPr sz="2000" b="0" i="0">
+              <a:rPr sz="2000" b="0">
                 <a:solidFill>
                   <a:srgbClr val="1F3A5F"/>
                 </a:solidFill>
                 <a:latin typeface="Microsoft YaHei"/>
                 <a:ea typeface="Microsoft YaHei"/>
               </a:rPr>
-              <a:t>•  </a:t>
+              <a:t>•  真实结果：crack；系统输出：no_crack（漏检）</a:t>
             </a:r>
           </a:p>
           <a:p>
@@ -7059,14 +7059,14 @@
               </a:spcAft>
             </a:pPr>
             <a:r>
-              <a:rPr sz="2000" b="0" i="0">
+              <a:rPr sz="2000" b="0">
                 <a:solidFill>
                   <a:srgbClr val="1F3A5F"/>
                 </a:solidFill>
                 <a:latin typeface="Microsoft YaHei"/>
                 <a:ea typeface="Microsoft YaHei"/>
               </a:rPr>
-              <a:t>•  </a:t>
+              <a:t>•  在 2ep 与 8ep 中均被漏检，是持续困难的样本</a:t>
             </a:r>
           </a:p>
           <a:p>
@@ -7076,14 +7076,14 @@
               </a:spcAft>
             </a:pPr>
             <a:r>
-              <a:rPr sz="2000" b="1" i="0">
+              <a:rPr sz="2000" b="1">
                 <a:solidFill>
                   <a:srgbClr val="1F3A5F"/>
                 </a:solidFill>
                 <a:latin typeface="Microsoft YaHei"/>
                 <a:ea typeface="Microsoft YaHei"/>
               </a:rPr>
-              <a:t>•  </a:t>
+              <a:t>•  漏检是筛查场景最危险的错误</a:t>
             </a:r>
           </a:p>
         </p:txBody>
@@ -7112,7 +7112,7 @@
           <a:p>
             <a:pPr algn="r"/>
             <a:r>
-              <a:rPr sz="1200" b="0" i="0">
+              <a:rPr sz="1200" b="0">
                 <a:solidFill>
                   <a:srgbClr val="4A4A4A"/>
                 </a:solidFill>

--- a/presentation.pptx
+++ b/presentation.pptx
@@ -512,7 +512,7 @@
           <a:lstStyle/>
           <a:p>
             <a:r>
-              <a:t>大家好，我们是好难起名组。今天汇报混凝土裂缝初步筛查器：比较多数类基线与小型 CNN，重点检查漏检裂缝。</a:t>
+              <a:t>大家好，我们是好难起名组。今天汇报混凝土裂缝筛查器：比较多数类基线与我们的小型 CNN，重点看漏检裂缝。</a:t>
             </a:r>
           </a:p>
         </p:txBody>
@@ -582,7 +582,7 @@
           <a:lstStyle/>
           <a:p>
             <a:r>
-              <a:t>CNN 仍漏检 14 张裂缝。它只能安排复核顺序，不能替代现场检查或工程判断；切块数据有泄漏，数字偏乐观。</a:t>
+              <a:t>要强调限制：CNN 仍漏检 14 张裂缝。它只能安排复核顺序，不能替代现场检查或工程判断；切块数据有泄漏，数字可能偏乐观，需谨慎解读。</a:t>
             </a:r>
           </a:p>
         </p:txBody>
@@ -652,7 +652,7 @@
           <a:lstStyle/>
           <a:p>
             <a:r>
-              <a:t>总结：CNN 明显优于基线，大幅减少复核量。下一步看漏检图像共性，再考虑数据增强。谢谢大家。</a:t>
+              <a:t>总结：CNN 明显优于基线，大幅减少人工复核量。下一步看漏检图像的共性，比如亮度、裂缝粗细，再考虑数据增强。谢谢大家。</a:t>
             </a:r>
           </a:p>
         </p:txBody>
@@ -722,7 +722,7 @@
           <a:lstStyle/>
           <a:p>
             <a:r>
-              <a:t>使用者先大量拍照再人工复核，非常耗时。我们输出疑似裂缝和无裂缝，帮维护人员优先复核，且只用于排序，不替代现场检查。</a:t>
+              <a:t>使用者先大量拍照再人工复核，很耗时。我们输出疑似裂缝和无裂缝，帮维护人员优先复核。它只用于复核排序，不能替代现场检查，最危险的是漏检裂缝。</a:t>
             </a:r>
           </a:p>
         </p:txBody>
@@ -792,7 +792,7 @@
           <a:lstStyle/>
           <a:p>
             <a:r>
-              <a:t>数据来自 Kaggle 的 Surface Crack Detection，正负类各两万张，--check-data 验证通过。注意是切块生成，有泄漏风险。</a:t>
+              <a:t>数据来自 Kaggle，正负类各两万张，--check-data 验证通过。注意它由高分辨率图切块生成，随机拆分有泄漏风险，数字偏乐观。</a:t>
             </a:r>
           </a:p>
         </p:txBody>
@@ -862,7 +862,7 @@
           <a:lstStyle/>
           <a:p>
             <a:r>
-              <a:t>先用多数类基线：所有图判为裂缝。准确率仅 0.5，误报 150 张无裂缝图，几乎不可用，是改进的起点。</a:t>
+              <a:t>先看多数类基线：把测试集所有图判为裂缝。准确率仅 0.5，误报 150 张无裂缝图，几乎不可用，这成为我们改进的起点。</a:t>
             </a:r>
           </a:p>
         </p:txBody>
@@ -932,7 +932,7 @@
           <a:lstStyle/>
           <a:p>
             <a:r>
-              <a:t>候选是自实现的 SmallCNN：两层卷积加池化再接全连接，输入 64×64 彩色图，输出两类。只改模型，未动数据、指标与流程。</a:t>
+              <a:t>候选是我们实现的 SmallCNN：两层卷积加池化再接全连接，输入 64×64 彩色图。我们只改模型，数据、划分、指标和训练流程都不动，保证对比公平。</a:t>
             </a:r>
           </a:p>
         </p:txBody>
@@ -1002,7 +1002,7 @@
           <a:lstStyle/>
           <a:p>
             <a:r>
-              <a:t>训练每类最多 600 张，75/25 划分，seed 2026，共 900 训练、300 测试。8 个 epoch，Adam 与交叉熵损失。</a:t>
+              <a:t>训练每类最多取 600 张，75 比 25 划分，seed 2026，共 900 训练、300 测试。训练 8 个 epoch，用 Adam 和交叉熵损失。</a:t>
             </a:r>
           </a:p>
         </p:txBody>
@@ -1072,7 +1072,7 @@
           <a:lstStyle/>
           <a:p>
             <a:r>
-              <a:t>核心对比：基线准确率 0.5、误报 150；CNN 准确率 0.943、漏检 14、误报仅 3，误报与漏检都明显改善。</a:t>
+              <a:t>核心对比：基线准确率 0.5、误报 150；CNN 准确率 0.943、漏检 14、误报仅 3。误报和漏检都明显下降，筛查器可行。</a:t>
             </a:r>
           </a:p>
         </p:txBody>
@@ -1142,7 +1142,7 @@
           <a:lstStyle/>
           <a:p>
             <a:r>
-              <a:t>最重要证据：CNN 8ep 准确率 0.943，漏检 14、误报 3，训练损失从 0.68 降到 0.20，收敛良好且可复现。</a:t>
+              <a:t>最重要证据：CNN 8 个 epoch 后准确率 0.943，漏检 14、误报 3，损失从 0.68 降到 0.20。这些数字都能由 README 命令复现。</a:t>
             </a:r>
           </a:p>
         </p:txBody>
@@ -1212,7 +1212,7 @@
           <a:lstStyle/>
           <a:p>
             <a:r>
-              <a:t>这是被漏检的真实裂缝，模型判为无裂缝，2ep 与 8ep 都漏检。漏检还没清零，是筛查最危险的地方。</a:t>
+              <a:t>这个案例是一张被漏检的真实裂缝，模型判为无裂缝，2 个和 8 个 epoch 都被漏检。说明漏检没清零，而漏检正是筛查最危险的错误。</a:t>
             </a:r>
           </a:p>
         </p:txBody>

--- a/presentation.pptx
+++ b/presentation.pptx
@@ -10,12 +10,6 @@
     <p:sldId id="258" r:id="rId10"/>
     <p:sldId id="259" r:id="rId11"/>
     <p:sldId id="260" r:id="rId12"/>
-    <p:sldId id="261" r:id="rId13"/>
-    <p:sldId id="262" r:id="rId14"/>
-    <p:sldId id="263" r:id="rId15"/>
-    <p:sldId id="264" r:id="rId16"/>
-    <p:sldId id="265" r:id="rId17"/>
-    <p:sldId id="266" r:id="rId18"/>
   </p:sldIdLst>
   <p:sldSz cx="12191695" cy="6858000" type="screen4x3"/>
   <p:notesSz cx="6858000" cy="9144000"/>
@@ -537,146 +531,6 @@
 </p:notes>
 </file>
 
-<file path=ppt/notesSlides/notesSlide10.xml><?xml version="1.0" encoding="utf-8"?>
-<p:notes xmlns:a="http://schemas.openxmlformats.org/drawingml/2006/main" xmlns:p="http://schemas.openxmlformats.org/presentationml/2006/main" xmlns:r="http://schemas.openxmlformats.org/officeDocument/2006/relationships">
-  <p:cSld>
-    <p:spTree>
-      <p:nvGrpSpPr>
-        <p:cNvPr id="1" name=""/>
-        <p:cNvGrpSpPr/>
-        <p:nvPr/>
-      </p:nvGrpSpPr>
-      <p:grpSpPr>
-        <a:xfrm>
-          <a:off x="0" y="0"/>
-          <a:ext cx="0" cy="0"/>
-          <a:chOff x="0" y="0"/>
-          <a:chExt cx="0" cy="0"/>
-        </a:xfrm>
-      </p:grpSpPr>
-      <p:sp>
-        <p:nvSpPr>
-          <p:cNvPr id="2" name="Slide Image Placeholder 1"/>
-          <p:cNvSpPr>
-            <a:spLocks noGrp="1"/>
-          </p:cNvSpPr>
-          <p:nvPr>
-            <p:ph type="sldImg" idx="2"/>
-          </p:nvPr>
-        </p:nvSpPr>
-        <p:spPr/>
-      </p:sp>
-      <p:sp>
-        <p:nvSpPr>
-          <p:cNvPr id="3" name="Notes Placeholder 2"/>
-          <p:cNvSpPr>
-            <a:spLocks noGrp="1"/>
-          </p:cNvSpPr>
-          <p:nvPr>
-            <p:ph type="body" idx="3" sz="quarter"/>
-          </p:nvPr>
-        </p:nvSpPr>
-        <p:spPr/>
-        <p:txBody>
-          <a:bodyPr/>
-          <a:lstStyle/>
-          <a:p>
-            <a:r>
-              <a:t>要强调限制：CNN 仍漏检 14 张裂缝。它只能安排复核顺序，不能替代现场检查或工程判断；切块数据有泄漏，数字可能偏乐观，需谨慎解读。</a:t>
-            </a:r>
-          </a:p>
-        </p:txBody>
-      </p:sp>
-      <p:sp>
-        <p:nvSpPr>
-          <p:cNvPr id="4" name="Slide Number Placeholder 3"/>
-          <p:cNvSpPr>
-            <a:spLocks noGrp="1"/>
-          </p:cNvSpPr>
-          <p:nvPr>
-            <p:ph type="sldNum" idx="5" sz="quarter"/>
-          </p:nvPr>
-        </p:nvSpPr>
-        <p:spPr/>
-      </p:sp>
-    </p:spTree>
-  </p:cSld>
-  <p:clrMapOvr>
-    <a:masterClrMapping/>
-  </p:clrMapOvr>
-</p:notes>
-</file>
-
-<file path=ppt/notesSlides/notesSlide11.xml><?xml version="1.0" encoding="utf-8"?>
-<p:notes xmlns:a="http://schemas.openxmlformats.org/drawingml/2006/main" xmlns:p="http://schemas.openxmlformats.org/presentationml/2006/main" xmlns:r="http://schemas.openxmlformats.org/officeDocument/2006/relationships">
-  <p:cSld>
-    <p:spTree>
-      <p:nvGrpSpPr>
-        <p:cNvPr id="1" name=""/>
-        <p:cNvGrpSpPr/>
-        <p:nvPr/>
-      </p:nvGrpSpPr>
-      <p:grpSpPr>
-        <a:xfrm>
-          <a:off x="0" y="0"/>
-          <a:ext cx="0" cy="0"/>
-          <a:chOff x="0" y="0"/>
-          <a:chExt cx="0" cy="0"/>
-        </a:xfrm>
-      </p:grpSpPr>
-      <p:sp>
-        <p:nvSpPr>
-          <p:cNvPr id="2" name="Slide Image Placeholder 1"/>
-          <p:cNvSpPr>
-            <a:spLocks noGrp="1"/>
-          </p:cNvSpPr>
-          <p:nvPr>
-            <p:ph type="sldImg" idx="2"/>
-          </p:nvPr>
-        </p:nvSpPr>
-        <p:spPr/>
-      </p:sp>
-      <p:sp>
-        <p:nvSpPr>
-          <p:cNvPr id="3" name="Notes Placeholder 2"/>
-          <p:cNvSpPr>
-            <a:spLocks noGrp="1"/>
-          </p:cNvSpPr>
-          <p:nvPr>
-            <p:ph type="body" idx="3" sz="quarter"/>
-          </p:nvPr>
-        </p:nvSpPr>
-        <p:spPr/>
-        <p:txBody>
-          <a:bodyPr/>
-          <a:lstStyle/>
-          <a:p>
-            <a:r>
-              <a:t>总结：CNN 明显优于基线，大幅减少人工复核量。下一步看漏检图像的共性，比如亮度、裂缝粗细，再考虑数据增强。谢谢大家。</a:t>
-            </a:r>
-          </a:p>
-        </p:txBody>
-      </p:sp>
-      <p:sp>
-        <p:nvSpPr>
-          <p:cNvPr id="4" name="Slide Number Placeholder 3"/>
-          <p:cNvSpPr>
-            <a:spLocks noGrp="1"/>
-          </p:cNvSpPr>
-          <p:nvPr>
-            <p:ph type="sldNum" idx="5" sz="quarter"/>
-          </p:nvPr>
-        </p:nvSpPr>
-        <p:spPr/>
-      </p:sp>
-    </p:spTree>
-  </p:cSld>
-  <p:clrMapOvr>
-    <a:masterClrMapping/>
-  </p:clrMapOvr>
-</p:notes>
-</file>
-
 <file path=ppt/notesSlides/notesSlide2.xml><?xml version="1.0" encoding="utf-8"?>
 <p:notes xmlns:a="http://schemas.openxmlformats.org/drawingml/2006/main" xmlns:p="http://schemas.openxmlformats.org/presentationml/2006/main" xmlns:r="http://schemas.openxmlformats.org/officeDocument/2006/relationships">
   <p:cSld>
@@ -722,7 +576,7 @@
           <a:lstStyle/>
           <a:p>
             <a:r>
-              <a:t>使用者先大量拍照再人工复核，很耗时。我们输出疑似裂缝和无裂缝，帮维护人员优先复核。它只用于复核排序，不能替代现场检查，最危险的是漏检裂缝。</a:t>
+              <a:t>使用者的工作流程是先大量拍照、再人工复核，非常耗时。我们的真实输入是混凝土表面照片，输出是疑似裂缝和无裂缝两类，帮助维护人员优先复核疑似裂缝的照片，减少无效复核量。需要强调，这个筛查器只用于排序复核优先级，不能替代现场检查、工程师判断或结构安全决策。在所有错误里，最危险的是漏检裂缝：真实裂缝被标成无裂缝，就不会被送去复核，可能造成漏检。</a:t>
             </a:r>
           </a:p>
         </p:txBody>
@@ -792,7 +646,7 @@
           <a:lstStyle/>
           <a:p>
             <a:r>
-              <a:t>数据来自 Kaggle，正负类各两万张，--check-data 验证通过。注意它由高分辨率图切块生成，随机拆分有泄漏风险，数字偏乐观。</a:t>
+              <a:t>真实数据来自 Kaggle 的 Surface Crack Detection，正负类各两万张，用 --check-data 验证通过。我们先用最简单的多数类基线：把所有图都判为裂缝，准确率只有 0.5，误报了 150 张无裂缝图，几乎不可用。候选方法是我们自己实现的 SmallCNN，两层卷积加池化再接全连接，输入 64×64 彩色图，输出两类。我们只改了模型，数据划分、指标和训练流程都不动，保证对比公平。</a:t>
             </a:r>
           </a:p>
         </p:txBody>
@@ -862,7 +716,7 @@
           <a:lstStyle/>
           <a:p>
             <a:r>
-              <a:t>先看多数类基线：把测试集所有图判为裂缝。准确率仅 0.5，误报 150 张无裂缝图，几乎不可用，这成为我们改进的起点。</a:t>
+              <a:t>训练时每类最多取 600 张，75 比 25 划分，seed 2026，共 900 训练、300 测试，训练 8 个 epoch。结果上，基线准确率 0.5、误报 150；CNN 准确率 0.943、漏检 14、误报只有 3，误报和漏检都明显下降。最重要的一条证据是 CNN 训练损失从 0.68 降到 0.20，说明模型收敛良好，这些数字都能由 README 命令复现。</a:t>
             </a:r>
           </a:p>
         </p:txBody>
@@ -932,287 +786,7 @@
           <a:lstStyle/>
           <a:p>
             <a:r>
-              <a:t>候选是我们实现的 SmallCNN：两层卷积加池化再接全连接，输入 64×64 彩色图。我们只改模型，数据、划分、指标和训练流程都不动，保证对比公平。</a:t>
-            </a:r>
-          </a:p>
-        </p:txBody>
-      </p:sp>
-      <p:sp>
-        <p:nvSpPr>
-          <p:cNvPr id="4" name="Slide Number Placeholder 3"/>
-          <p:cNvSpPr>
-            <a:spLocks noGrp="1"/>
-          </p:cNvSpPr>
-          <p:nvPr>
-            <p:ph type="sldNum" idx="5" sz="quarter"/>
-          </p:nvPr>
-        </p:nvSpPr>
-        <p:spPr/>
-      </p:sp>
-    </p:spTree>
-  </p:cSld>
-  <p:clrMapOvr>
-    <a:masterClrMapping/>
-  </p:clrMapOvr>
-</p:notes>
-</file>
-
-<file path=ppt/notesSlides/notesSlide6.xml><?xml version="1.0" encoding="utf-8"?>
-<p:notes xmlns:a="http://schemas.openxmlformats.org/drawingml/2006/main" xmlns:p="http://schemas.openxmlformats.org/presentationml/2006/main" xmlns:r="http://schemas.openxmlformats.org/officeDocument/2006/relationships">
-  <p:cSld>
-    <p:spTree>
-      <p:nvGrpSpPr>
-        <p:cNvPr id="1" name=""/>
-        <p:cNvGrpSpPr/>
-        <p:nvPr/>
-      </p:nvGrpSpPr>
-      <p:grpSpPr>
-        <a:xfrm>
-          <a:off x="0" y="0"/>
-          <a:ext cx="0" cy="0"/>
-          <a:chOff x="0" y="0"/>
-          <a:chExt cx="0" cy="0"/>
-        </a:xfrm>
-      </p:grpSpPr>
-      <p:sp>
-        <p:nvSpPr>
-          <p:cNvPr id="2" name="Slide Image Placeholder 1"/>
-          <p:cNvSpPr>
-            <a:spLocks noGrp="1"/>
-          </p:cNvSpPr>
-          <p:nvPr>
-            <p:ph type="sldImg" idx="2"/>
-          </p:nvPr>
-        </p:nvSpPr>
-        <p:spPr/>
-      </p:sp>
-      <p:sp>
-        <p:nvSpPr>
-          <p:cNvPr id="3" name="Notes Placeholder 2"/>
-          <p:cNvSpPr>
-            <a:spLocks noGrp="1"/>
-          </p:cNvSpPr>
-          <p:nvPr>
-            <p:ph type="body" idx="3" sz="quarter"/>
-          </p:nvPr>
-        </p:nvSpPr>
-        <p:spPr/>
-        <p:txBody>
-          <a:bodyPr/>
-          <a:lstStyle/>
-          <a:p>
-            <a:r>
-              <a:t>训练每类最多取 600 张，75 比 25 划分，seed 2026，共 900 训练、300 测试。训练 8 个 epoch，用 Adam 和交叉熵损失。</a:t>
-            </a:r>
-          </a:p>
-        </p:txBody>
-      </p:sp>
-      <p:sp>
-        <p:nvSpPr>
-          <p:cNvPr id="4" name="Slide Number Placeholder 3"/>
-          <p:cNvSpPr>
-            <a:spLocks noGrp="1"/>
-          </p:cNvSpPr>
-          <p:nvPr>
-            <p:ph type="sldNum" idx="5" sz="quarter"/>
-          </p:nvPr>
-        </p:nvSpPr>
-        <p:spPr/>
-      </p:sp>
-    </p:spTree>
-  </p:cSld>
-  <p:clrMapOvr>
-    <a:masterClrMapping/>
-  </p:clrMapOvr>
-</p:notes>
-</file>
-
-<file path=ppt/notesSlides/notesSlide7.xml><?xml version="1.0" encoding="utf-8"?>
-<p:notes xmlns:a="http://schemas.openxmlformats.org/drawingml/2006/main" xmlns:p="http://schemas.openxmlformats.org/presentationml/2006/main" xmlns:r="http://schemas.openxmlformats.org/officeDocument/2006/relationships">
-  <p:cSld>
-    <p:spTree>
-      <p:nvGrpSpPr>
-        <p:cNvPr id="1" name=""/>
-        <p:cNvGrpSpPr/>
-        <p:nvPr/>
-      </p:nvGrpSpPr>
-      <p:grpSpPr>
-        <a:xfrm>
-          <a:off x="0" y="0"/>
-          <a:ext cx="0" cy="0"/>
-          <a:chOff x="0" y="0"/>
-          <a:chExt cx="0" cy="0"/>
-        </a:xfrm>
-      </p:grpSpPr>
-      <p:sp>
-        <p:nvSpPr>
-          <p:cNvPr id="2" name="Slide Image Placeholder 1"/>
-          <p:cNvSpPr>
-            <a:spLocks noGrp="1"/>
-          </p:cNvSpPr>
-          <p:nvPr>
-            <p:ph type="sldImg" idx="2"/>
-          </p:nvPr>
-        </p:nvSpPr>
-        <p:spPr/>
-      </p:sp>
-      <p:sp>
-        <p:nvSpPr>
-          <p:cNvPr id="3" name="Notes Placeholder 2"/>
-          <p:cNvSpPr>
-            <a:spLocks noGrp="1"/>
-          </p:cNvSpPr>
-          <p:nvPr>
-            <p:ph type="body" idx="3" sz="quarter"/>
-          </p:nvPr>
-        </p:nvSpPr>
-        <p:spPr/>
-        <p:txBody>
-          <a:bodyPr/>
-          <a:lstStyle/>
-          <a:p>
-            <a:r>
-              <a:t>核心对比：基线准确率 0.5、误报 150；CNN 准确率 0.943、漏检 14、误报仅 3。误报和漏检都明显下降，筛查器可行。</a:t>
-            </a:r>
-          </a:p>
-        </p:txBody>
-      </p:sp>
-      <p:sp>
-        <p:nvSpPr>
-          <p:cNvPr id="4" name="Slide Number Placeholder 3"/>
-          <p:cNvSpPr>
-            <a:spLocks noGrp="1"/>
-          </p:cNvSpPr>
-          <p:nvPr>
-            <p:ph type="sldNum" idx="5" sz="quarter"/>
-          </p:nvPr>
-        </p:nvSpPr>
-        <p:spPr/>
-      </p:sp>
-    </p:spTree>
-  </p:cSld>
-  <p:clrMapOvr>
-    <a:masterClrMapping/>
-  </p:clrMapOvr>
-</p:notes>
-</file>
-
-<file path=ppt/notesSlides/notesSlide8.xml><?xml version="1.0" encoding="utf-8"?>
-<p:notes xmlns:a="http://schemas.openxmlformats.org/drawingml/2006/main" xmlns:p="http://schemas.openxmlformats.org/presentationml/2006/main" xmlns:r="http://schemas.openxmlformats.org/officeDocument/2006/relationships">
-  <p:cSld>
-    <p:spTree>
-      <p:nvGrpSpPr>
-        <p:cNvPr id="1" name=""/>
-        <p:cNvGrpSpPr/>
-        <p:nvPr/>
-      </p:nvGrpSpPr>
-      <p:grpSpPr>
-        <a:xfrm>
-          <a:off x="0" y="0"/>
-          <a:ext cx="0" cy="0"/>
-          <a:chOff x="0" y="0"/>
-          <a:chExt cx="0" cy="0"/>
-        </a:xfrm>
-      </p:grpSpPr>
-      <p:sp>
-        <p:nvSpPr>
-          <p:cNvPr id="2" name="Slide Image Placeholder 1"/>
-          <p:cNvSpPr>
-            <a:spLocks noGrp="1"/>
-          </p:cNvSpPr>
-          <p:nvPr>
-            <p:ph type="sldImg" idx="2"/>
-          </p:nvPr>
-        </p:nvSpPr>
-        <p:spPr/>
-      </p:sp>
-      <p:sp>
-        <p:nvSpPr>
-          <p:cNvPr id="3" name="Notes Placeholder 2"/>
-          <p:cNvSpPr>
-            <a:spLocks noGrp="1"/>
-          </p:cNvSpPr>
-          <p:nvPr>
-            <p:ph type="body" idx="3" sz="quarter"/>
-          </p:nvPr>
-        </p:nvSpPr>
-        <p:spPr/>
-        <p:txBody>
-          <a:bodyPr/>
-          <a:lstStyle/>
-          <a:p>
-            <a:r>
-              <a:t>最重要证据：CNN 8 个 epoch 后准确率 0.943，漏检 14、误报 3，损失从 0.68 降到 0.20。这些数字都能由 README 命令复现。</a:t>
-            </a:r>
-          </a:p>
-        </p:txBody>
-      </p:sp>
-      <p:sp>
-        <p:nvSpPr>
-          <p:cNvPr id="4" name="Slide Number Placeholder 3"/>
-          <p:cNvSpPr>
-            <a:spLocks noGrp="1"/>
-          </p:cNvSpPr>
-          <p:nvPr>
-            <p:ph type="sldNum" idx="5" sz="quarter"/>
-          </p:nvPr>
-        </p:nvSpPr>
-        <p:spPr/>
-      </p:sp>
-    </p:spTree>
-  </p:cSld>
-  <p:clrMapOvr>
-    <a:masterClrMapping/>
-  </p:clrMapOvr>
-</p:notes>
-</file>
-
-<file path=ppt/notesSlides/notesSlide9.xml><?xml version="1.0" encoding="utf-8"?>
-<p:notes xmlns:a="http://schemas.openxmlformats.org/drawingml/2006/main" xmlns:p="http://schemas.openxmlformats.org/presentationml/2006/main" xmlns:r="http://schemas.openxmlformats.org/officeDocument/2006/relationships">
-  <p:cSld>
-    <p:spTree>
-      <p:nvGrpSpPr>
-        <p:cNvPr id="1" name=""/>
-        <p:cNvGrpSpPr/>
-        <p:nvPr/>
-      </p:nvGrpSpPr>
-      <p:grpSpPr>
-        <a:xfrm>
-          <a:off x="0" y="0"/>
-          <a:ext cx="0" cy="0"/>
-          <a:chOff x="0" y="0"/>
-          <a:chExt cx="0" cy="0"/>
-        </a:xfrm>
-      </p:grpSpPr>
-      <p:sp>
-        <p:nvSpPr>
-          <p:cNvPr id="2" name="Slide Image Placeholder 1"/>
-          <p:cNvSpPr>
-            <a:spLocks noGrp="1"/>
-          </p:cNvSpPr>
-          <p:nvPr>
-            <p:ph type="sldImg" idx="2"/>
-          </p:nvPr>
-        </p:nvSpPr>
-        <p:spPr/>
-      </p:sp>
-      <p:sp>
-        <p:nvSpPr>
-          <p:cNvPr id="3" name="Notes Placeholder 2"/>
-          <p:cNvSpPr>
-            <a:spLocks noGrp="1"/>
-          </p:cNvSpPr>
-          <p:nvPr>
-            <p:ph type="body" idx="3" sz="quarter"/>
-          </p:nvPr>
-        </p:nvSpPr>
-        <p:spPr/>
-        <p:txBody>
-          <a:bodyPr/>
-          <a:lstStyle/>
-          <a:p>
-            <a:r>
-              <a:t>这个案例是一张被漏检的真实裂缝，模型判为无裂缝，2 个和 8 个 epoch 都被漏检。说明漏检没清零，而漏检正是筛查最危险的错误。</a:t>
+              <a:t>要强调限制：CNN 仍漏检 14 张裂缝，比如这张被漏检的真实裂缝，2 个和 8 个 epoch 都被漏检，说明漏检还没清零。而且筛查器只能安排复核顺序，不能替代现场检查或工程判断；切块数据有泄漏，数字可能偏乐观。总结：CNN 明显优于基线，大幅减少人工复核量。下一步看漏检图像共性，比如亮度、裂缝粗细，再考虑数据增强。谢谢大家。</a:t>
             </a:r>
           </a:p>
         </p:txBody>
@@ -4435,7 +4009,7 @@
 </p:sld>
 </file>
 
-<file path=ppt/slides/slide10.xml><?xml version="1.0" encoding="utf-8"?>
+<file path=ppt/slides/slide2.xml><?xml version="1.0" encoding="utf-8"?>
 <p:sld xmlns:a="http://schemas.openxmlformats.org/drawingml/2006/main" xmlns:p="http://schemas.openxmlformats.org/presentationml/2006/main" xmlns:r="http://schemas.openxmlformats.org/officeDocument/2006/relationships">
   <p:cSld>
     <p:spTree>
@@ -4519,7 +4093,7 @@
                 <a:latin typeface="Microsoft YaHei"/>
                 <a:ea typeface="Microsoft YaHei"/>
               </a:rPr>
-              <a:t>失败与限制</a:t>
+              <a:t>问题与使用者</a:t>
             </a:r>
           </a:p>
         </p:txBody>
@@ -4592,7 +4166,7 @@
           <a:p>
             <a:pPr>
               <a:spcAft>
-                <a:spcPts val="1000"/>
+                <a:spcPts val="1200"/>
               </a:spcAft>
             </a:pPr>
             <a:r>
@@ -4603,13 +4177,64 @@
                 <a:latin typeface="Microsoft YaHei"/>
                 <a:ea typeface="Microsoft YaHei"/>
               </a:rPr>
-              <a:t>•  CNN 8ep 仍漏检 14 张裂缝（2ep 为 43，已大幅改善但未清零）</a:t>
+              <a:t>•  使用者：设施维护团队（先大量拍照、再人工复核）</a:t>
             </a:r>
           </a:p>
           <a:p>
             <a:pPr>
               <a:spcAft>
-                <a:spcPts val="1000"/>
+                <a:spcPts val="1200"/>
+              </a:spcAft>
+            </a:pPr>
+            <a:r>
+              <a:rPr sz="2000" b="0">
+                <a:solidFill>
+                  <a:srgbClr val="1F3A5F"/>
+                </a:solidFill>
+                <a:latin typeface="Microsoft YaHei"/>
+                <a:ea typeface="Microsoft YaHei"/>
+              </a:rPr>
+              <a:t>•  输入：混凝土表面照片；输出：疑似裂缝 / 无裂缝</a:t>
+            </a:r>
+          </a:p>
+          <a:p>
+            <a:pPr>
+              <a:spcAft>
+                <a:spcPts val="1200"/>
+              </a:spcAft>
+            </a:pPr>
+            <a:r>
+              <a:rPr sz="2000" b="0">
+                <a:solidFill>
+                  <a:srgbClr val="1F3A5F"/>
+                </a:solidFill>
+                <a:latin typeface="Microsoft YaHei"/>
+                <a:ea typeface="Microsoft YaHei"/>
+              </a:rPr>
+              <a:t>•  用途：优先安排人工复核，减少无效复核量</a:t>
+            </a:r>
+          </a:p>
+          <a:p>
+            <a:pPr>
+              <a:spcAft>
+                <a:spcPts val="1200"/>
+              </a:spcAft>
+            </a:pPr>
+            <a:r>
+              <a:rPr sz="2000" b="0">
+                <a:solidFill>
+                  <a:srgbClr val="1F3A5F"/>
+                </a:solidFill>
+                <a:latin typeface="Microsoft YaHei"/>
+                <a:ea typeface="Microsoft YaHei"/>
+              </a:rPr>
+              <a:t>•  边界：只用于复核排序，不替代现场检查、工程师判断或安全决策</a:t>
+            </a:r>
+          </a:p>
+          <a:p>
+            <a:pPr>
+              <a:spcAft>
+                <a:spcPts val="1200"/>
               </a:spcAft>
             </a:pPr>
             <a:r>
@@ -4620,41 +4245,7 @@
                 <a:latin typeface="Microsoft YaHei"/>
                 <a:ea typeface="Microsoft YaHei"/>
               </a:rPr>
-              <a:t>•  不能替代现场检查 / 工程师判断 / 结构安全决策</a:t>
-            </a:r>
-          </a:p>
-          <a:p>
-            <a:pPr>
-              <a:spcAft>
-                <a:spcPts val="1000"/>
-              </a:spcAft>
-            </a:pPr>
-            <a:r>
-              <a:rPr sz="2000" b="0">
-                <a:solidFill>
-                  <a:srgbClr val="1F3A5F"/>
-                </a:solidFill>
-                <a:latin typeface="Microsoft YaHei"/>
-                <a:ea typeface="Microsoft YaHei"/>
-              </a:rPr>
-              <a:t>•  切块数据存在泄漏，数字可能偏乐观</a:t>
-            </a:r>
-          </a:p>
-          <a:p>
-            <a:pPr>
-              <a:spcAft>
-                <a:spcPts val="1000"/>
-              </a:spcAft>
-            </a:pPr>
-            <a:r>
-              <a:rPr sz="2000" b="0">
-                <a:solidFill>
-                  <a:srgbClr val="1F3A5F"/>
-                </a:solidFill>
-                <a:latin typeface="Microsoft YaHei"/>
-                <a:ea typeface="Microsoft YaHei"/>
-              </a:rPr>
-              <a:t>•  只用于安排人工复核排序</a:t>
+              <a:t>•  最危险的错误：漏检裂缝（真实裂缝被标成无裂缝，不会被送去复核）</a:t>
             </a:r>
           </a:p>
         </p:txBody>
@@ -4690,7 +4281,7 @@
                 <a:latin typeface="Microsoft YaHei"/>
                 <a:ea typeface="Microsoft YaHei"/>
               </a:rPr>
-              <a:t>10</a:t>
+              <a:t>02</a:t>
             </a:r>
           </a:p>
         </p:txBody>
@@ -4703,7 +4294,7 @@
 </p:sld>
 </file>
 
-<file path=ppt/slides/slide11.xml><?xml version="1.0" encoding="utf-8"?>
+<file path=ppt/slides/slide3.xml><?xml version="1.0" encoding="utf-8"?>
 <p:sld xmlns:a="http://schemas.openxmlformats.org/drawingml/2006/main" xmlns:p="http://schemas.openxmlformats.org/presentationml/2006/main" xmlns:r="http://schemas.openxmlformats.org/officeDocument/2006/relationships">
   <p:cSld>
     <p:spTree>
@@ -4787,7 +4378,7 @@
                 <a:latin typeface="Microsoft YaHei"/>
                 <a:ea typeface="Microsoft YaHei"/>
               </a:rPr>
-              <a:t>结论与下一步</a:t>
+              <a:t>真实数据与简单基线</a:t>
             </a:r>
           </a:p>
         </p:txBody>
@@ -4860,69 +4451,69 @@
           <a:p>
             <a:pPr>
               <a:spcAft>
-                <a:spcPts val="1000"/>
+                <a:spcPts val="1200"/>
               </a:spcAft>
             </a:pPr>
             <a:r>
-              <a:rPr sz="2000" b="1">
+              <a:rPr sz="1900" b="1">
                 <a:solidFill>
                   <a:srgbClr val="1F3A5F"/>
                 </a:solidFill>
                 <a:latin typeface="Microsoft YaHei"/>
                 <a:ea typeface="Microsoft YaHei"/>
               </a:rPr>
-              <a:t>•  结论：CNN 显著优于多数类基线，大幅减少人工复核量</a:t>
+              <a:t>•  数据：Kaggle Surface Crack Detection，Positive/Negative 各 20000 张</a:t>
             </a:r>
           </a:p>
           <a:p>
             <a:pPr>
               <a:spcAft>
-                <a:spcPts val="1000"/>
+                <a:spcPts val="1200"/>
               </a:spcAft>
             </a:pPr>
             <a:r>
-              <a:rPr sz="2000" b="0">
+              <a:rPr sz="1900" b="0">
                 <a:solidFill>
                   <a:srgbClr val="1F3A5F"/>
                 </a:solidFill>
                 <a:latin typeface="Microsoft YaHei"/>
                 <a:ea typeface="Microsoft YaHei"/>
               </a:rPr>
-              <a:t>•  下一步：查看漏检图像共性（亮度 / 裂缝粗细 / 对比度）</a:t>
+              <a:t>•  检查：python train.py --check-data → PASSED</a:t>
             </a:r>
           </a:p>
           <a:p>
             <a:pPr>
               <a:spcAft>
-                <a:spcPts val="1000"/>
+                <a:spcPts val="1200"/>
               </a:spcAft>
             </a:pPr>
             <a:r>
-              <a:rPr sz="2000" b="0">
+              <a:rPr sz="1900" b="0">
                 <a:solidFill>
                   <a:srgbClr val="1F3A5F"/>
                 </a:solidFill>
                 <a:latin typeface="Microsoft YaHei"/>
                 <a:ea typeface="Microsoft YaHei"/>
               </a:rPr>
-              <a:t>•  考虑针对性数据增强后再训练</a:t>
+              <a:t>•  基线：多数类——所有图判为裂缝，acc 0.50，误报 150</a:t>
             </a:r>
           </a:p>
           <a:p>
             <a:pPr>
               <a:spcAft>
-                <a:spcPts val="1000"/>
+                <a:spcPts val="1200"/>
               </a:spcAft>
             </a:pPr>
             <a:r>
-              <a:rPr sz="2200" b="1">
+              <a:rPr sz="1900" b="1">
                 <a:solidFill>
                   <a:srgbClr val="1F3A5F"/>
                 </a:solidFill>
                 <a:latin typeface="Microsoft YaHei"/>
                 <a:ea typeface="Microsoft YaHei"/>
               </a:rPr>
-              <a:t>•  谢谢！</a:t>
+              <a:t>•  结论：基线几乎不可用，必须学习特征</a:t>
             </a:r>
           </a:p>
         </p:txBody>
@@ -4958,7 +4549,7 @@
                 <a:latin typeface="Microsoft YaHei"/>
                 <a:ea typeface="Microsoft YaHei"/>
               </a:rPr>
-              <a:t>11</a:t>
+              <a:t>03</a:t>
             </a:r>
           </a:p>
         </p:txBody>
@@ -4971,7 +4562,7 @@
 </p:sld>
 </file>
 
-<file path=ppt/slides/slide2.xml><?xml version="1.0" encoding="utf-8"?>
+<file path=ppt/slides/slide4.xml><?xml version="1.0" encoding="utf-8"?>
 <p:sld xmlns:a="http://schemas.openxmlformats.org/drawingml/2006/main" xmlns:p="http://schemas.openxmlformats.org/presentationml/2006/main" xmlns:r="http://schemas.openxmlformats.org/officeDocument/2006/relationships">
   <p:cSld>
     <p:spTree>
@@ -5055,7 +4646,7 @@
                 <a:latin typeface="Microsoft YaHei"/>
                 <a:ea typeface="Microsoft YaHei"/>
               </a:rPr>
-              <a:t>问题与使用者</a:t>
+              <a:t>候选方法与结果</a:t>
             </a:r>
           </a:p>
         </p:txBody>
@@ -5128,7 +4719,41 @@
           <a:p>
             <a:pPr>
               <a:spcAft>
-                <a:spcPts val="1000"/>
+                <a:spcPts val="1200"/>
+              </a:spcAft>
+            </a:pPr>
+            <a:r>
+              <a:rPr sz="1900" b="1">
+                <a:solidFill>
+                  <a:srgbClr val="1F3A5F"/>
+                </a:solidFill>
+                <a:latin typeface="Microsoft YaHei"/>
+                <a:ea typeface="Microsoft YaHei"/>
+              </a:rPr>
+              <a:t>•  候选：SmallCNN（2 卷积 + 2 池化 + 线性）</a:t>
+            </a:r>
+          </a:p>
+          <a:p>
+            <a:pPr>
+              <a:spcAft>
+                <a:spcPts val="1200"/>
+              </a:spcAft>
+            </a:pPr>
+            <a:r>
+              <a:rPr sz="1900" b="0">
+                <a:solidFill>
+                  <a:srgbClr val="1F3A5F"/>
+                </a:solidFill>
+                <a:latin typeface="Microsoft YaHei"/>
+                <a:ea typeface="Microsoft YaHei"/>
+              </a:rPr>
+              <a:t>•  训练：600/类、75/25、seed 2026、8 epochs（900/300）</a:t>
+            </a:r>
+          </a:p>
+          <a:p>
+            <a:pPr>
+              <a:spcAft>
+                <a:spcPts val="1200"/>
               </a:spcAft>
             </a:pPr>
             <a:r>
@@ -5139,30 +4764,13 @@
                 <a:latin typeface="Microsoft YaHei"/>
                 <a:ea typeface="Microsoft YaHei"/>
               </a:rPr>
-              <a:t>•  使用者：设施维护团队</a:t>
+              <a:t>•  对比：基线 acc 0.50 ｜ CNN acc 0.943</a:t>
             </a:r>
           </a:p>
           <a:p>
             <a:pPr>
               <a:spcAft>
-                <a:spcPts val="1000"/>
-              </a:spcAft>
-            </a:pPr>
-            <a:r>
-              <a:rPr sz="2000" b="1">
-                <a:solidFill>
-                  <a:srgbClr val="1F3A5F"/>
-                </a:solidFill>
-                <a:latin typeface="Microsoft YaHei"/>
-                <a:ea typeface="Microsoft YaHei"/>
-              </a:rPr>
-              <a:t>•  真实输入：混凝土表面照片</a:t>
-            </a:r>
-          </a:p>
-          <a:p>
-            <a:pPr>
-              <a:spcAft>
-                <a:spcPts val="1000"/>
+                <a:spcPts val="1200"/>
               </a:spcAft>
             </a:pPr>
             <a:r>
@@ -5173,41 +4781,7 @@
                 <a:latin typeface="Microsoft YaHei"/>
                 <a:ea typeface="Microsoft YaHei"/>
               </a:rPr>
-              <a:t>•  需要的输出：疑似裂缝 / 无裂缝，用于安排人工复核的顺序</a:t>
-            </a:r>
-          </a:p>
-          <a:p>
-            <a:pPr>
-              <a:spcAft>
-                <a:spcPts val="1000"/>
-              </a:spcAft>
-            </a:pPr>
-            <a:r>
-              <a:rPr sz="2000" b="0">
-                <a:solidFill>
-                  <a:srgbClr val="1F3A5F"/>
-                </a:solidFill>
-                <a:latin typeface="Microsoft YaHei"/>
-                <a:ea typeface="Microsoft YaHei"/>
-              </a:rPr>
-              <a:t>•  产品边界：只用于复核排序，不替代现场检查、工程师判断或安全决策</a:t>
-            </a:r>
-          </a:p>
-          <a:p>
-            <a:pPr>
-              <a:spcAft>
-                <a:spcPts val="1000"/>
-              </a:spcAft>
-            </a:pPr>
-            <a:r>
-              <a:rPr sz="2000" b="1">
-                <a:solidFill>
-                  <a:srgbClr val="1F3A5F"/>
-                </a:solidFill>
-                <a:latin typeface="Microsoft YaHei"/>
-                <a:ea typeface="Microsoft YaHei"/>
-              </a:rPr>
-              <a:t>•  最危险的错误：漏检裂缝（真实裂缝被标成无裂缝，不会被送去复核）</a:t>
+              <a:t>•  CNN：漏检 14 ｜ 误报 3；train_loss 0.68 → 0.20</a:t>
             </a:r>
           </a:p>
         </p:txBody>
@@ -5243,7 +4817,7 @@
                 <a:latin typeface="Microsoft YaHei"/>
                 <a:ea typeface="Microsoft YaHei"/>
               </a:rPr>
-              <a:t>02</a:t>
+              <a:t>04</a:t>
             </a:r>
           </a:p>
         </p:txBody>
@@ -5256,7 +4830,7 @@
 </p:sld>
 </file>
 
-<file path=ppt/slides/slide3.xml><?xml version="1.0" encoding="utf-8"?>
+<file path=ppt/slides/slide5.xml><?xml version="1.0" encoding="utf-8"?>
 <p:sld xmlns:a="http://schemas.openxmlformats.org/drawingml/2006/main" xmlns:p="http://schemas.openxmlformats.org/presentationml/2006/main" xmlns:r="http://schemas.openxmlformats.org/officeDocument/2006/relationships">
   <p:cSld>
     <p:spTree>
@@ -5340,7 +4914,7 @@
                 <a:latin typeface="Microsoft YaHei"/>
                 <a:ea typeface="Microsoft YaHei"/>
               </a:rPr>
-              <a:t>真实数据与检查</a:t>
+              <a:t>失败、限制与结论</a:t>
             </a:r>
           </a:p>
         </p:txBody>
@@ -5413,7 +4987,41 @@
           <a:p>
             <a:pPr>
               <a:spcAft>
-                <a:spcPts val="1000"/>
+                <a:spcPts val="1200"/>
+              </a:spcAft>
+            </a:pPr>
+            <a:r>
+              <a:rPr sz="1900" b="1">
+                <a:solidFill>
+                  <a:srgbClr val="1F3A5F"/>
+                </a:solidFill>
+                <a:latin typeface="Microsoft YaHei"/>
+                <a:ea typeface="Microsoft YaHei"/>
+              </a:rPr>
+              <a:t>•  失败：CNN 仍漏检 14 张裂缝（如 04283.jpg，2ep 与 8ep 均漏检）</a:t>
+            </a:r>
+          </a:p>
+          <a:p>
+            <a:pPr>
+              <a:spcAft>
+                <a:spcPts val="1200"/>
+              </a:spcAft>
+            </a:pPr>
+            <a:r>
+              <a:rPr sz="1900" b="0">
+                <a:solidFill>
+                  <a:srgbClr val="1F3A5F"/>
+                </a:solidFill>
+                <a:latin typeface="Microsoft YaHei"/>
+                <a:ea typeface="Microsoft YaHei"/>
+              </a:rPr>
+              <a:t>•  限制：不能替代现场检查 / 工程判断；切块数据有泄漏，数字偏乐观</a:t>
+            </a:r>
+          </a:p>
+          <a:p>
+            <a:pPr>
+              <a:spcAft>
+                <a:spcPts val="1200"/>
               </a:spcAft>
             </a:pPr>
             <a:r>
@@ -5424,75 +5032,24 @@
                 <a:latin typeface="Microsoft YaHei"/>
                 <a:ea typeface="Microsoft YaHei"/>
               </a:rPr>
-              <a:t>•  来源：Kaggle Surface Crack Detection</a:t>
+              <a:t>•  结论：CNN 显著优于基线，大幅减少人工复核量</a:t>
             </a:r>
           </a:p>
           <a:p>
             <a:pPr>
               <a:spcAft>
-                <a:spcPts val="1000"/>
+                <a:spcPts val="1200"/>
               </a:spcAft>
             </a:pPr>
             <a:r>
-              <a:rPr sz="2000" b="0">
+              <a:rPr sz="1900" b="0">
                 <a:solidFill>
                   <a:srgbClr val="1F3A5F"/>
                 </a:solidFill>
                 <a:latin typeface="Microsoft YaHei"/>
                 <a:ea typeface="Microsoft YaHei"/>
               </a:rPr>
-              <a:t>•  Positive / Negative 各 20000 张，227×227 RGB</a:t>
-            </a:r>
-          </a:p>
-          <a:p>
-            <a:pPr>
-              <a:spcAft>
-                <a:spcPts val="1000"/>
-              </a:spcAft>
-            </a:pPr>
-            <a:r>
-              <a:rPr sz="2000" b="0">
-                <a:solidFill>
-                  <a:srgbClr val="1F3A5F"/>
-                </a:solidFill>
-                <a:latin typeface="Microsoft YaHei"/>
-                <a:ea typeface="Microsoft YaHei"/>
-              </a:rPr>
-              <a:t>•  检查命令：python train.py --check-data</a:t>
-            </a:r>
-          </a:p>
-          <a:p>
-            <a:pPr>
-              <a:spcAft>
-                <a:spcPts val="1000"/>
-              </a:spcAft>
-            </a:pPr>
-            <a:r>
-              <a:rPr sz="2000" b="0">
-                <a:solidFill>
-                  <a:srgbClr val="1F3A5F"/>
-                </a:solidFill>
-                <a:latin typeface="Microsoft YaHei"/>
-                <a:ea typeface="Microsoft YaHei"/>
-              </a:rPr>
-              <a:t>•  结果：REAL DATA CHECK PASSED（两文件夹各 20000）</a:t>
-            </a:r>
-          </a:p>
-          <a:p>
-            <a:pPr>
-              <a:spcAft>
-                <a:spcPts val="1000"/>
-              </a:spcAft>
-            </a:pPr>
-            <a:r>
-              <a:rPr sz="2000" b="1">
-                <a:solidFill>
-                  <a:srgbClr val="1F3A5F"/>
-                </a:solidFill>
-                <a:latin typeface="Microsoft YaHei"/>
-                <a:ea typeface="Microsoft YaHei"/>
-              </a:rPr>
-              <a:t>•  风险：由 458 张高分辨率图切块生成，随机拆分存在数据泄漏</a:t>
+              <a:t>•  下一步：看漏检图像共性，再考虑数据增强</a:t>
             </a:r>
           </a:p>
         </p:txBody>
@@ -5528,1598 +5085,7 @@
                 <a:latin typeface="Microsoft YaHei"/>
                 <a:ea typeface="Microsoft YaHei"/>
               </a:rPr>
-              <a:t>03</a:t>
-            </a:r>
-          </a:p>
-        </p:txBody>
-      </p:sp>
-    </p:spTree>
-  </p:cSld>
-  <p:clrMapOvr>
-    <a:masterClrMapping/>
-  </p:clrMapOvr>
-</p:sld>
-</file>
-
-<file path=ppt/slides/slide4.xml><?xml version="1.0" encoding="utf-8"?>
-<p:sld xmlns:a="http://schemas.openxmlformats.org/drawingml/2006/main" xmlns:p="http://schemas.openxmlformats.org/presentationml/2006/main" xmlns:r="http://schemas.openxmlformats.org/officeDocument/2006/relationships">
-  <p:cSld>
-    <p:spTree>
-      <p:nvGrpSpPr>
-        <p:cNvPr id="1" name=""/>
-        <p:cNvGrpSpPr/>
-        <p:nvPr/>
-      </p:nvGrpSpPr>
-      <p:grpSpPr/>
-      <p:sp>
-        <p:nvSpPr>
-          <p:cNvPr id="2" name="Rectangle 1"/>
-          <p:cNvSpPr/>
-          <p:nvPr/>
-        </p:nvSpPr>
-        <p:spPr>
-          <a:xfrm>
-            <a:off x="0" y="0"/>
-            <a:ext cx="12191695" cy="1051560"/>
-          </a:xfrm>
-          <a:prstGeom prst="rect">
-            <a:avLst/>
-          </a:prstGeom>
-          <a:solidFill>
-            <a:srgbClr val="1F3A5F"/>
-          </a:solidFill>
-          <a:ln>
-            <a:noFill/>
-          </a:ln>
-          <a:effectLst/>
-        </p:spPr>
-        <p:style>
-          <a:lnRef idx="1">
-            <a:schemeClr val="accent1"/>
-          </a:lnRef>
-          <a:fillRef idx="3">
-            <a:schemeClr val="accent1"/>
-          </a:fillRef>
-          <a:effectRef idx="2">
-            <a:schemeClr val="accent1"/>
-          </a:effectRef>
-          <a:fontRef idx="minor">
-            <a:schemeClr val="lt1"/>
-          </a:fontRef>
-        </p:style>
-        <p:txBody>
-          <a:bodyPr rtlCol="0" anchor="ctr"/>
-          <a:lstStyle/>
-          <a:p>
-            <a:pPr algn="ctr"/>
-          </a:p>
-        </p:txBody>
-      </p:sp>
-      <p:sp>
-        <p:nvSpPr>
-          <p:cNvPr id="3" name="TextBox 2"/>
-          <p:cNvSpPr txBox="1"/>
-          <p:nvPr/>
-        </p:nvSpPr>
-        <p:spPr>
-          <a:xfrm>
-            <a:off x="640080" y="228600"/>
-            <a:ext cx="10515600" cy="640080"/>
-          </a:xfrm>
-          <a:prstGeom prst="rect">
-            <a:avLst/>
-          </a:prstGeom>
-          <a:noFill/>
-        </p:spPr>
-        <p:txBody>
-          <a:bodyPr wrap="square">
-            <a:spAutoFit/>
-          </a:bodyPr>
-          <a:lstStyle/>
-          <a:p>
-            <a:r>
-              <a:rPr sz="3000" b="1">
-                <a:solidFill>
-                  <a:srgbClr val="FFFFFF"/>
-                </a:solidFill>
-                <a:latin typeface="Microsoft YaHei"/>
-                <a:ea typeface="Microsoft YaHei"/>
-              </a:rPr>
-              <a:t>简单基线：多数类</a:t>
-            </a:r>
-          </a:p>
-        </p:txBody>
-      </p:sp>
-      <p:sp>
-        <p:nvSpPr>
-          <p:cNvPr id="4" name="Rectangle 3"/>
-          <p:cNvSpPr/>
-          <p:nvPr/>
-        </p:nvSpPr>
-        <p:spPr>
-          <a:xfrm>
-            <a:off x="0" y="1051560"/>
-            <a:ext cx="164592" cy="4892040"/>
-          </a:xfrm>
-          <a:prstGeom prst="rect">
-            <a:avLst/>
-          </a:prstGeom>
-          <a:solidFill>
-            <a:srgbClr val="E86A17"/>
-          </a:solidFill>
-          <a:ln>
-            <a:noFill/>
-          </a:ln>
-          <a:effectLst/>
-        </p:spPr>
-        <p:style>
-          <a:lnRef idx="1">
-            <a:schemeClr val="accent1"/>
-          </a:lnRef>
-          <a:fillRef idx="3">
-            <a:schemeClr val="accent1"/>
-          </a:fillRef>
-          <a:effectRef idx="2">
-            <a:schemeClr val="accent1"/>
-          </a:effectRef>
-          <a:fontRef idx="minor">
-            <a:schemeClr val="lt1"/>
-          </a:fontRef>
-        </p:style>
-        <p:txBody>
-          <a:bodyPr rtlCol="0" anchor="ctr"/>
-          <a:lstStyle/>
-          <a:p>
-            <a:pPr algn="ctr"/>
-          </a:p>
-        </p:txBody>
-      </p:sp>
-      <p:sp>
-        <p:nvSpPr>
-          <p:cNvPr id="5" name="TextBox 4"/>
-          <p:cNvSpPr txBox="1"/>
-          <p:nvPr/>
-        </p:nvSpPr>
-        <p:spPr>
-          <a:xfrm>
-            <a:off x="914400" y="1463040"/>
-            <a:ext cx="10424160" cy="4572000"/>
-          </a:xfrm>
-          <a:prstGeom prst="rect">
-            <a:avLst/>
-          </a:prstGeom>
-          <a:noFill/>
-        </p:spPr>
-        <p:txBody>
-          <a:bodyPr wrap="square">
-            <a:spAutoFit/>
-          </a:bodyPr>
-          <a:lstStyle/>
-          <a:p>
-            <a:pPr>
-              <a:spcAft>
-                <a:spcPts val="1000"/>
-              </a:spcAft>
-            </a:pPr>
-            <a:r>
-              <a:rPr sz="2000" b="1">
-                <a:solidFill>
-                  <a:srgbClr val="1F3A5F"/>
-                </a:solidFill>
-                <a:latin typeface="Microsoft YaHei"/>
-                <a:ea typeface="Microsoft YaHei"/>
-              </a:rPr>
-              <a:t>•  方法：把所有测试图都判为裂缝</a:t>
-            </a:r>
-          </a:p>
-          <a:p>
-            <a:pPr>
-              <a:spcAft>
-                <a:spcPts val="1000"/>
-              </a:spcAft>
-            </a:pPr>
-            <a:r>
-              <a:rPr sz="2000" b="0">
-                <a:solidFill>
-                  <a:srgbClr val="1F3A5F"/>
-                </a:solidFill>
-                <a:latin typeface="Microsoft YaHei"/>
-                <a:ea typeface="Microsoft YaHei"/>
-              </a:rPr>
-              <a:t>•  accuracy 0.50，crack_recall 1.0</a:t>
-            </a:r>
-          </a:p>
-          <a:p>
-            <a:pPr>
-              <a:spcAft>
-                <a:spcPts val="1000"/>
-              </a:spcAft>
-            </a:pPr>
-            <a:r>
-              <a:rPr sz="2000" b="0">
-                <a:solidFill>
-                  <a:srgbClr val="1F3A5F"/>
-                </a:solidFill>
-                <a:latin typeface="Microsoft YaHei"/>
-                <a:ea typeface="Microsoft YaHei"/>
-              </a:rPr>
-              <a:t>•  误报 150 / 300（全部无裂缝图都被标成裂缝）</a:t>
-            </a:r>
-          </a:p>
-          <a:p>
-            <a:pPr>
-              <a:spcAft>
-                <a:spcPts val="1000"/>
-              </a:spcAft>
-            </a:pPr>
-            <a:r>
-              <a:rPr sz="2000" b="1">
-                <a:solidFill>
-                  <a:srgbClr val="1F3A5F"/>
-                </a:solidFill>
-                <a:latin typeface="Microsoft YaHei"/>
-                <a:ea typeface="Microsoft YaHei"/>
-              </a:rPr>
-              <a:t>•  结论：作为筛查器几乎不可用，是改进的起点</a:t>
-            </a:r>
-          </a:p>
-        </p:txBody>
-      </p:sp>
-      <p:sp>
-        <p:nvSpPr>
-          <p:cNvPr id="6" name="TextBox 5"/>
-          <p:cNvSpPr txBox="1"/>
-          <p:nvPr/>
-        </p:nvSpPr>
-        <p:spPr>
-          <a:xfrm>
-            <a:off x="11155680" y="6446520"/>
-            <a:ext cx="914400" cy="365760"/>
-          </a:xfrm>
-          <a:prstGeom prst="rect">
-            <a:avLst/>
-          </a:prstGeom>
-          <a:noFill/>
-        </p:spPr>
-        <p:txBody>
-          <a:bodyPr wrap="square">
-            <a:spAutoFit/>
-          </a:bodyPr>
-          <a:lstStyle/>
-          <a:p>
-            <a:pPr algn="r"/>
-            <a:r>
-              <a:rPr sz="1200" b="0">
-                <a:solidFill>
-                  <a:srgbClr val="4A4A4A"/>
-                </a:solidFill>
-                <a:latin typeface="Microsoft YaHei"/>
-                <a:ea typeface="Microsoft YaHei"/>
-              </a:rPr>
-              <a:t>04</a:t>
-            </a:r>
-          </a:p>
-        </p:txBody>
-      </p:sp>
-    </p:spTree>
-  </p:cSld>
-  <p:clrMapOvr>
-    <a:masterClrMapping/>
-  </p:clrMapOvr>
-</p:sld>
-</file>
-
-<file path=ppt/slides/slide5.xml><?xml version="1.0" encoding="utf-8"?>
-<p:sld xmlns:a="http://schemas.openxmlformats.org/drawingml/2006/main" xmlns:p="http://schemas.openxmlformats.org/presentationml/2006/main" xmlns:r="http://schemas.openxmlformats.org/officeDocument/2006/relationships">
-  <p:cSld>
-    <p:spTree>
-      <p:nvGrpSpPr>
-        <p:cNvPr id="1" name=""/>
-        <p:cNvGrpSpPr/>
-        <p:nvPr/>
-      </p:nvGrpSpPr>
-      <p:grpSpPr/>
-      <p:sp>
-        <p:nvSpPr>
-          <p:cNvPr id="2" name="Rectangle 1"/>
-          <p:cNvSpPr/>
-          <p:nvPr/>
-        </p:nvSpPr>
-        <p:spPr>
-          <a:xfrm>
-            <a:off x="0" y="0"/>
-            <a:ext cx="12191695" cy="1051560"/>
-          </a:xfrm>
-          <a:prstGeom prst="rect">
-            <a:avLst/>
-          </a:prstGeom>
-          <a:solidFill>
-            <a:srgbClr val="1F3A5F"/>
-          </a:solidFill>
-          <a:ln>
-            <a:noFill/>
-          </a:ln>
-          <a:effectLst/>
-        </p:spPr>
-        <p:style>
-          <a:lnRef idx="1">
-            <a:schemeClr val="accent1"/>
-          </a:lnRef>
-          <a:fillRef idx="3">
-            <a:schemeClr val="accent1"/>
-          </a:fillRef>
-          <a:effectRef idx="2">
-            <a:schemeClr val="accent1"/>
-          </a:effectRef>
-          <a:fontRef idx="minor">
-            <a:schemeClr val="lt1"/>
-          </a:fontRef>
-        </p:style>
-        <p:txBody>
-          <a:bodyPr rtlCol="0" anchor="ctr"/>
-          <a:lstStyle/>
-          <a:p>
-            <a:pPr algn="ctr"/>
-          </a:p>
-        </p:txBody>
-      </p:sp>
-      <p:sp>
-        <p:nvSpPr>
-          <p:cNvPr id="3" name="TextBox 2"/>
-          <p:cNvSpPr txBox="1"/>
-          <p:nvPr/>
-        </p:nvSpPr>
-        <p:spPr>
-          <a:xfrm>
-            <a:off x="640080" y="228600"/>
-            <a:ext cx="10515600" cy="640080"/>
-          </a:xfrm>
-          <a:prstGeom prst="rect">
-            <a:avLst/>
-          </a:prstGeom>
-          <a:noFill/>
-        </p:spPr>
-        <p:txBody>
-          <a:bodyPr wrap="square">
-            <a:spAutoFit/>
-          </a:bodyPr>
-          <a:lstStyle/>
-          <a:p>
-            <a:r>
-              <a:rPr sz="3000" b="1">
-                <a:solidFill>
-                  <a:srgbClr val="FFFFFF"/>
-                </a:solidFill>
-                <a:latin typeface="Microsoft YaHei"/>
-                <a:ea typeface="Microsoft YaHei"/>
-              </a:rPr>
-              <a:t>候选方法：SmallCNN</a:t>
-            </a:r>
-          </a:p>
-        </p:txBody>
-      </p:sp>
-      <p:sp>
-        <p:nvSpPr>
-          <p:cNvPr id="4" name="Rectangle 3"/>
-          <p:cNvSpPr/>
-          <p:nvPr/>
-        </p:nvSpPr>
-        <p:spPr>
-          <a:xfrm>
-            <a:off x="0" y="1051560"/>
-            <a:ext cx="164592" cy="4892040"/>
-          </a:xfrm>
-          <a:prstGeom prst="rect">
-            <a:avLst/>
-          </a:prstGeom>
-          <a:solidFill>
-            <a:srgbClr val="E86A17"/>
-          </a:solidFill>
-          <a:ln>
-            <a:noFill/>
-          </a:ln>
-          <a:effectLst/>
-        </p:spPr>
-        <p:style>
-          <a:lnRef idx="1">
-            <a:schemeClr val="accent1"/>
-          </a:lnRef>
-          <a:fillRef idx="3">
-            <a:schemeClr val="accent1"/>
-          </a:fillRef>
-          <a:effectRef idx="2">
-            <a:schemeClr val="accent1"/>
-          </a:effectRef>
-          <a:fontRef idx="minor">
-            <a:schemeClr val="lt1"/>
-          </a:fontRef>
-        </p:style>
-        <p:txBody>
-          <a:bodyPr rtlCol="0" anchor="ctr"/>
-          <a:lstStyle/>
-          <a:p>
-            <a:pPr algn="ctr"/>
-          </a:p>
-        </p:txBody>
-      </p:sp>
-      <p:sp>
-        <p:nvSpPr>
-          <p:cNvPr id="5" name="TextBox 4"/>
-          <p:cNvSpPr txBox="1"/>
-          <p:nvPr/>
-        </p:nvSpPr>
-        <p:spPr>
-          <a:xfrm>
-            <a:off x="914400" y="1463040"/>
-            <a:ext cx="10424160" cy="4572000"/>
-          </a:xfrm>
-          <a:prstGeom prst="rect">
-            <a:avLst/>
-          </a:prstGeom>
-          <a:noFill/>
-        </p:spPr>
-        <p:txBody>
-          <a:bodyPr wrap="square">
-            <a:spAutoFit/>
-          </a:bodyPr>
-          <a:lstStyle/>
-          <a:p>
-            <a:pPr>
-              <a:spcAft>
-                <a:spcPts val="1000"/>
-              </a:spcAft>
-            </a:pPr>
-            <a:r>
-              <a:rPr sz="1800" b="1">
-                <a:solidFill>
-                  <a:srgbClr val="1F3A5F"/>
-                </a:solidFill>
-                <a:latin typeface="Microsoft YaHei"/>
-                <a:ea typeface="Microsoft YaHei"/>
-              </a:rPr>
-              <a:t>•  结构：Conv(3→8) → ReLU → Pool → Conv(8→16) → ReLU → Pool → Flatten → Linear</a:t>
-            </a:r>
-          </a:p>
-          <a:p>
-            <a:pPr>
-              <a:spcAft>
-                <a:spcPts val="1000"/>
-              </a:spcAft>
-            </a:pPr>
-            <a:r>
-              <a:rPr sz="1800" b="0">
-                <a:solidFill>
-                  <a:srgbClr val="1F3A5F"/>
-                </a:solidFill>
-                <a:latin typeface="Microsoft YaHei"/>
-                <a:ea typeface="Microsoft YaHei"/>
-              </a:rPr>
-              <a:t>•  输入 64×64×3，输出 2 类（无裂缝 / 裂缝）</a:t>
-            </a:r>
-          </a:p>
-          <a:p>
-            <a:pPr>
-              <a:spcAft>
-                <a:spcPts val="1000"/>
-              </a:spcAft>
-            </a:pPr>
-            <a:r>
-              <a:rPr sz="1800" b="0">
-                <a:solidFill>
-                  <a:srgbClr val="1F3A5F"/>
-                </a:solidFill>
-                <a:latin typeface="Microsoft YaHei"/>
-                <a:ea typeface="Microsoft YaHei"/>
-              </a:rPr>
-              <a:t>•  只实现 models.py 中的 SmallCNN</a:t>
-            </a:r>
-          </a:p>
-          <a:p>
-            <a:pPr>
-              <a:spcAft>
-                <a:spcPts val="1000"/>
-              </a:spcAft>
-            </a:pPr>
-            <a:r>
-              <a:rPr sz="1800" b="1">
-                <a:solidFill>
-                  <a:srgbClr val="1F3A5F"/>
-                </a:solidFill>
-                <a:latin typeface="Microsoft YaHei"/>
-                <a:ea typeface="Microsoft YaHei"/>
-              </a:rPr>
-              <a:t>•  保持不变：数据、划分、指标与训练流程均未改动</a:t>
-            </a:r>
-          </a:p>
-        </p:txBody>
-      </p:sp>
-      <p:sp>
-        <p:nvSpPr>
-          <p:cNvPr id="6" name="TextBox 5"/>
-          <p:cNvSpPr txBox="1"/>
-          <p:nvPr/>
-        </p:nvSpPr>
-        <p:spPr>
-          <a:xfrm>
-            <a:off x="11155680" y="6446520"/>
-            <a:ext cx="914400" cy="365760"/>
-          </a:xfrm>
-          <a:prstGeom prst="rect">
-            <a:avLst/>
-          </a:prstGeom>
-          <a:noFill/>
-        </p:spPr>
-        <p:txBody>
-          <a:bodyPr wrap="square">
-            <a:spAutoFit/>
-          </a:bodyPr>
-          <a:lstStyle/>
-          <a:p>
-            <a:pPr algn="r"/>
-            <a:r>
-              <a:rPr sz="1200" b="0">
-                <a:solidFill>
-                  <a:srgbClr val="4A4A4A"/>
-                </a:solidFill>
-                <a:latin typeface="Microsoft YaHei"/>
-                <a:ea typeface="Microsoft YaHei"/>
-              </a:rPr>
               <a:t>05</a:t>
-            </a:r>
-          </a:p>
-        </p:txBody>
-      </p:sp>
-    </p:spTree>
-  </p:cSld>
-  <p:clrMapOvr>
-    <a:masterClrMapping/>
-  </p:clrMapOvr>
-</p:sld>
-</file>
-
-<file path=ppt/slides/slide6.xml><?xml version="1.0" encoding="utf-8"?>
-<p:sld xmlns:a="http://schemas.openxmlformats.org/drawingml/2006/main" xmlns:p="http://schemas.openxmlformats.org/presentationml/2006/main" xmlns:r="http://schemas.openxmlformats.org/officeDocument/2006/relationships">
-  <p:cSld>
-    <p:spTree>
-      <p:nvGrpSpPr>
-        <p:cNvPr id="1" name=""/>
-        <p:cNvGrpSpPr/>
-        <p:nvPr/>
-      </p:nvGrpSpPr>
-      <p:grpSpPr/>
-      <p:sp>
-        <p:nvSpPr>
-          <p:cNvPr id="2" name="Rectangle 1"/>
-          <p:cNvSpPr/>
-          <p:nvPr/>
-        </p:nvSpPr>
-        <p:spPr>
-          <a:xfrm>
-            <a:off x="0" y="0"/>
-            <a:ext cx="12191695" cy="1051560"/>
-          </a:xfrm>
-          <a:prstGeom prst="rect">
-            <a:avLst/>
-          </a:prstGeom>
-          <a:solidFill>
-            <a:srgbClr val="1F3A5F"/>
-          </a:solidFill>
-          <a:ln>
-            <a:noFill/>
-          </a:ln>
-          <a:effectLst/>
-        </p:spPr>
-        <p:style>
-          <a:lnRef idx="1">
-            <a:schemeClr val="accent1"/>
-          </a:lnRef>
-          <a:fillRef idx="3">
-            <a:schemeClr val="accent1"/>
-          </a:fillRef>
-          <a:effectRef idx="2">
-            <a:schemeClr val="accent1"/>
-          </a:effectRef>
-          <a:fontRef idx="minor">
-            <a:schemeClr val="lt1"/>
-          </a:fontRef>
-        </p:style>
-        <p:txBody>
-          <a:bodyPr rtlCol="0" anchor="ctr"/>
-          <a:lstStyle/>
-          <a:p>
-            <a:pPr algn="ctr"/>
-          </a:p>
-        </p:txBody>
-      </p:sp>
-      <p:sp>
-        <p:nvSpPr>
-          <p:cNvPr id="3" name="TextBox 2"/>
-          <p:cNvSpPr txBox="1"/>
-          <p:nvPr/>
-        </p:nvSpPr>
-        <p:spPr>
-          <a:xfrm>
-            <a:off x="640080" y="228600"/>
-            <a:ext cx="10515600" cy="640080"/>
-          </a:xfrm>
-          <a:prstGeom prst="rect">
-            <a:avLst/>
-          </a:prstGeom>
-          <a:noFill/>
-        </p:spPr>
-        <p:txBody>
-          <a:bodyPr wrap="square">
-            <a:spAutoFit/>
-          </a:bodyPr>
-          <a:lstStyle/>
-          <a:p>
-            <a:r>
-              <a:rPr sz="3000" b="1">
-                <a:solidFill>
-                  <a:srgbClr val="FFFFFF"/>
-                </a:solidFill>
-                <a:latin typeface="Microsoft YaHei"/>
-                <a:ea typeface="Microsoft YaHei"/>
-              </a:rPr>
-              <a:t>训练设置与不变条件</a:t>
-            </a:r>
-          </a:p>
-        </p:txBody>
-      </p:sp>
-      <p:sp>
-        <p:nvSpPr>
-          <p:cNvPr id="4" name="Rectangle 3"/>
-          <p:cNvSpPr/>
-          <p:nvPr/>
-        </p:nvSpPr>
-        <p:spPr>
-          <a:xfrm>
-            <a:off x="0" y="1051560"/>
-            <a:ext cx="164592" cy="4892040"/>
-          </a:xfrm>
-          <a:prstGeom prst="rect">
-            <a:avLst/>
-          </a:prstGeom>
-          <a:solidFill>
-            <a:srgbClr val="E86A17"/>
-          </a:solidFill>
-          <a:ln>
-            <a:noFill/>
-          </a:ln>
-          <a:effectLst/>
-        </p:spPr>
-        <p:style>
-          <a:lnRef idx="1">
-            <a:schemeClr val="accent1"/>
-          </a:lnRef>
-          <a:fillRef idx="3">
-            <a:schemeClr val="accent1"/>
-          </a:fillRef>
-          <a:effectRef idx="2">
-            <a:schemeClr val="accent1"/>
-          </a:effectRef>
-          <a:fontRef idx="minor">
-            <a:schemeClr val="lt1"/>
-          </a:fontRef>
-        </p:style>
-        <p:txBody>
-          <a:bodyPr rtlCol="0" anchor="ctr"/>
-          <a:lstStyle/>
-          <a:p>
-            <a:pPr algn="ctr"/>
-          </a:p>
-        </p:txBody>
-      </p:sp>
-      <p:sp>
-        <p:nvSpPr>
-          <p:cNvPr id="5" name="TextBox 4"/>
-          <p:cNvSpPr txBox="1"/>
-          <p:nvPr/>
-        </p:nvSpPr>
-        <p:spPr>
-          <a:xfrm>
-            <a:off x="914400" y="1463040"/>
-            <a:ext cx="10424160" cy="4572000"/>
-          </a:xfrm>
-          <a:prstGeom prst="rect">
-            <a:avLst/>
-          </a:prstGeom>
-          <a:noFill/>
-        </p:spPr>
-        <p:txBody>
-          <a:bodyPr wrap="square">
-            <a:spAutoFit/>
-          </a:bodyPr>
-          <a:lstStyle/>
-          <a:p>
-            <a:pPr>
-              <a:spcAft>
-                <a:spcPts val="1000"/>
-              </a:spcAft>
-            </a:pPr>
-            <a:r>
-              <a:rPr sz="2000" b="1">
-                <a:solidFill>
-                  <a:srgbClr val="1F3A5F"/>
-                </a:solidFill>
-                <a:latin typeface="Microsoft YaHei"/>
-                <a:ea typeface="Microsoft YaHei"/>
-              </a:rPr>
-              <a:t>•  划分：每类最多 600 张，75/25 拆分，seed=2026</a:t>
-            </a:r>
-          </a:p>
-          <a:p>
-            <a:pPr>
-              <a:spcAft>
-                <a:spcPts val="1000"/>
-              </a:spcAft>
-            </a:pPr>
-            <a:r>
-              <a:rPr sz="2000" b="0">
-                <a:solidFill>
-                  <a:srgbClr val="1F3A5F"/>
-                </a:solidFill>
-                <a:latin typeface="Microsoft YaHei"/>
-                <a:ea typeface="Microsoft YaHei"/>
-              </a:rPr>
-              <a:t>•  规模：900 训练 / 300 测试</a:t>
-            </a:r>
-          </a:p>
-          <a:p>
-            <a:pPr>
-              <a:spcAft>
-                <a:spcPts val="1000"/>
-              </a:spcAft>
-            </a:pPr>
-            <a:r>
-              <a:rPr sz="2000" b="0">
-                <a:solidFill>
-                  <a:srgbClr val="1F3A5F"/>
-                </a:solidFill>
-                <a:latin typeface="Microsoft YaHei"/>
-                <a:ea typeface="Microsoft YaHei"/>
-              </a:rPr>
-              <a:t>•  训练：8 epochs，Adam(lr=0.001)，CrossEntropy</a:t>
-            </a:r>
-          </a:p>
-          <a:p>
-            <a:pPr>
-              <a:spcAft>
-                <a:spcPts val="1000"/>
-              </a:spcAft>
-            </a:pPr>
-            <a:r>
-              <a:rPr sz="2000" b="0">
-                <a:solidFill>
-                  <a:srgbClr val="1F3A5F"/>
-                </a:solidFill>
-                <a:latin typeface="Microsoft YaHei"/>
-                <a:ea typeface="Microsoft YaHei"/>
-              </a:rPr>
-              <a:t>•  指标：accuracy / 漏检 FN / 误报 FP（同一条件下比较）</a:t>
-            </a:r>
-          </a:p>
-        </p:txBody>
-      </p:sp>
-      <p:sp>
-        <p:nvSpPr>
-          <p:cNvPr id="6" name="TextBox 5"/>
-          <p:cNvSpPr txBox="1"/>
-          <p:nvPr/>
-        </p:nvSpPr>
-        <p:spPr>
-          <a:xfrm>
-            <a:off x="11155680" y="6446520"/>
-            <a:ext cx="914400" cy="365760"/>
-          </a:xfrm>
-          <a:prstGeom prst="rect">
-            <a:avLst/>
-          </a:prstGeom>
-          <a:noFill/>
-        </p:spPr>
-        <p:txBody>
-          <a:bodyPr wrap="square">
-            <a:spAutoFit/>
-          </a:bodyPr>
-          <a:lstStyle/>
-          <a:p>
-            <a:pPr algn="r"/>
-            <a:r>
-              <a:rPr sz="1200" b="0">
-                <a:solidFill>
-                  <a:srgbClr val="4A4A4A"/>
-                </a:solidFill>
-                <a:latin typeface="Microsoft YaHei"/>
-                <a:ea typeface="Microsoft YaHei"/>
-              </a:rPr>
-              <a:t>06</a:t>
-            </a:r>
-          </a:p>
-        </p:txBody>
-      </p:sp>
-    </p:spTree>
-  </p:cSld>
-  <p:clrMapOvr>
-    <a:masterClrMapping/>
-  </p:clrMapOvr>
-</p:sld>
-</file>
-
-<file path=ppt/slides/slide7.xml><?xml version="1.0" encoding="utf-8"?>
-<p:sld xmlns:a="http://schemas.openxmlformats.org/drawingml/2006/main" xmlns:p="http://schemas.openxmlformats.org/presentationml/2006/main" xmlns:r="http://schemas.openxmlformats.org/officeDocument/2006/relationships">
-  <p:cSld>
-    <p:spTree>
-      <p:nvGrpSpPr>
-        <p:cNvPr id="1" name=""/>
-        <p:cNvGrpSpPr/>
-        <p:nvPr/>
-      </p:nvGrpSpPr>
-      <p:grpSpPr/>
-      <p:sp>
-        <p:nvSpPr>
-          <p:cNvPr id="2" name="Rectangle 1"/>
-          <p:cNvSpPr/>
-          <p:nvPr/>
-        </p:nvSpPr>
-        <p:spPr>
-          <a:xfrm>
-            <a:off x="0" y="0"/>
-            <a:ext cx="12191695" cy="1051560"/>
-          </a:xfrm>
-          <a:prstGeom prst="rect">
-            <a:avLst/>
-          </a:prstGeom>
-          <a:solidFill>
-            <a:srgbClr val="1F3A5F"/>
-          </a:solidFill>
-          <a:ln>
-            <a:noFill/>
-          </a:ln>
-          <a:effectLst/>
-        </p:spPr>
-        <p:style>
-          <a:lnRef idx="1">
-            <a:schemeClr val="accent1"/>
-          </a:lnRef>
-          <a:fillRef idx="3">
-            <a:schemeClr val="accent1"/>
-          </a:fillRef>
-          <a:effectRef idx="2">
-            <a:schemeClr val="accent1"/>
-          </a:effectRef>
-          <a:fontRef idx="minor">
-            <a:schemeClr val="lt1"/>
-          </a:fontRef>
-        </p:style>
-        <p:txBody>
-          <a:bodyPr rtlCol="0" anchor="ctr"/>
-          <a:lstStyle/>
-          <a:p>
-            <a:pPr algn="ctr"/>
-          </a:p>
-        </p:txBody>
-      </p:sp>
-      <p:sp>
-        <p:nvSpPr>
-          <p:cNvPr id="3" name="TextBox 2"/>
-          <p:cNvSpPr txBox="1"/>
-          <p:nvPr/>
-        </p:nvSpPr>
-        <p:spPr>
-          <a:xfrm>
-            <a:off x="640080" y="228600"/>
-            <a:ext cx="10515600" cy="640080"/>
-          </a:xfrm>
-          <a:prstGeom prst="rect">
-            <a:avLst/>
-          </a:prstGeom>
-          <a:noFill/>
-        </p:spPr>
-        <p:txBody>
-          <a:bodyPr wrap="square">
-            <a:spAutoFit/>
-          </a:bodyPr>
-          <a:lstStyle/>
-          <a:p>
-            <a:r>
-              <a:rPr sz="3000" b="1">
-                <a:solidFill>
-                  <a:srgbClr val="FFFFFF"/>
-                </a:solidFill>
-                <a:latin typeface="Microsoft YaHei"/>
-                <a:ea typeface="Microsoft YaHei"/>
-              </a:rPr>
-              <a:t>基线 vs CNN</a:t>
-            </a:r>
-          </a:p>
-        </p:txBody>
-      </p:sp>
-      <p:sp>
-        <p:nvSpPr>
-          <p:cNvPr id="4" name="Rectangle 3"/>
-          <p:cNvSpPr/>
-          <p:nvPr/>
-        </p:nvSpPr>
-        <p:spPr>
-          <a:xfrm>
-            <a:off x="0" y="1051560"/>
-            <a:ext cx="164592" cy="4892040"/>
-          </a:xfrm>
-          <a:prstGeom prst="rect">
-            <a:avLst/>
-          </a:prstGeom>
-          <a:solidFill>
-            <a:srgbClr val="E86A17"/>
-          </a:solidFill>
-          <a:ln>
-            <a:noFill/>
-          </a:ln>
-          <a:effectLst/>
-        </p:spPr>
-        <p:style>
-          <a:lnRef idx="1">
-            <a:schemeClr val="accent1"/>
-          </a:lnRef>
-          <a:fillRef idx="3">
-            <a:schemeClr val="accent1"/>
-          </a:fillRef>
-          <a:effectRef idx="2">
-            <a:schemeClr val="accent1"/>
-          </a:effectRef>
-          <a:fontRef idx="minor">
-            <a:schemeClr val="lt1"/>
-          </a:fontRef>
-        </p:style>
-        <p:txBody>
-          <a:bodyPr rtlCol="0" anchor="ctr"/>
-          <a:lstStyle/>
-          <a:p>
-            <a:pPr algn="ctr"/>
-          </a:p>
-        </p:txBody>
-      </p:sp>
-      <p:sp>
-        <p:nvSpPr>
-          <p:cNvPr id="5" name="TextBox 4"/>
-          <p:cNvSpPr txBox="1"/>
-          <p:nvPr/>
-        </p:nvSpPr>
-        <p:spPr>
-          <a:xfrm>
-            <a:off x="914400" y="1463040"/>
-            <a:ext cx="10424160" cy="4572000"/>
-          </a:xfrm>
-          <a:prstGeom prst="rect">
-            <a:avLst/>
-          </a:prstGeom>
-          <a:noFill/>
-        </p:spPr>
-        <p:txBody>
-          <a:bodyPr wrap="square">
-            <a:spAutoFit/>
-          </a:bodyPr>
-          <a:lstStyle/>
-          <a:p>
-            <a:pPr>
-              <a:spcAft>
-                <a:spcPts val="1000"/>
-              </a:spcAft>
-            </a:pPr>
-            <a:r>
-              <a:rPr sz="2200" b="1">
-                <a:solidFill>
-                  <a:srgbClr val="1F3A5F"/>
-                </a:solidFill>
-                <a:latin typeface="Microsoft YaHei"/>
-                <a:ea typeface="Microsoft YaHei"/>
-              </a:rPr>
-              <a:t>•  多数类基线：accuracy 0.50 ｜ 误报 150</a:t>
-            </a:r>
-          </a:p>
-          <a:p>
-            <a:pPr>
-              <a:spcAft>
-                <a:spcPts val="1000"/>
-              </a:spcAft>
-            </a:pPr>
-            <a:r>
-              <a:rPr sz="2200" b="1">
-                <a:solidFill>
-                  <a:srgbClr val="1F3A5F"/>
-                </a:solidFill>
-                <a:latin typeface="Microsoft YaHei"/>
-                <a:ea typeface="Microsoft YaHei"/>
-              </a:rPr>
-              <a:t>•  SmallCNN（8ep）：accuracy 0.943 ｜ 漏检 14 ｜ 误报 3</a:t>
-            </a:r>
-          </a:p>
-          <a:p>
-            <a:pPr>
-              <a:spcAft>
-                <a:spcPts val="1000"/>
-              </a:spcAft>
-            </a:pPr>
-            <a:r>
-              <a:rPr sz="2000" b="0">
-                <a:solidFill>
-                  <a:srgbClr val="1F3A5F"/>
-                </a:solidFill>
-                <a:latin typeface="Microsoft YaHei"/>
-                <a:ea typeface="Microsoft YaHei"/>
-              </a:rPr>
-              <a:t>•  误报大幅下降，漏检明显减少，筛查器可用</a:t>
-            </a:r>
-          </a:p>
-        </p:txBody>
-      </p:sp>
-      <p:sp>
-        <p:nvSpPr>
-          <p:cNvPr id="6" name="TextBox 5"/>
-          <p:cNvSpPr txBox="1"/>
-          <p:nvPr/>
-        </p:nvSpPr>
-        <p:spPr>
-          <a:xfrm>
-            <a:off x="11155680" y="6446520"/>
-            <a:ext cx="914400" cy="365760"/>
-          </a:xfrm>
-          <a:prstGeom prst="rect">
-            <a:avLst/>
-          </a:prstGeom>
-          <a:noFill/>
-        </p:spPr>
-        <p:txBody>
-          <a:bodyPr wrap="square">
-            <a:spAutoFit/>
-          </a:bodyPr>
-          <a:lstStyle/>
-          <a:p>
-            <a:pPr algn="r"/>
-            <a:r>
-              <a:rPr sz="1200" b="0">
-                <a:solidFill>
-                  <a:srgbClr val="4A4A4A"/>
-                </a:solidFill>
-                <a:latin typeface="Microsoft YaHei"/>
-                <a:ea typeface="Microsoft YaHei"/>
-              </a:rPr>
-              <a:t>07</a:t>
-            </a:r>
-          </a:p>
-        </p:txBody>
-      </p:sp>
-    </p:spTree>
-  </p:cSld>
-  <p:clrMapOvr>
-    <a:masterClrMapping/>
-  </p:clrMapOvr>
-</p:sld>
-</file>
-
-<file path=ppt/slides/slide8.xml><?xml version="1.0" encoding="utf-8"?>
-<p:sld xmlns:a="http://schemas.openxmlformats.org/drawingml/2006/main" xmlns:p="http://schemas.openxmlformats.org/presentationml/2006/main" xmlns:r="http://schemas.openxmlformats.org/officeDocument/2006/relationships">
-  <p:cSld>
-    <p:spTree>
-      <p:nvGrpSpPr>
-        <p:cNvPr id="1" name=""/>
-        <p:cNvGrpSpPr/>
-        <p:nvPr/>
-      </p:nvGrpSpPr>
-      <p:grpSpPr/>
-      <p:sp>
-        <p:nvSpPr>
-          <p:cNvPr id="2" name="Rectangle 1"/>
-          <p:cNvSpPr/>
-          <p:nvPr/>
-        </p:nvSpPr>
-        <p:spPr>
-          <a:xfrm>
-            <a:off x="0" y="0"/>
-            <a:ext cx="12191695" cy="1051560"/>
-          </a:xfrm>
-          <a:prstGeom prst="rect">
-            <a:avLst/>
-          </a:prstGeom>
-          <a:solidFill>
-            <a:srgbClr val="1F3A5F"/>
-          </a:solidFill>
-          <a:ln>
-            <a:noFill/>
-          </a:ln>
-          <a:effectLst/>
-        </p:spPr>
-        <p:style>
-          <a:lnRef idx="1">
-            <a:schemeClr val="accent1"/>
-          </a:lnRef>
-          <a:fillRef idx="3">
-            <a:schemeClr val="accent1"/>
-          </a:fillRef>
-          <a:effectRef idx="2">
-            <a:schemeClr val="accent1"/>
-          </a:effectRef>
-          <a:fontRef idx="minor">
-            <a:schemeClr val="lt1"/>
-          </a:fontRef>
-        </p:style>
-        <p:txBody>
-          <a:bodyPr rtlCol="0" anchor="ctr"/>
-          <a:lstStyle/>
-          <a:p>
-            <a:pPr algn="ctr"/>
-          </a:p>
-        </p:txBody>
-      </p:sp>
-      <p:sp>
-        <p:nvSpPr>
-          <p:cNvPr id="3" name="TextBox 2"/>
-          <p:cNvSpPr txBox="1"/>
-          <p:nvPr/>
-        </p:nvSpPr>
-        <p:spPr>
-          <a:xfrm>
-            <a:off x="640080" y="228600"/>
-            <a:ext cx="10515600" cy="640080"/>
-          </a:xfrm>
-          <a:prstGeom prst="rect">
-            <a:avLst/>
-          </a:prstGeom>
-          <a:noFill/>
-        </p:spPr>
-        <p:txBody>
-          <a:bodyPr wrap="square">
-            <a:spAutoFit/>
-          </a:bodyPr>
-          <a:lstStyle/>
-          <a:p>
-            <a:r>
-              <a:rPr sz="3000" b="1">
-                <a:solidFill>
-                  <a:srgbClr val="FFFFFF"/>
-                </a:solidFill>
-                <a:latin typeface="Microsoft YaHei"/>
-                <a:ea typeface="Microsoft YaHei"/>
-              </a:rPr>
-              <a:t>一条最重要的证据</a:t>
-            </a:r>
-          </a:p>
-        </p:txBody>
-      </p:sp>
-      <p:sp>
-        <p:nvSpPr>
-          <p:cNvPr id="4" name="Rectangle 3"/>
-          <p:cNvSpPr/>
-          <p:nvPr/>
-        </p:nvSpPr>
-        <p:spPr>
-          <a:xfrm>
-            <a:off x="0" y="1051560"/>
-            <a:ext cx="164592" cy="4892040"/>
-          </a:xfrm>
-          <a:prstGeom prst="rect">
-            <a:avLst/>
-          </a:prstGeom>
-          <a:solidFill>
-            <a:srgbClr val="E86A17"/>
-          </a:solidFill>
-          <a:ln>
-            <a:noFill/>
-          </a:ln>
-          <a:effectLst/>
-        </p:spPr>
-        <p:style>
-          <a:lnRef idx="1">
-            <a:schemeClr val="accent1"/>
-          </a:lnRef>
-          <a:fillRef idx="3">
-            <a:schemeClr val="accent1"/>
-          </a:fillRef>
-          <a:effectRef idx="2">
-            <a:schemeClr val="accent1"/>
-          </a:effectRef>
-          <a:fontRef idx="minor">
-            <a:schemeClr val="lt1"/>
-          </a:fontRef>
-        </p:style>
-        <p:txBody>
-          <a:bodyPr rtlCol="0" anchor="ctr"/>
-          <a:lstStyle/>
-          <a:p>
-            <a:pPr algn="ctr"/>
-          </a:p>
-        </p:txBody>
-      </p:sp>
-      <p:sp>
-        <p:nvSpPr>
-          <p:cNvPr id="5" name="TextBox 4"/>
-          <p:cNvSpPr txBox="1"/>
-          <p:nvPr/>
-        </p:nvSpPr>
-        <p:spPr>
-          <a:xfrm>
-            <a:off x="914400" y="1463040"/>
-            <a:ext cx="10424160" cy="4572000"/>
-          </a:xfrm>
-          <a:prstGeom prst="rect">
-            <a:avLst/>
-          </a:prstGeom>
-          <a:noFill/>
-        </p:spPr>
-        <p:txBody>
-          <a:bodyPr wrap="square">
-            <a:spAutoFit/>
-          </a:bodyPr>
-          <a:lstStyle/>
-          <a:p>
-            <a:pPr>
-              <a:spcAft>
-                <a:spcPts val="1000"/>
-              </a:spcAft>
-            </a:pPr>
-            <a:r>
-              <a:rPr sz="2200" b="1">
-                <a:solidFill>
-                  <a:srgbClr val="1F3A5F"/>
-                </a:solidFill>
-                <a:latin typeface="Microsoft YaHei"/>
-                <a:ea typeface="Microsoft YaHei"/>
-              </a:rPr>
-              <a:t>•  CNN 8ep：accuracy 0.943</a:t>
-            </a:r>
-          </a:p>
-          <a:p>
-            <a:pPr>
-              <a:spcAft>
-                <a:spcPts val="1000"/>
-              </a:spcAft>
-            </a:pPr>
-            <a:r>
-              <a:rPr sz="2000" b="0">
-                <a:solidFill>
-                  <a:srgbClr val="1F3A5F"/>
-                </a:solidFill>
-                <a:latin typeface="Microsoft YaHei"/>
-                <a:ea typeface="Microsoft YaHei"/>
-              </a:rPr>
-              <a:t>•  漏检 14 ｜ 误报 3（基线误报 150）</a:t>
-            </a:r>
-          </a:p>
-          <a:p>
-            <a:pPr>
-              <a:spcAft>
-                <a:spcPts val="1000"/>
-              </a:spcAft>
-            </a:pPr>
-            <a:r>
-              <a:rPr sz="2000" b="0">
-                <a:solidFill>
-                  <a:srgbClr val="1F3A5F"/>
-                </a:solidFill>
-                <a:latin typeface="Microsoft YaHei"/>
-                <a:ea typeface="Microsoft YaHei"/>
-              </a:rPr>
-              <a:t>•  train_loss 0.68 → 0.20（明显收敛）</a:t>
-            </a:r>
-          </a:p>
-          <a:p>
-            <a:pPr>
-              <a:spcAft>
-                <a:spcPts val="1000"/>
-              </a:spcAft>
-            </a:pPr>
-            <a:r>
-              <a:rPr sz="1800" b="0">
-                <a:solidFill>
-                  <a:srgbClr val="1F3A5F"/>
-                </a:solidFill>
-                <a:latin typeface="Microsoft YaHei"/>
-                <a:ea typeface="Microsoft YaHei"/>
-              </a:rPr>
-              <a:t>•  900 训练 / 300 测试，可复现</a:t>
-            </a:r>
-          </a:p>
-        </p:txBody>
-      </p:sp>
-      <p:sp>
-        <p:nvSpPr>
-          <p:cNvPr id="6" name="TextBox 5"/>
-          <p:cNvSpPr txBox="1"/>
-          <p:nvPr/>
-        </p:nvSpPr>
-        <p:spPr>
-          <a:xfrm>
-            <a:off x="11155680" y="6446520"/>
-            <a:ext cx="914400" cy="365760"/>
-          </a:xfrm>
-          <a:prstGeom prst="rect">
-            <a:avLst/>
-          </a:prstGeom>
-          <a:noFill/>
-        </p:spPr>
-        <p:txBody>
-          <a:bodyPr wrap="square">
-            <a:spAutoFit/>
-          </a:bodyPr>
-          <a:lstStyle/>
-          <a:p>
-            <a:pPr algn="r"/>
-            <a:r>
-              <a:rPr sz="1200" b="0">
-                <a:solidFill>
-                  <a:srgbClr val="4A4A4A"/>
-                </a:solidFill>
-                <a:latin typeface="Microsoft YaHei"/>
-                <a:ea typeface="Microsoft YaHei"/>
-              </a:rPr>
-              <a:t>08</a:t>
-            </a:r>
-          </a:p>
-        </p:txBody>
-      </p:sp>
-    </p:spTree>
-  </p:cSld>
-  <p:clrMapOvr>
-    <a:masterClrMapping/>
-  </p:clrMapOvr>
-</p:sld>
-</file>
-
-<file path=ppt/slides/slide9.xml><?xml version="1.0" encoding="utf-8"?>
-<p:sld xmlns:a="http://schemas.openxmlformats.org/drawingml/2006/main" xmlns:p="http://schemas.openxmlformats.org/presentationml/2006/main" xmlns:r="http://schemas.openxmlformats.org/officeDocument/2006/relationships">
-  <p:cSld>
-    <p:spTree>
-      <p:nvGrpSpPr>
-        <p:cNvPr id="1" name=""/>
-        <p:cNvGrpSpPr/>
-        <p:nvPr/>
-      </p:nvGrpSpPr>
-      <p:grpSpPr/>
-      <p:sp>
-        <p:nvSpPr>
-          <p:cNvPr id="2" name="Rectangle 1"/>
-          <p:cNvSpPr/>
-          <p:nvPr/>
-        </p:nvSpPr>
-        <p:spPr>
-          <a:xfrm>
-            <a:off x="0" y="0"/>
-            <a:ext cx="12191695" cy="1051560"/>
-          </a:xfrm>
-          <a:prstGeom prst="rect">
-            <a:avLst/>
-          </a:prstGeom>
-          <a:solidFill>
-            <a:srgbClr val="1F3A5F"/>
-          </a:solidFill>
-          <a:ln>
-            <a:noFill/>
-          </a:ln>
-          <a:effectLst/>
-        </p:spPr>
-        <p:style>
-          <a:lnRef idx="1">
-            <a:schemeClr val="accent1"/>
-          </a:lnRef>
-          <a:fillRef idx="3">
-            <a:schemeClr val="accent1"/>
-          </a:fillRef>
-          <a:effectRef idx="2">
-            <a:schemeClr val="accent1"/>
-          </a:effectRef>
-          <a:fontRef idx="minor">
-            <a:schemeClr val="lt1"/>
-          </a:fontRef>
-        </p:style>
-        <p:txBody>
-          <a:bodyPr rtlCol="0" anchor="ctr"/>
-          <a:lstStyle/>
-          <a:p>
-            <a:pPr algn="ctr"/>
-          </a:p>
-        </p:txBody>
-      </p:sp>
-      <p:sp>
-        <p:nvSpPr>
-          <p:cNvPr id="3" name="TextBox 2"/>
-          <p:cNvSpPr txBox="1"/>
-          <p:nvPr/>
-        </p:nvSpPr>
-        <p:spPr>
-          <a:xfrm>
-            <a:off x="640080" y="228600"/>
-            <a:ext cx="10515600" cy="640080"/>
-          </a:xfrm>
-          <a:prstGeom prst="rect">
-            <a:avLst/>
-          </a:prstGeom>
-          <a:noFill/>
-        </p:spPr>
-        <p:txBody>
-          <a:bodyPr wrap="square">
-            <a:spAutoFit/>
-          </a:bodyPr>
-          <a:lstStyle/>
-          <a:p>
-            <a:r>
-              <a:rPr sz="3000" b="1">
-                <a:solidFill>
-                  <a:srgbClr val="FFFFFF"/>
-                </a:solidFill>
-                <a:latin typeface="Microsoft YaHei"/>
-                <a:ea typeface="Microsoft YaHei"/>
-              </a:rPr>
-              <a:t>真实案例：漏检裂缝</a:t>
-            </a:r>
-          </a:p>
-        </p:txBody>
-      </p:sp>
-      <p:sp>
-        <p:nvSpPr>
-          <p:cNvPr id="4" name="Rectangle 3"/>
-          <p:cNvSpPr/>
-          <p:nvPr/>
-        </p:nvSpPr>
-        <p:spPr>
-          <a:xfrm>
-            <a:off x="0" y="1051560"/>
-            <a:ext cx="164592" cy="4892040"/>
-          </a:xfrm>
-          <a:prstGeom prst="rect">
-            <a:avLst/>
-          </a:prstGeom>
-          <a:solidFill>
-            <a:srgbClr val="E86A17"/>
-          </a:solidFill>
-          <a:ln>
-            <a:noFill/>
-          </a:ln>
-          <a:effectLst/>
-        </p:spPr>
-        <p:style>
-          <a:lnRef idx="1">
-            <a:schemeClr val="accent1"/>
-          </a:lnRef>
-          <a:fillRef idx="3">
-            <a:schemeClr val="accent1"/>
-          </a:fillRef>
-          <a:effectRef idx="2">
-            <a:schemeClr val="accent1"/>
-          </a:effectRef>
-          <a:fontRef idx="minor">
-            <a:schemeClr val="lt1"/>
-          </a:fontRef>
-        </p:style>
-        <p:txBody>
-          <a:bodyPr rtlCol="0" anchor="ctr"/>
-          <a:lstStyle/>
-          <a:p>
-            <a:pPr algn="ctr"/>
-          </a:p>
-        </p:txBody>
-      </p:sp>
-      <p:sp>
-        <p:nvSpPr>
-          <p:cNvPr id="5" name="TextBox 4"/>
-          <p:cNvSpPr txBox="1"/>
-          <p:nvPr/>
-        </p:nvSpPr>
-        <p:spPr>
-          <a:xfrm>
-            <a:off x="914400" y="1463040"/>
-            <a:ext cx="10424160" cy="4572000"/>
-          </a:xfrm>
-          <a:prstGeom prst="rect">
-            <a:avLst/>
-          </a:prstGeom>
-          <a:noFill/>
-        </p:spPr>
-        <p:txBody>
-          <a:bodyPr wrap="square">
-            <a:spAutoFit/>
-          </a:bodyPr>
-          <a:lstStyle/>
-          <a:p>
-            <a:pPr>
-              <a:spcAft>
-                <a:spcPts val="1000"/>
-              </a:spcAft>
-            </a:pPr>
-            <a:r>
-              <a:rPr sz="2000" b="1">
-                <a:solidFill>
-                  <a:srgbClr val="1F3A5F"/>
-                </a:solidFill>
-                <a:latin typeface="Microsoft YaHei"/>
-                <a:ea typeface="Microsoft YaHei"/>
-              </a:rPr>
-              <a:t>•  样本：data/raw/Positive/04283.jpg</a:t>
-            </a:r>
-          </a:p>
-          <a:p>
-            <a:pPr>
-              <a:spcAft>
-                <a:spcPts val="1000"/>
-              </a:spcAft>
-            </a:pPr>
-            <a:r>
-              <a:rPr sz="2000" b="0">
-                <a:solidFill>
-                  <a:srgbClr val="1F3A5F"/>
-                </a:solidFill>
-                <a:latin typeface="Microsoft YaHei"/>
-                <a:ea typeface="Microsoft YaHei"/>
-              </a:rPr>
-              <a:t>•  真实结果：crack；系统输出：no_crack（漏检）</a:t>
-            </a:r>
-          </a:p>
-          <a:p>
-            <a:pPr>
-              <a:spcAft>
-                <a:spcPts val="1000"/>
-              </a:spcAft>
-            </a:pPr>
-            <a:r>
-              <a:rPr sz="2000" b="0">
-                <a:solidFill>
-                  <a:srgbClr val="1F3A5F"/>
-                </a:solidFill>
-                <a:latin typeface="Microsoft YaHei"/>
-                <a:ea typeface="Microsoft YaHei"/>
-              </a:rPr>
-              <a:t>•  在 2ep 与 8ep 中均被漏检，是持续困难的样本</a:t>
-            </a:r>
-          </a:p>
-          <a:p>
-            <a:pPr>
-              <a:spcAft>
-                <a:spcPts val="1000"/>
-              </a:spcAft>
-            </a:pPr>
-            <a:r>
-              <a:rPr sz="2000" b="1">
-                <a:solidFill>
-                  <a:srgbClr val="1F3A5F"/>
-                </a:solidFill>
-                <a:latin typeface="Microsoft YaHei"/>
-                <a:ea typeface="Microsoft YaHei"/>
-              </a:rPr>
-              <a:t>•  漏检是筛查场景最危险的错误</a:t>
-            </a:r>
-          </a:p>
-        </p:txBody>
-      </p:sp>
-      <p:sp>
-        <p:nvSpPr>
-          <p:cNvPr id="6" name="TextBox 5"/>
-          <p:cNvSpPr txBox="1"/>
-          <p:nvPr/>
-        </p:nvSpPr>
-        <p:spPr>
-          <a:xfrm>
-            <a:off x="11155680" y="6446520"/>
-            <a:ext cx="914400" cy="365760"/>
-          </a:xfrm>
-          <a:prstGeom prst="rect">
-            <a:avLst/>
-          </a:prstGeom>
-          <a:noFill/>
-        </p:spPr>
-        <p:txBody>
-          <a:bodyPr wrap="square">
-            <a:spAutoFit/>
-          </a:bodyPr>
-          <a:lstStyle/>
-          <a:p>
-            <a:pPr algn="r"/>
-            <a:r>
-              <a:rPr sz="1200" b="0">
-                <a:solidFill>
-                  <a:srgbClr val="4A4A4A"/>
-                </a:solidFill>
-                <a:latin typeface="Microsoft YaHei"/>
-                <a:ea typeface="Microsoft YaHei"/>
-              </a:rPr>
-              <a:t>09</a:t>
             </a:r>
           </a:p>
         </p:txBody>

--- a/presentation.pptx
+++ b/presentation.pptx
@@ -4,14 +4,16 @@
   <p:sldMasterIdLst>
     <p:sldMasterId id="2147483648" r:id="rId1"/>
   </p:sldMasterIdLst>
+  <p:notesMasterIdLst>
+    <p:notesMasterId r:id="rId6"/>
+  </p:notesMasterIdLst>
   <p:sldIdLst>
-    <p:sldId id="256" r:id="rId7"/>
-    <p:sldId id="257" r:id="rId9"/>
-    <p:sldId id="258" r:id="rId10"/>
-    <p:sldId id="259" r:id="rId11"/>
-    <p:sldId id="260" r:id="rId12"/>
+    <p:sldId id="256" r:id="rId2"/>
+    <p:sldId id="257" r:id="rId3"/>
+    <p:sldId id="258" r:id="rId4"/>
+    <p:sldId id="259" r:id="rId5"/>
   </p:sldIdLst>
-  <p:sldSz cx="12191695" cy="6858000" type="screen4x3"/>
+  <p:sldSz cx="12192000" cy="6858000"/>
   <p:notesSz cx="6858000" cy="9144000"/>
   <p:defaultTextStyle>
     <a:defPPr>
@@ -108,11 +110,27 @@
       </a:defRPr>
     </a:lvl9pPr>
   </p:defaultTextStyle>
+  <p:extLst>
+    <p:ext uri="{EFAFB233-063F-42B5-8137-9DF3F51BA10A}">
+      <p15:sldGuideLst xmlns:p15="http://schemas.microsoft.com/office/powerpoint/2012/main">
+        <p15:guide id="1" orient="horz" pos="2160">
+          <p15:clr>
+            <a:srgbClr val="A4A3A4"/>
+          </p15:clr>
+        </p15:guide>
+        <p15:guide id="2" pos="2880">
+          <p15:clr>
+            <a:srgbClr val="A4A3A4"/>
+          </p15:clr>
+        </p15:guide>
+      </p15:sldGuideLst>
+    </p:ext>
+  </p:extLst>
 </p:presentation>
 </file>
 
 <file path=ppt/notesMasters/notesMaster1.xml><?xml version="1.0" encoding="utf-8"?>
-<p:notesMaster xmlns:a="http://schemas.openxmlformats.org/drawingml/2006/main" xmlns:p="http://schemas.openxmlformats.org/presentationml/2006/main" xmlns:r="http://schemas.openxmlformats.org/officeDocument/2006/relationships">
+<p:notesMaster xmlns:a="http://schemas.openxmlformats.org/drawingml/2006/main" xmlns:r="http://schemas.openxmlformats.org/officeDocument/2006/relationships" xmlns:p="http://schemas.openxmlformats.org/presentationml/2006/main">
   <p:cSld>
     <p:bg>
       <p:bgRef idx="1001">
@@ -133,241 +151,16 @@
           <a:chExt cx="0" cy="0"/>
         </a:xfrm>
       </p:grpSpPr>
-      <p:sp>
-        <p:nvSpPr>
-          <p:cNvPr id="2" name="Header Placeholder 1"/>
-          <p:cNvSpPr>
-            <a:spLocks noGrp="1"/>
-          </p:cNvSpPr>
-          <p:nvPr>
-            <p:ph type="hdr" sz="quarter"/>
-          </p:nvPr>
-        </p:nvSpPr>
-        <p:spPr>
-          <a:xfrm>
-            <a:off x="0" y="0"/>
-            <a:ext cx="2971800" cy="457200"/>
-          </a:xfrm>
-          <a:prstGeom prst="rect">
-            <a:avLst/>
-          </a:prstGeom>
-        </p:spPr>
-        <p:txBody>
-          <a:bodyPr vert="horz" lIns="91440" tIns="45720" rIns="91440" bIns="45720" rtlCol="0"/>
-          <a:lstStyle>
-            <a:lvl1pPr algn="l">
-              <a:defRPr sz="1200"/>
-            </a:lvl1pPr>
-          </a:lstStyle>
-          <a:p>
-            <a:endParaRPr lang="en-US"/>
-          </a:p>
-        </p:txBody>
-      </p:sp>
-      <p:sp>
-        <p:nvSpPr>
-          <p:cNvPr id="3" name="Date Placeholder 2"/>
-          <p:cNvSpPr>
-            <a:spLocks noGrp="1"/>
-          </p:cNvSpPr>
-          <p:nvPr>
-            <p:ph type="dt" idx="1"/>
-          </p:nvPr>
-        </p:nvSpPr>
-        <p:spPr>
-          <a:xfrm>
-            <a:off x="3884613" y="0"/>
-            <a:ext cx="2971800" cy="457200"/>
-          </a:xfrm>
-          <a:prstGeom prst="rect">
-            <a:avLst/>
-          </a:prstGeom>
-        </p:spPr>
-        <p:txBody>
-          <a:bodyPr vert="horz" lIns="91440" tIns="45720" rIns="91440" bIns="45720" rtlCol="0"/>
-          <a:lstStyle>
-            <a:lvl1pPr algn="r">
-              <a:defRPr sz="1200"/>
-            </a:lvl1pPr>
-          </a:lstStyle>
-          <a:p>
-            <a:fld id="{0F89C1C7-3DCD-1040-A9CF-14679D8B5DDD}" type="datetimeFigureOut">
-              <a:rPr lang="en-US" smtClean="0"/>
-              <a:t>10/17/16</a:t>
-            </a:fld>
-            <a:endParaRPr lang="en-US"/>
-          </a:p>
-        </p:txBody>
-      </p:sp>
-      <p:sp>
-        <p:nvSpPr>
-          <p:cNvPr id="4" name="Slide Image Placeholder 3"/>
-          <p:cNvSpPr>
-            <a:spLocks noGrp="1" noRot="1" noChangeAspect="1"/>
-          </p:cNvSpPr>
-          <p:nvPr>
-            <p:ph type="sldImg" idx="2"/>
-          </p:nvPr>
-        </p:nvSpPr>
-        <p:spPr>
-          <a:xfrm>
-            <a:off x="1143000" y="685800"/>
-            <a:ext cx="4572000" cy="3429000"/>
-          </a:xfrm>
-          <a:prstGeom prst="rect">
-            <a:avLst/>
-          </a:prstGeom>
-          <a:noFill/>
-          <a:ln w="12700">
-            <a:solidFill>
-              <a:prstClr val="black"/>
-            </a:solidFill>
-          </a:ln>
-        </p:spPr>
-        <p:txBody>
-          <a:bodyPr vert="horz" lIns="91440" tIns="45720" rIns="91440" bIns="45720" rtlCol="0" anchor="ctr"/>
-          <a:lstStyle/>
-          <a:p>
-            <a:endParaRPr lang="en-US"/>
-          </a:p>
-        </p:txBody>
-      </p:sp>
-      <p:sp>
-        <p:nvSpPr>
-          <p:cNvPr id="5" name="Notes Placeholder 4"/>
-          <p:cNvSpPr>
-            <a:spLocks noGrp="1"/>
-          </p:cNvSpPr>
-          <p:nvPr>
-            <p:ph type="body" sz="quarter" idx="3"/>
-          </p:nvPr>
-        </p:nvSpPr>
-        <p:spPr>
-          <a:xfrm>
-            <a:off x="685800" y="4343400"/>
-            <a:ext cx="5486400" cy="4114800"/>
-          </a:xfrm>
-          <a:prstGeom prst="rect">
-            <a:avLst/>
-          </a:prstGeom>
-        </p:spPr>
-        <p:txBody>
-          <a:bodyPr vert="horz" lIns="91440" tIns="45720" rIns="91440" bIns="45720" rtlCol="0"/>
-          <a:lstStyle/>
-          <a:p>
-            <a:pPr lvl="0"/>
-            <a:r>
-              <a:rPr lang="en-US" smtClean="0"/>
-              <a:t>Click to edit Master text styles</a:t>
-            </a:r>
-          </a:p>
-          <a:p>
-            <a:pPr lvl="1"/>
-            <a:r>
-              <a:rPr lang="en-US" smtClean="0"/>
-              <a:t>Second level</a:t>
-            </a:r>
-          </a:p>
-          <a:p>
-            <a:pPr lvl="2"/>
-            <a:r>
-              <a:rPr lang="en-US" smtClean="0"/>
-              <a:t>Third level</a:t>
-            </a:r>
-          </a:p>
-          <a:p>
-            <a:pPr lvl="3"/>
-            <a:r>
-              <a:rPr lang="en-US" smtClean="0"/>
-              <a:t>Fourth level</a:t>
-            </a:r>
-          </a:p>
-          <a:p>
-            <a:pPr lvl="4"/>
-            <a:r>
-              <a:rPr lang="en-US" smtClean="0"/>
-              <a:t>Fifth level</a:t>
-            </a:r>
-            <a:endParaRPr lang="en-US"/>
-          </a:p>
-        </p:txBody>
-      </p:sp>
-      <p:sp>
-        <p:nvSpPr>
-          <p:cNvPr id="6" name="Footer Placeholder 5"/>
-          <p:cNvSpPr>
-            <a:spLocks noGrp="1"/>
-          </p:cNvSpPr>
-          <p:nvPr>
-            <p:ph type="ftr" sz="quarter" idx="4"/>
-          </p:nvPr>
-        </p:nvSpPr>
-        <p:spPr>
-          <a:xfrm>
-            <a:off x="0" y="8685213"/>
-            <a:ext cx="2971800" cy="457200"/>
-          </a:xfrm>
-          <a:prstGeom prst="rect">
-            <a:avLst/>
-          </a:prstGeom>
-        </p:spPr>
-        <p:txBody>
-          <a:bodyPr vert="horz" lIns="91440" tIns="45720" rIns="91440" bIns="45720" rtlCol="0" anchor="b"/>
-          <a:lstStyle>
-            <a:lvl1pPr algn="l">
-              <a:defRPr sz="1200"/>
-            </a:lvl1pPr>
-          </a:lstStyle>
-          <a:p>
-            <a:endParaRPr lang="en-US"/>
-          </a:p>
-        </p:txBody>
-      </p:sp>
-      <p:sp>
-        <p:nvSpPr>
-          <p:cNvPr id="7" name="Slide Number Placeholder 6"/>
-          <p:cNvSpPr>
-            <a:spLocks noGrp="1"/>
-          </p:cNvSpPr>
-          <p:nvPr>
-            <p:ph type="sldNum" sz="quarter" idx="5"/>
-          </p:nvPr>
-        </p:nvSpPr>
-        <p:spPr>
-          <a:xfrm>
-            <a:off x="3884613" y="8685213"/>
-            <a:ext cx="2971800" cy="457200"/>
-          </a:xfrm>
-          <a:prstGeom prst="rect">
-            <a:avLst/>
-          </a:prstGeom>
-        </p:spPr>
-        <p:txBody>
-          <a:bodyPr vert="horz" lIns="91440" tIns="45720" rIns="91440" bIns="45720" rtlCol="0" anchor="b"/>
-          <a:lstStyle>
-            <a:lvl1pPr algn="r">
-              <a:defRPr sz="1200"/>
-            </a:lvl1pPr>
-          </a:lstStyle>
-          <a:p>
-            <a:fld id="{BB5E49A5-4136-284D-997B-48E1D791AD67}" type="slidenum">
-              <a:rPr lang="en-US" smtClean="0"/>
-              <a:t>‹#›</a:t>
-            </a:fld>
-            <a:endParaRPr lang="en-US"/>
-          </a:p>
-        </p:txBody>
-      </p:sp>
     </p:spTree>
     <p:extLst>
       <p:ext uri="{BB962C8B-B14F-4D97-AF65-F5344CB8AC3E}">
-        <p14:creationId xmlns:p14="http://schemas.microsoft.com/office/powerpoint/2010/main" val="2623252185"/>
+        <p14:creationId xmlns:p14="http://schemas.microsoft.com/office/powerpoint/2010/main" val="3587702384"/>
       </p:ext>
     </p:extLst>
   </p:cSld>
   <p:clrMap bg1="lt1" tx1="dk1" bg2="lt2" tx2="dk2" accent1="accent1" accent2="accent2" accent3="accent3" accent4="accent4" accent5="accent5" accent6="accent6" hlink="hlink" folHlink="folHlink"/>
   <p:notesStyle>
-    <a:lvl1pPr marL="0" algn="l" defTabSz="457200" rtl="0" eaLnBrk="1" latinLnBrk="0" hangingPunct="1">
+    <a:lvl1pPr marL="0" algn="l" defTabSz="914400" rtl="0" eaLnBrk="1" latinLnBrk="0" hangingPunct="1">
       <a:defRPr sz="1200" kern="1200">
         <a:solidFill>
           <a:schemeClr val="tx1"/>
@@ -377,7 +170,7 @@
         <a:cs typeface="+mn-cs"/>
       </a:defRPr>
     </a:lvl1pPr>
-    <a:lvl2pPr marL="457200" algn="l" defTabSz="457200" rtl="0" eaLnBrk="1" latinLnBrk="0" hangingPunct="1">
+    <a:lvl2pPr marL="457200" algn="l" defTabSz="914400" rtl="0" eaLnBrk="1" latinLnBrk="0" hangingPunct="1">
       <a:defRPr sz="1200" kern="1200">
         <a:solidFill>
           <a:schemeClr val="tx1"/>
@@ -387,7 +180,7 @@
         <a:cs typeface="+mn-cs"/>
       </a:defRPr>
     </a:lvl2pPr>
-    <a:lvl3pPr marL="914400" algn="l" defTabSz="457200" rtl="0" eaLnBrk="1" latinLnBrk="0" hangingPunct="1">
+    <a:lvl3pPr marL="914400" algn="l" defTabSz="914400" rtl="0" eaLnBrk="1" latinLnBrk="0" hangingPunct="1">
       <a:defRPr sz="1200" kern="1200">
         <a:solidFill>
           <a:schemeClr val="tx1"/>
@@ -397,7 +190,7 @@
         <a:cs typeface="+mn-cs"/>
       </a:defRPr>
     </a:lvl3pPr>
-    <a:lvl4pPr marL="1371600" algn="l" defTabSz="457200" rtl="0" eaLnBrk="1" latinLnBrk="0" hangingPunct="1">
+    <a:lvl4pPr marL="1371600" algn="l" defTabSz="914400" rtl="0" eaLnBrk="1" latinLnBrk="0" hangingPunct="1">
       <a:defRPr sz="1200" kern="1200">
         <a:solidFill>
           <a:schemeClr val="tx1"/>
@@ -407,7 +200,7 @@
         <a:cs typeface="+mn-cs"/>
       </a:defRPr>
     </a:lvl4pPr>
-    <a:lvl5pPr marL="1828800" algn="l" defTabSz="457200" rtl="0" eaLnBrk="1" latinLnBrk="0" hangingPunct="1">
+    <a:lvl5pPr marL="1828800" algn="l" defTabSz="914400" rtl="0" eaLnBrk="1" latinLnBrk="0" hangingPunct="1">
       <a:defRPr sz="1200" kern="1200">
         <a:solidFill>
           <a:schemeClr val="tx1"/>
@@ -417,7 +210,7 @@
         <a:cs typeface="+mn-cs"/>
       </a:defRPr>
     </a:lvl5pPr>
-    <a:lvl6pPr marL="2286000" algn="l" defTabSz="457200" rtl="0" eaLnBrk="1" latinLnBrk="0" hangingPunct="1">
+    <a:lvl6pPr marL="2286000" algn="l" defTabSz="914400" rtl="0" eaLnBrk="1" latinLnBrk="0" hangingPunct="1">
       <a:defRPr sz="1200" kern="1200">
         <a:solidFill>
           <a:schemeClr val="tx1"/>
@@ -427,7 +220,7 @@
         <a:cs typeface="+mn-cs"/>
       </a:defRPr>
     </a:lvl6pPr>
-    <a:lvl7pPr marL="2743200" algn="l" defTabSz="457200" rtl="0" eaLnBrk="1" latinLnBrk="0" hangingPunct="1">
+    <a:lvl7pPr marL="2743200" algn="l" defTabSz="914400" rtl="0" eaLnBrk="1" latinLnBrk="0" hangingPunct="1">
       <a:defRPr sz="1200" kern="1200">
         <a:solidFill>
           <a:schemeClr val="tx1"/>
@@ -437,7 +230,7 @@
         <a:cs typeface="+mn-cs"/>
       </a:defRPr>
     </a:lvl7pPr>
-    <a:lvl8pPr marL="3200400" algn="l" defTabSz="457200" rtl="0" eaLnBrk="1" latinLnBrk="0" hangingPunct="1">
+    <a:lvl8pPr marL="3200400" algn="l" defTabSz="914400" rtl="0" eaLnBrk="1" latinLnBrk="0" hangingPunct="1">
       <a:defRPr sz="1200" kern="1200">
         <a:solidFill>
           <a:schemeClr val="tx1"/>
@@ -447,7 +240,7 @@
         <a:cs typeface="+mn-cs"/>
       </a:defRPr>
     </a:lvl8pPr>
-    <a:lvl9pPr marL="3657600" algn="l" defTabSz="457200" rtl="0" eaLnBrk="1" latinLnBrk="0" hangingPunct="1">
+    <a:lvl9pPr marL="3657600" algn="l" defTabSz="914400" rtl="0" eaLnBrk="1" latinLnBrk="0" hangingPunct="1">
       <a:defRPr sz="1200" kern="1200">
         <a:solidFill>
           <a:schemeClr val="tx1"/>
@@ -462,7 +255,7 @@
 </file>
 
 <file path=ppt/notesSlides/notesSlide1.xml><?xml version="1.0" encoding="utf-8"?>
-<p:notes xmlns:a="http://schemas.openxmlformats.org/drawingml/2006/main" xmlns:p="http://schemas.openxmlformats.org/presentationml/2006/main" xmlns:r="http://schemas.openxmlformats.org/officeDocument/2006/relationships">
+<p:notes xmlns:a="http://schemas.openxmlformats.org/drawingml/2006/main" xmlns:r="http://schemas.openxmlformats.org/officeDocument/2006/relationships" xmlns:p="http://schemas.openxmlformats.org/presentationml/2006/main">
   <p:cSld>
     <p:spTree>
       <p:nvGrpSpPr>
@@ -482,7 +275,7 @@
         <p:nvSpPr>
           <p:cNvPr id="2" name="Slide Image Placeholder 1"/>
           <p:cNvSpPr>
-            <a:spLocks noGrp="1"/>
+            <a:spLocks noGrp="1" noRot="1" noChangeAspect="1"/>
           </p:cNvSpPr>
           <p:nvPr>
             <p:ph type="sldImg" idx="2"/>
@@ -497,7 +290,7 @@
             <a:spLocks noGrp="1"/>
           </p:cNvSpPr>
           <p:nvPr>
-            <p:ph type="body" idx="3" sz="quarter"/>
+            <p:ph type="body" sz="quarter" idx="3"/>
           </p:nvPr>
         </p:nvSpPr>
         <p:spPr/>
@@ -506,7 +299,7 @@
           <a:lstStyle/>
           <a:p>
             <a:r>
-              <a:t>大家好，我们是好难起名组。今天汇报混凝土裂缝筛查器：比较多数类基线与我们的小型 CNN，重点看漏检裂缝。</a:t>
+              <a:t>30 秒：说明使用者（设施维护团队）、业务价值（减少无效复核、暴露漏检风险）。明确这是图像二分类任务：Target=crack/no_crack，Features=3×64×64 RGB 张量。强调最危险错误是漏检裂缝（FN），并说明边界：不替代现场检查与安全决策。</a:t>
             </a:r>
           </a:p>
         </p:txBody>
@@ -518,7 +311,7 @@
             <a:spLocks noGrp="1"/>
           </p:cNvSpPr>
           <p:nvPr>
-            <p:ph type="sldNum" idx="5" sz="quarter"/>
+            <p:ph type="sldNum" sz="quarter" idx="5"/>
           </p:nvPr>
         </p:nvSpPr>
         <p:spPr/>
@@ -532,7 +325,7 @@
 </file>
 
 <file path=ppt/notesSlides/notesSlide2.xml><?xml version="1.0" encoding="utf-8"?>
-<p:notes xmlns:a="http://schemas.openxmlformats.org/drawingml/2006/main" xmlns:p="http://schemas.openxmlformats.org/presentationml/2006/main" xmlns:r="http://schemas.openxmlformats.org/officeDocument/2006/relationships">
+<p:notes xmlns:a="http://schemas.openxmlformats.org/drawingml/2006/main" xmlns:r="http://schemas.openxmlformats.org/officeDocument/2006/relationships" xmlns:p="http://schemas.openxmlformats.org/presentationml/2006/main">
   <p:cSld>
     <p:spTree>
       <p:nvGrpSpPr>
@@ -552,7 +345,7 @@
         <p:nvSpPr>
           <p:cNvPr id="2" name="Slide Image Placeholder 1"/>
           <p:cNvSpPr>
-            <a:spLocks noGrp="1"/>
+            <a:spLocks noGrp="1" noRot="1" noChangeAspect="1"/>
           </p:cNvSpPr>
           <p:nvPr>
             <p:ph type="sldImg" idx="2"/>
@@ -567,7 +360,7 @@
             <a:spLocks noGrp="1"/>
           </p:cNvSpPr>
           <p:nvPr>
-            <p:ph type="body" idx="3" sz="quarter"/>
+            <p:ph type="body" sz="quarter" idx="3"/>
           </p:nvPr>
         </p:nvSpPr>
         <p:spPr/>
@@ -576,7 +369,7 @@
           <a:lstStyle/>
           <a:p>
             <a:r>
-              <a:t>使用者的工作流程是先大量拍照、再人工复核，非常耗时。我们的真实输入是混凝土表面照片，输出是疑似裂缝和无裂缝两类，帮助维护人员优先复核疑似裂缝的照片，减少无效复核量。需要强调，这个筛查器只用于排序复核优先级，不能替代现场检查、工程师判断或结构安全决策。在所有错误里，最危险的是漏检裂缝：真实裂缝被标成无裂缝，就不会被送去复核，可能造成漏检。</a:t>
+              <a:t>45 秒：基线（多数类，acc 0.50）零训练、提供下限；CNN 用卷积核学习局部纹理、参数共享更稳健。二者同数据同划分同测试集。结合代码解释：两层卷积+池化逐步抽象特征；预处理统一到 3×64×64 张量。</a:t>
             </a:r>
           </a:p>
         </p:txBody>
@@ -588,7 +381,7 @@
             <a:spLocks noGrp="1"/>
           </p:cNvSpPr>
           <p:nvPr>
-            <p:ph type="sldNum" idx="5" sz="quarter"/>
+            <p:ph type="sldNum" sz="quarter" idx="5"/>
           </p:nvPr>
         </p:nvSpPr>
         <p:spPr/>
@@ -602,7 +395,7 @@
 </file>
 
 <file path=ppt/notesSlides/notesSlide3.xml><?xml version="1.0" encoding="utf-8"?>
-<p:notes xmlns:a="http://schemas.openxmlformats.org/drawingml/2006/main" xmlns:p="http://schemas.openxmlformats.org/presentationml/2006/main" xmlns:r="http://schemas.openxmlformats.org/officeDocument/2006/relationships">
+<p:notes xmlns:a="http://schemas.openxmlformats.org/drawingml/2006/main" xmlns:r="http://schemas.openxmlformats.org/officeDocument/2006/relationships" xmlns:p="http://schemas.openxmlformats.org/presentationml/2006/main">
   <p:cSld>
     <p:spTree>
       <p:nvGrpSpPr>
@@ -622,7 +415,7 @@
         <p:nvSpPr>
           <p:cNvPr id="2" name="Slide Image Placeholder 1"/>
           <p:cNvSpPr>
-            <a:spLocks noGrp="1"/>
+            <a:spLocks noGrp="1" noRot="1" noChangeAspect="1"/>
           </p:cNvSpPr>
           <p:nvPr>
             <p:ph type="sldImg" idx="2"/>
@@ -637,7 +430,7 @@
             <a:spLocks noGrp="1"/>
           </p:cNvSpPr>
           <p:nvPr>
-            <p:ph type="body" idx="3" sz="quarter"/>
+            <p:ph type="body" sz="quarter" idx="3"/>
           </p:nvPr>
         </p:nvSpPr>
         <p:spPr/>
@@ -646,7 +439,7 @@
           <a:lstStyle/>
           <a:p>
             <a:r>
-              <a:t>真实数据来自 Kaggle 的 Surface Crack Detection，正负类各两万张，用 --check-data 验证通过。我们先用最简单的多数类基线：把所有图都判为裂缝，准确率只有 0.5，误报了 150 张无裂缝图，几乎不可用。候选方法是我们自己实现的 SmallCNN，两层卷积加池化再接全连接，输入 64×64 彩色图，输出两类。我们只改了模型，数据划分、指标和训练流程都不动，保证对比公平。</a:t>
+              <a:t>60 秒：报主指标 acc 0.500→0.943、漏检 14、误报 150→3、train_loss 0.68→0.20。说明划分 75/25（900/300）。强调 FN 漏检最危险，FP 只增复核量。图表为占位：插入 Loss 曲线或混淆矩阵后，用“左图展示训练损失下降、右图展示漏检集中在哪类图像”引导讲解。</a:t>
             </a:r>
           </a:p>
         </p:txBody>
@@ -658,7 +451,7 @@
             <a:spLocks noGrp="1"/>
           </p:cNvSpPr>
           <p:nvPr>
-            <p:ph type="sldNum" idx="5" sz="quarter"/>
+            <p:ph type="sldNum" sz="quarter" idx="5"/>
           </p:nvPr>
         </p:nvSpPr>
         <p:spPr/>
@@ -672,7 +465,7 @@
 </file>
 
 <file path=ppt/notesSlides/notesSlide4.xml><?xml version="1.0" encoding="utf-8"?>
-<p:notes xmlns:a="http://schemas.openxmlformats.org/drawingml/2006/main" xmlns:p="http://schemas.openxmlformats.org/presentationml/2006/main" xmlns:r="http://schemas.openxmlformats.org/officeDocument/2006/relationships">
+<p:notes xmlns:a="http://schemas.openxmlformats.org/drawingml/2006/main" xmlns:r="http://schemas.openxmlformats.org/officeDocument/2006/relationships" xmlns:p="http://schemas.openxmlformats.org/presentationml/2006/main">
   <p:cSld>
     <p:spTree>
       <p:nvGrpSpPr>
@@ -692,7 +485,7 @@
         <p:nvSpPr>
           <p:cNvPr id="2" name="Slide Image Placeholder 1"/>
           <p:cNvSpPr>
-            <a:spLocks noGrp="1"/>
+            <a:spLocks noGrp="1" noRot="1" noChangeAspect="1"/>
           </p:cNvSpPr>
           <p:nvPr>
             <p:ph type="sldImg" idx="2"/>
@@ -707,7 +500,7 @@
             <a:spLocks noGrp="1"/>
           </p:cNvSpPr>
           <p:nvPr>
-            <p:ph type="body" idx="3" sz="quarter"/>
+            <p:ph type="body" sz="quarter" idx="3"/>
           </p:nvPr>
         </p:nvSpPr>
         <p:spPr/>
@@ -716,7 +509,7 @@
           <a:lstStyle/>
           <a:p>
             <a:r>
-              <a:t>训练时每类最多取 600 张，75 比 25 划分，seed 2026，共 900 训练、300 测试，训练 8 个 epoch。结果上，基线准确率 0.5、误报 150；CNN 准确率 0.943、漏检 14、误报只有 3，误报和漏检都明显下降。最重要的一条证据是 CNN 训练损失从 0.68 降到 0.20，说明模型收敛良好，这些数字都能由 README 命令复现。</a:t>
+              <a:t>45 秒：用真实失败收尾（漏检 14 张，04283.jpg 多轮都漏）。说明理论上合理的失败场景：光照/阴影/划痕相似、细裂缝细节丢失、切块数据泄漏使数字偏乐观。明确证据不支持现场检查/安全决策。下一项：统计漏检共性 → 数据增强 → 按源图划分重评估。</a:t>
             </a:r>
           </a:p>
         </p:txBody>
@@ -728,77 +521,7 @@
             <a:spLocks noGrp="1"/>
           </p:cNvSpPr>
           <p:nvPr>
-            <p:ph type="sldNum" idx="5" sz="quarter"/>
-          </p:nvPr>
-        </p:nvSpPr>
-        <p:spPr/>
-      </p:sp>
-    </p:spTree>
-  </p:cSld>
-  <p:clrMapOvr>
-    <a:masterClrMapping/>
-  </p:clrMapOvr>
-</p:notes>
-</file>
-
-<file path=ppt/notesSlides/notesSlide5.xml><?xml version="1.0" encoding="utf-8"?>
-<p:notes xmlns:a="http://schemas.openxmlformats.org/drawingml/2006/main" xmlns:p="http://schemas.openxmlformats.org/presentationml/2006/main" xmlns:r="http://schemas.openxmlformats.org/officeDocument/2006/relationships">
-  <p:cSld>
-    <p:spTree>
-      <p:nvGrpSpPr>
-        <p:cNvPr id="1" name=""/>
-        <p:cNvGrpSpPr/>
-        <p:nvPr/>
-      </p:nvGrpSpPr>
-      <p:grpSpPr>
-        <a:xfrm>
-          <a:off x="0" y="0"/>
-          <a:ext cx="0" cy="0"/>
-          <a:chOff x="0" y="0"/>
-          <a:chExt cx="0" cy="0"/>
-        </a:xfrm>
-      </p:grpSpPr>
-      <p:sp>
-        <p:nvSpPr>
-          <p:cNvPr id="2" name="Slide Image Placeholder 1"/>
-          <p:cNvSpPr>
-            <a:spLocks noGrp="1"/>
-          </p:cNvSpPr>
-          <p:nvPr>
-            <p:ph type="sldImg" idx="2"/>
-          </p:nvPr>
-        </p:nvSpPr>
-        <p:spPr/>
-      </p:sp>
-      <p:sp>
-        <p:nvSpPr>
-          <p:cNvPr id="3" name="Notes Placeholder 2"/>
-          <p:cNvSpPr>
-            <a:spLocks noGrp="1"/>
-          </p:cNvSpPr>
-          <p:nvPr>
-            <p:ph type="body" idx="3" sz="quarter"/>
-          </p:nvPr>
-        </p:nvSpPr>
-        <p:spPr/>
-        <p:txBody>
-          <a:bodyPr/>
-          <a:lstStyle/>
-          <a:p>
-            <a:r>
-              <a:t>要强调限制：CNN 仍漏检 14 张裂缝，比如这张被漏检的真实裂缝，2 个和 8 个 epoch 都被漏检，说明漏检还没清零。而且筛查器只能安排复核顺序，不能替代现场检查或工程判断；切块数据有泄漏，数字可能偏乐观。总结：CNN 明显优于基线，大幅减少人工复核量。下一步看漏检图像共性，比如亮度、裂缝粗细，再考虑数据增强。谢谢大家。</a:t>
-            </a:r>
-          </a:p>
-        </p:txBody>
-      </p:sp>
-      <p:sp>
-        <p:nvSpPr>
-          <p:cNvPr id="4" name="Slide Number Placeholder 3"/>
-          <p:cNvSpPr>
-            <a:spLocks noGrp="1"/>
-          </p:cNvSpPr>
-          <p:nvPr>
-            <p:ph type="sldNum" idx="5" sz="quarter"/>
+            <p:ph type="sldNum" sz="quarter" idx="5"/>
           </p:nvPr>
         </p:nvSpPr>
         <p:spPr/>
@@ -849,10 +572,9 @@
           <a:lstStyle/>
           <a:p>
             <a:r>
-              <a:rPr lang="en-US" smtClean="0"/>
+              <a:rPr lang="en-US"/>
               <a:t>Click to edit Master title style</a:t>
             </a:r>
-            <a:endParaRPr lang="en-US"/>
           </a:p>
         </p:txBody>
       </p:sp>
@@ -968,10 +690,9 @@
           </a:lstStyle>
           <a:p>
             <a:r>
-              <a:rPr lang="en-US" smtClean="0"/>
+              <a:rPr lang="en-US"/>
               <a:t>Click to edit Master subtitle style</a:t>
             </a:r>
-            <a:endParaRPr lang="en-US"/>
           </a:p>
         </p:txBody>
       </p:sp>
@@ -992,7 +713,7 @@
           <a:p>
             <a:fld id="{5BCAD085-E8A6-8845-BD4E-CB4CCA059FC4}" type="datetimeFigureOut">
               <a:rPr lang="en-US" smtClean="0"/>
-              <a:t>1/27/13</a:t>
+              <a:t>8/19/2026</a:t>
             </a:fld>
             <a:endParaRPr lang="en-US"/>
           </a:p>
@@ -1086,10 +807,9 @@
           <a:lstStyle/>
           <a:p>
             <a:r>
-              <a:rPr lang="en-US" smtClean="0"/>
+              <a:rPr lang="en-US"/>
               <a:t>Click to edit Master title style</a:t>
             </a:r>
-            <a:endParaRPr lang="en-US"/>
           </a:p>
         </p:txBody>
       </p:sp>
@@ -1110,38 +830,37 @@
           <a:p>
             <a:pPr lvl="0"/>
             <a:r>
-              <a:rPr lang="en-US" smtClean="0"/>
+              <a:rPr lang="en-US"/>
               <a:t>Click to edit Master text styles</a:t>
             </a:r>
           </a:p>
           <a:p>
             <a:pPr lvl="1"/>
             <a:r>
-              <a:rPr lang="en-US" smtClean="0"/>
+              <a:rPr lang="en-US"/>
               <a:t>Second level</a:t>
             </a:r>
           </a:p>
           <a:p>
             <a:pPr lvl="2"/>
             <a:r>
-              <a:rPr lang="en-US" smtClean="0"/>
+              <a:rPr lang="en-US"/>
               <a:t>Third level</a:t>
             </a:r>
           </a:p>
           <a:p>
             <a:pPr lvl="3"/>
             <a:r>
-              <a:rPr lang="en-US" smtClean="0"/>
+              <a:rPr lang="en-US"/>
               <a:t>Fourth level</a:t>
             </a:r>
           </a:p>
           <a:p>
             <a:pPr lvl="4"/>
             <a:r>
-              <a:rPr lang="en-US" smtClean="0"/>
+              <a:rPr lang="en-US"/>
               <a:t>Fifth level</a:t>
             </a:r>
-            <a:endParaRPr lang="en-US"/>
           </a:p>
         </p:txBody>
       </p:sp>
@@ -1162,7 +881,7 @@
           <a:p>
             <a:fld id="{5BCAD085-E8A6-8845-BD4E-CB4CCA059FC4}" type="datetimeFigureOut">
               <a:rPr lang="en-US" smtClean="0"/>
-              <a:t>1/27/13</a:t>
+              <a:t>8/19/2026</a:t>
             </a:fld>
             <a:endParaRPr lang="en-US"/>
           </a:p>
@@ -1261,10 +980,9 @@
           <a:lstStyle/>
           <a:p>
             <a:r>
-              <a:rPr lang="en-US" smtClean="0"/>
+              <a:rPr lang="en-US"/>
               <a:t>Click to edit Master title style</a:t>
             </a:r>
-            <a:endParaRPr lang="en-US"/>
           </a:p>
         </p:txBody>
       </p:sp>
@@ -1290,38 +1008,37 @@
           <a:p>
             <a:pPr lvl="0"/>
             <a:r>
-              <a:rPr lang="en-US" smtClean="0"/>
+              <a:rPr lang="en-US"/>
               <a:t>Click to edit Master text styles</a:t>
             </a:r>
           </a:p>
           <a:p>
             <a:pPr lvl="1"/>
             <a:r>
-              <a:rPr lang="en-US" smtClean="0"/>
+              <a:rPr lang="en-US"/>
               <a:t>Second level</a:t>
             </a:r>
           </a:p>
           <a:p>
             <a:pPr lvl="2"/>
             <a:r>
-              <a:rPr lang="en-US" smtClean="0"/>
+              <a:rPr lang="en-US"/>
               <a:t>Third level</a:t>
             </a:r>
           </a:p>
           <a:p>
             <a:pPr lvl="3"/>
             <a:r>
-              <a:rPr lang="en-US" smtClean="0"/>
+              <a:rPr lang="en-US"/>
               <a:t>Fourth level</a:t>
             </a:r>
           </a:p>
           <a:p>
             <a:pPr lvl="4"/>
             <a:r>
-              <a:rPr lang="en-US" smtClean="0"/>
+              <a:rPr lang="en-US"/>
               <a:t>Fifth level</a:t>
             </a:r>
-            <a:endParaRPr lang="en-US"/>
           </a:p>
         </p:txBody>
       </p:sp>
@@ -1342,7 +1059,7 @@
           <a:p>
             <a:fld id="{5BCAD085-E8A6-8845-BD4E-CB4CCA059FC4}" type="datetimeFigureOut">
               <a:rPr lang="en-US" smtClean="0"/>
-              <a:t>1/27/13</a:t>
+              <a:t>8/19/2026</a:t>
             </a:fld>
             <a:endParaRPr lang="en-US"/>
           </a:p>
@@ -1436,10 +1153,9 @@
           <a:lstStyle/>
           <a:p>
             <a:r>
-              <a:rPr lang="en-US" smtClean="0"/>
+              <a:rPr lang="en-US"/>
               <a:t>Click to edit Master title style</a:t>
             </a:r>
-            <a:endParaRPr lang="en-US"/>
           </a:p>
         </p:txBody>
       </p:sp>
@@ -1460,38 +1176,37 @@
           <a:p>
             <a:pPr lvl="0"/>
             <a:r>
-              <a:rPr lang="en-US" smtClean="0"/>
+              <a:rPr lang="en-US"/>
               <a:t>Click to edit Master text styles</a:t>
             </a:r>
           </a:p>
           <a:p>
             <a:pPr lvl="1"/>
             <a:r>
-              <a:rPr lang="en-US" smtClean="0"/>
+              <a:rPr lang="en-US"/>
               <a:t>Second level</a:t>
             </a:r>
           </a:p>
           <a:p>
             <a:pPr lvl="2"/>
             <a:r>
-              <a:rPr lang="en-US" smtClean="0"/>
+              <a:rPr lang="en-US"/>
               <a:t>Third level</a:t>
             </a:r>
           </a:p>
           <a:p>
             <a:pPr lvl="3"/>
             <a:r>
-              <a:rPr lang="en-US" smtClean="0"/>
+              <a:rPr lang="en-US"/>
               <a:t>Fourth level</a:t>
             </a:r>
           </a:p>
           <a:p>
             <a:pPr lvl="4"/>
             <a:r>
-              <a:rPr lang="en-US" smtClean="0"/>
+              <a:rPr lang="en-US"/>
               <a:t>Fifth level</a:t>
             </a:r>
-            <a:endParaRPr lang="en-US"/>
           </a:p>
         </p:txBody>
       </p:sp>
@@ -1512,7 +1227,7 @@
           <a:p>
             <a:fld id="{5BCAD085-E8A6-8845-BD4E-CB4CCA059FC4}" type="datetimeFigureOut">
               <a:rPr lang="en-US" smtClean="0"/>
-              <a:t>1/27/13</a:t>
+              <a:t>8/19/2026</a:t>
             </a:fld>
             <a:endParaRPr lang="en-US"/>
           </a:p>
@@ -1615,10 +1330,9 @@
           </a:lstStyle>
           <a:p>
             <a:r>
-              <a:rPr lang="en-US" smtClean="0"/>
+              <a:rPr lang="en-US"/>
               <a:t>Click to edit Master title style</a:t>
             </a:r>
-            <a:endParaRPr lang="en-US"/>
           </a:p>
         </p:txBody>
       </p:sp>
@@ -1735,7 +1449,7 @@
           <a:p>
             <a:pPr lvl="0"/>
             <a:r>
-              <a:rPr lang="en-US" smtClean="0"/>
+              <a:rPr lang="en-US"/>
               <a:t>Click to edit Master text styles</a:t>
             </a:r>
           </a:p>
@@ -1758,7 +1472,7 @@
           <a:p>
             <a:fld id="{5BCAD085-E8A6-8845-BD4E-CB4CCA059FC4}" type="datetimeFigureOut">
               <a:rPr lang="en-US" smtClean="0"/>
-              <a:t>1/27/13</a:t>
+              <a:t>8/19/2026</a:t>
             </a:fld>
             <a:endParaRPr lang="en-US"/>
           </a:p>
@@ -1852,10 +1566,9 @@
           <a:lstStyle/>
           <a:p>
             <a:r>
-              <a:rPr lang="en-US" smtClean="0"/>
+              <a:rPr lang="en-US"/>
               <a:t>Click to edit Master title style</a:t>
             </a:r>
-            <a:endParaRPr lang="en-US"/>
           </a:p>
         </p:txBody>
       </p:sp>
@@ -1909,38 +1622,37 @@
           <a:p>
             <a:pPr lvl="0"/>
             <a:r>
-              <a:rPr lang="en-US" smtClean="0"/>
+              <a:rPr lang="en-US"/>
               <a:t>Click to edit Master text styles</a:t>
             </a:r>
           </a:p>
           <a:p>
             <a:pPr lvl="1"/>
             <a:r>
-              <a:rPr lang="en-US" smtClean="0"/>
+              <a:rPr lang="en-US"/>
               <a:t>Second level</a:t>
             </a:r>
           </a:p>
           <a:p>
             <a:pPr lvl="2"/>
             <a:r>
-              <a:rPr lang="en-US" smtClean="0"/>
+              <a:rPr lang="en-US"/>
               <a:t>Third level</a:t>
             </a:r>
           </a:p>
           <a:p>
             <a:pPr lvl="3"/>
             <a:r>
-              <a:rPr lang="en-US" smtClean="0"/>
+              <a:rPr lang="en-US"/>
               <a:t>Fourth level</a:t>
             </a:r>
           </a:p>
           <a:p>
             <a:pPr lvl="4"/>
             <a:r>
-              <a:rPr lang="en-US" smtClean="0"/>
+              <a:rPr lang="en-US"/>
               <a:t>Fifth level</a:t>
             </a:r>
-            <a:endParaRPr lang="en-US"/>
           </a:p>
         </p:txBody>
       </p:sp>
@@ -1994,38 +1706,37 @@
           <a:p>
             <a:pPr lvl="0"/>
             <a:r>
-              <a:rPr lang="en-US" smtClean="0"/>
+              <a:rPr lang="en-US"/>
               <a:t>Click to edit Master text styles</a:t>
             </a:r>
           </a:p>
           <a:p>
             <a:pPr lvl="1"/>
             <a:r>
-              <a:rPr lang="en-US" smtClean="0"/>
+              <a:rPr lang="en-US"/>
               <a:t>Second level</a:t>
             </a:r>
           </a:p>
           <a:p>
             <a:pPr lvl="2"/>
             <a:r>
-              <a:rPr lang="en-US" smtClean="0"/>
+              <a:rPr lang="en-US"/>
               <a:t>Third level</a:t>
             </a:r>
           </a:p>
           <a:p>
             <a:pPr lvl="3"/>
             <a:r>
-              <a:rPr lang="en-US" smtClean="0"/>
+              <a:rPr lang="en-US"/>
               <a:t>Fourth level</a:t>
             </a:r>
           </a:p>
           <a:p>
             <a:pPr lvl="4"/>
             <a:r>
-              <a:rPr lang="en-US" smtClean="0"/>
+              <a:rPr lang="en-US"/>
               <a:t>Fifth level</a:t>
             </a:r>
-            <a:endParaRPr lang="en-US"/>
           </a:p>
         </p:txBody>
       </p:sp>
@@ -2046,7 +1757,7 @@
           <a:p>
             <a:fld id="{5BCAD085-E8A6-8845-BD4E-CB4CCA059FC4}" type="datetimeFigureOut">
               <a:rPr lang="en-US" smtClean="0"/>
-              <a:t>1/27/13</a:t>
+              <a:t>8/19/2026</a:t>
             </a:fld>
             <a:endParaRPr lang="en-US"/>
           </a:p>
@@ -2144,10 +1855,9 @@
           </a:lstStyle>
           <a:p>
             <a:r>
-              <a:rPr lang="en-US" smtClean="0"/>
+              <a:rPr lang="en-US"/>
               <a:t>Click to edit Master title style</a:t>
             </a:r>
-            <a:endParaRPr lang="en-US"/>
           </a:p>
         </p:txBody>
       </p:sp>
@@ -2210,7 +1920,7 @@
           <a:p>
             <a:pPr lvl="0"/>
             <a:r>
-              <a:rPr lang="en-US" smtClean="0"/>
+              <a:rPr lang="en-US"/>
               <a:t>Click to edit Master text styles</a:t>
             </a:r>
           </a:p>
@@ -2266,38 +1976,37 @@
           <a:p>
             <a:pPr lvl="0"/>
             <a:r>
-              <a:rPr lang="en-US" smtClean="0"/>
+              <a:rPr lang="en-US"/>
               <a:t>Click to edit Master text styles</a:t>
             </a:r>
           </a:p>
           <a:p>
             <a:pPr lvl="1"/>
             <a:r>
-              <a:rPr lang="en-US" smtClean="0"/>
+              <a:rPr lang="en-US"/>
               <a:t>Second level</a:t>
             </a:r>
           </a:p>
           <a:p>
             <a:pPr lvl="2"/>
             <a:r>
-              <a:rPr lang="en-US" smtClean="0"/>
+              <a:rPr lang="en-US"/>
               <a:t>Third level</a:t>
             </a:r>
           </a:p>
           <a:p>
             <a:pPr lvl="3"/>
             <a:r>
-              <a:rPr lang="en-US" smtClean="0"/>
+              <a:rPr lang="en-US"/>
               <a:t>Fourth level</a:t>
             </a:r>
           </a:p>
           <a:p>
             <a:pPr lvl="4"/>
             <a:r>
-              <a:rPr lang="en-US" smtClean="0"/>
+              <a:rPr lang="en-US"/>
               <a:t>Fifth level</a:t>
             </a:r>
-            <a:endParaRPr lang="en-US"/>
           </a:p>
         </p:txBody>
       </p:sp>
@@ -2360,7 +2069,7 @@
           <a:p>
             <a:pPr lvl="0"/>
             <a:r>
-              <a:rPr lang="en-US" smtClean="0"/>
+              <a:rPr lang="en-US"/>
               <a:t>Click to edit Master text styles</a:t>
             </a:r>
           </a:p>
@@ -2416,38 +2125,37 @@
           <a:p>
             <a:pPr lvl="0"/>
             <a:r>
-              <a:rPr lang="en-US" smtClean="0"/>
+              <a:rPr lang="en-US"/>
               <a:t>Click to edit Master text styles</a:t>
             </a:r>
           </a:p>
           <a:p>
             <a:pPr lvl="1"/>
             <a:r>
-              <a:rPr lang="en-US" smtClean="0"/>
+              <a:rPr lang="en-US"/>
               <a:t>Second level</a:t>
             </a:r>
           </a:p>
           <a:p>
             <a:pPr lvl="2"/>
             <a:r>
-              <a:rPr lang="en-US" smtClean="0"/>
+              <a:rPr lang="en-US"/>
               <a:t>Third level</a:t>
             </a:r>
           </a:p>
           <a:p>
             <a:pPr lvl="3"/>
             <a:r>
-              <a:rPr lang="en-US" smtClean="0"/>
+              <a:rPr lang="en-US"/>
               <a:t>Fourth level</a:t>
             </a:r>
           </a:p>
           <a:p>
             <a:pPr lvl="4"/>
             <a:r>
-              <a:rPr lang="en-US" smtClean="0"/>
+              <a:rPr lang="en-US"/>
               <a:t>Fifth level</a:t>
             </a:r>
-            <a:endParaRPr lang="en-US"/>
           </a:p>
         </p:txBody>
       </p:sp>
@@ -2468,7 +2176,7 @@
           <a:p>
             <a:fld id="{5BCAD085-E8A6-8845-BD4E-CB4CCA059FC4}" type="datetimeFigureOut">
               <a:rPr lang="en-US" smtClean="0"/>
-              <a:t>1/27/13</a:t>
+              <a:t>8/19/2026</a:t>
             </a:fld>
             <a:endParaRPr lang="en-US"/>
           </a:p>
@@ -2562,10 +2270,9 @@
           <a:lstStyle/>
           <a:p>
             <a:r>
-              <a:rPr lang="en-US" smtClean="0"/>
+              <a:rPr lang="en-US"/>
               <a:t>Click to edit Master title style</a:t>
             </a:r>
-            <a:endParaRPr lang="en-US"/>
           </a:p>
         </p:txBody>
       </p:sp>
@@ -2586,7 +2293,7 @@
           <a:p>
             <a:fld id="{5BCAD085-E8A6-8845-BD4E-CB4CCA059FC4}" type="datetimeFigureOut">
               <a:rPr lang="en-US" smtClean="0"/>
-              <a:t>1/27/13</a:t>
+              <a:t>8/19/2026</a:t>
             </a:fld>
             <a:endParaRPr lang="en-US"/>
           </a:p>
@@ -2681,7 +2388,7 @@
           <a:p>
             <a:fld id="{5BCAD085-E8A6-8845-BD4E-CB4CCA059FC4}" type="datetimeFigureOut">
               <a:rPr lang="en-US" smtClean="0"/>
-              <a:t>1/27/13</a:t>
+              <a:t>8/19/2026</a:t>
             </a:fld>
             <a:endParaRPr lang="en-US"/>
           </a:p>
@@ -2784,10 +2491,9 @@
           </a:lstStyle>
           <a:p>
             <a:r>
-              <a:rPr lang="en-US" smtClean="0"/>
+              <a:rPr lang="en-US"/>
               <a:t>Click to edit Master title style</a:t>
             </a:r>
-            <a:endParaRPr lang="en-US"/>
           </a:p>
         </p:txBody>
       </p:sp>
@@ -2841,38 +2547,37 @@
           <a:p>
             <a:pPr lvl="0"/>
             <a:r>
-              <a:rPr lang="en-US" smtClean="0"/>
+              <a:rPr lang="en-US"/>
               <a:t>Click to edit Master text styles</a:t>
             </a:r>
           </a:p>
           <a:p>
             <a:pPr lvl="1"/>
             <a:r>
-              <a:rPr lang="en-US" smtClean="0"/>
+              <a:rPr lang="en-US"/>
               <a:t>Second level</a:t>
             </a:r>
           </a:p>
           <a:p>
             <a:pPr lvl="2"/>
             <a:r>
-              <a:rPr lang="en-US" smtClean="0"/>
+              <a:rPr lang="en-US"/>
               <a:t>Third level</a:t>
             </a:r>
           </a:p>
           <a:p>
             <a:pPr lvl="3"/>
             <a:r>
-              <a:rPr lang="en-US" smtClean="0"/>
+              <a:rPr lang="en-US"/>
               <a:t>Fourth level</a:t>
             </a:r>
           </a:p>
           <a:p>
             <a:pPr lvl="4"/>
             <a:r>
-              <a:rPr lang="en-US" smtClean="0"/>
+              <a:rPr lang="en-US"/>
               <a:t>Fifth level</a:t>
             </a:r>
-            <a:endParaRPr lang="en-US"/>
           </a:p>
         </p:txBody>
       </p:sp>
@@ -2935,7 +2640,7 @@
           <a:p>
             <a:pPr lvl="0"/>
             <a:r>
-              <a:rPr lang="en-US" smtClean="0"/>
+              <a:rPr lang="en-US"/>
               <a:t>Click to edit Master text styles</a:t>
             </a:r>
           </a:p>
@@ -2958,7 +2663,7 @@
           <a:p>
             <a:fld id="{5BCAD085-E8A6-8845-BD4E-CB4CCA059FC4}" type="datetimeFigureOut">
               <a:rPr lang="en-US" smtClean="0"/>
-              <a:t>1/27/13</a:t>
+              <a:t>8/19/2026</a:t>
             </a:fld>
             <a:endParaRPr lang="en-US"/>
           </a:p>
@@ -3061,10 +2766,9 @@
           </a:lstStyle>
           <a:p>
             <a:r>
-              <a:rPr lang="en-US" smtClean="0"/>
+              <a:rPr lang="en-US"/>
               <a:t>Click to edit Master title style</a:t>
             </a:r>
-            <a:endParaRPr lang="en-US"/>
           </a:p>
         </p:txBody>
       </p:sp>
@@ -3188,7 +2892,7 @@
           <a:p>
             <a:pPr lvl="0"/>
             <a:r>
-              <a:rPr lang="en-US" smtClean="0"/>
+              <a:rPr lang="en-US"/>
               <a:t>Click to edit Master text styles</a:t>
             </a:r>
           </a:p>
@@ -3211,7 +2915,7 @@
           <a:p>
             <a:fld id="{5BCAD085-E8A6-8845-BD4E-CB4CCA059FC4}" type="datetimeFigureOut">
               <a:rPr lang="en-US" smtClean="0"/>
-              <a:t>1/27/13</a:t>
+              <a:t>8/19/2026</a:t>
             </a:fld>
             <a:endParaRPr lang="en-US"/>
           </a:p>
@@ -3320,10 +3024,9 @@
           <a:lstStyle/>
           <a:p>
             <a:r>
-              <a:rPr lang="en-US" smtClean="0"/>
+              <a:rPr lang="en-US"/>
               <a:t>Click to edit Master title style</a:t>
             </a:r>
-            <a:endParaRPr lang="en-US"/>
           </a:p>
         </p:txBody>
       </p:sp>
@@ -3354,38 +3057,37 @@
           <a:p>
             <a:pPr lvl="0"/>
             <a:r>
-              <a:rPr lang="en-US" smtClean="0"/>
+              <a:rPr lang="en-US"/>
               <a:t>Click to edit Master text styles</a:t>
             </a:r>
           </a:p>
           <a:p>
             <a:pPr lvl="1"/>
             <a:r>
-              <a:rPr lang="en-US" smtClean="0"/>
+              <a:rPr lang="en-US"/>
               <a:t>Second level</a:t>
             </a:r>
           </a:p>
           <a:p>
             <a:pPr lvl="2"/>
             <a:r>
-              <a:rPr lang="en-US" smtClean="0"/>
+              <a:rPr lang="en-US"/>
               <a:t>Third level</a:t>
             </a:r>
           </a:p>
           <a:p>
             <a:pPr lvl="3"/>
             <a:r>
-              <a:rPr lang="en-US" smtClean="0"/>
+              <a:rPr lang="en-US"/>
               <a:t>Fourth level</a:t>
             </a:r>
           </a:p>
           <a:p>
             <a:pPr lvl="4"/>
             <a:r>
-              <a:rPr lang="en-US" smtClean="0"/>
+              <a:rPr lang="en-US"/>
               <a:t>Fifth level</a:t>
             </a:r>
-            <a:endParaRPr lang="en-US"/>
           </a:p>
         </p:txBody>
       </p:sp>
@@ -3424,7 +3126,7 @@
           <a:p>
             <a:fld id="{5BCAD085-E8A6-8845-BD4E-CB4CCA059FC4}" type="datetimeFigureOut">
               <a:rPr lang="en-US" smtClean="0"/>
-              <a:t>1/27/13</a:t>
+              <a:t>8/19/2026</a:t>
             </a:fld>
             <a:endParaRPr lang="en-US"/>
           </a:p>
@@ -3783,7 +3485,7 @@
 </file>
 
 <file path=ppt/slides/slide1.xml><?xml version="1.0" encoding="utf-8"?>
-<p:sld xmlns:a="http://schemas.openxmlformats.org/drawingml/2006/main" xmlns:p="http://schemas.openxmlformats.org/presentationml/2006/main" xmlns:r="http://schemas.openxmlformats.org/officeDocument/2006/relationships">
+<p:sld xmlns:a="http://schemas.openxmlformats.org/drawingml/2006/main" xmlns:r="http://schemas.openxmlformats.org/officeDocument/2006/relationships" xmlns:p="http://schemas.openxmlformats.org/presentationml/2006/main">
   <p:cSld>
     <p:spTree>
       <p:nvGrpSpPr>
@@ -3791,7 +3493,14 @@
         <p:cNvGrpSpPr/>
         <p:nvPr/>
       </p:nvGrpSpPr>
-      <p:grpSpPr/>
+      <p:grpSpPr>
+        <a:xfrm>
+          <a:off x="0" y="0"/>
+          <a:ext cx="0" cy="0"/>
+          <a:chOff x="0" y="0"/>
+          <a:chExt cx="0" cy="0"/>
+        </a:xfrm>
+      </p:grpSpPr>
       <p:sp>
         <p:nvSpPr>
           <p:cNvPr id="2" name="Rectangle 1"/>
@@ -3801,13 +3510,13 @@
         <p:spPr>
           <a:xfrm>
             <a:off x="0" y="0"/>
-            <a:ext cx="12191695" cy="6858000"/>
+            <a:ext cx="12192000" cy="6858000"/>
           </a:xfrm>
           <a:prstGeom prst="rect">
             <a:avLst/>
           </a:prstGeom>
           <a:solidFill>
-            <a:srgbClr val="1F3A5F"/>
+            <a:srgbClr val="183B45"/>
           </a:solidFill>
           <a:ln>
             <a:noFill/>
@@ -3833,25 +3542,112 @@
           <a:lstStyle/>
           <a:p>
             <a:pPr algn="ctr"/>
-          </a:p>
-        </p:txBody>
-      </p:sp>
-      <p:sp>
-        <p:nvSpPr>
-          <p:cNvPr id="3" name="Rectangle 2"/>
-          <p:cNvSpPr/>
+            <a:endParaRPr/>
+          </a:p>
+        </p:txBody>
+      </p:sp>
+      <p:sp>
+        <p:nvSpPr>
+          <p:cNvPr id="3" name="TextBox 2"/>
+          <p:cNvSpPr txBox="1"/>
           <p:nvPr/>
         </p:nvSpPr>
         <p:spPr>
           <a:xfrm>
-            <a:off x="0" y="4663440"/>
-            <a:ext cx="12191695" cy="73152"/>
+            <a:off x="540000" y="360000"/>
+            <a:ext cx="11160000" cy="648000"/>
           </a:xfrm>
           <a:prstGeom prst="rect">
             <a:avLst/>
           </a:prstGeom>
+          <a:noFill/>
+          <a:ln>
+            <a:noFill/>
+          </a:ln>
+        </p:spPr>
+        <p:txBody>
+          <a:bodyPr wrap="square" lIns="108000" tIns="72000" rIns="108000" bIns="72000">
+            <a:spAutoFit/>
+          </a:bodyPr>
+          <a:lstStyle/>
+          <a:p>
+            <a:pPr algn="l">
+              <a:spcAft>
+                <a:spcPts val="300"/>
+              </a:spcAft>
+            </a:pPr>
+            <a:r>
+              <a:rPr sz="3800" b="1">
+                <a:solidFill>
+                  <a:srgbClr val="FFFFFF"/>
+                </a:solidFill>
+                <a:latin typeface="Microsoft YaHei"/>
+                <a:ea typeface="Microsoft YaHei"/>
+              </a:rPr>
+              <a:t>问题与使用者：混凝土裂缝图像筛查</a:t>
+            </a:r>
+          </a:p>
+        </p:txBody>
+      </p:sp>
+      <p:sp>
+        <p:nvSpPr>
+          <p:cNvPr id="4" name="TextBox 3"/>
+          <p:cNvSpPr txBox="1"/>
+          <p:nvPr/>
+        </p:nvSpPr>
+        <p:spPr>
+          <a:xfrm>
+            <a:off x="540000" y="972000"/>
+            <a:ext cx="11160000" cy="324000"/>
+          </a:xfrm>
+          <a:prstGeom prst="rect">
+            <a:avLst/>
+          </a:prstGeom>
+          <a:noFill/>
+          <a:ln>
+            <a:noFill/>
+          </a:ln>
+        </p:spPr>
+        <p:txBody>
+          <a:bodyPr wrap="square" lIns="108000" tIns="72000" rIns="108000" bIns="72000">
+            <a:spAutoFit/>
+          </a:bodyPr>
+          <a:lstStyle/>
+          <a:p>
+            <a:pPr algn="l">
+              <a:spcAft>
+                <a:spcPts val="300"/>
+              </a:spcAft>
+            </a:pPr>
+            <a:r>
+              <a:rPr sz="1800" b="1">
+                <a:solidFill>
+                  <a:srgbClr val="02C39A"/>
+                </a:solidFill>
+                <a:latin typeface="Microsoft YaHei"/>
+                <a:ea typeface="Microsoft YaHei"/>
+              </a:rPr>
+              <a:t>Day 2 · 图像二分类 · 从多数类基线到小型 CNN</a:t>
+            </a:r>
+          </a:p>
+        </p:txBody>
+      </p:sp>
+      <p:sp>
+        <p:nvSpPr>
+          <p:cNvPr id="5" name="Rounded Rectangle 4"/>
+          <p:cNvSpPr/>
+          <p:nvPr/>
+        </p:nvSpPr>
+        <p:spPr>
+          <a:xfrm>
+            <a:off x="540000" y="1404000"/>
+            <a:ext cx="11124000" cy="1475999"/>
+          </a:xfrm>
+          <a:prstGeom prst="roundRect">
+            <a:avLst/>
+          </a:prstGeom>
           <a:solidFill>
-            <a:srgbClr val="E86A17"/>
+            <a:srgbClr val="1E4A55"/>
           </a:solidFill>
           <a:ln>
             <a:noFill/>
@@ -3873,168 +3669,94 @@
           </a:fontRef>
         </p:style>
         <p:txBody>
-          <a:bodyPr rtlCol="0" anchor="ctr"/>
-          <a:lstStyle/>
-          <a:p>
-            <a:pPr algn="ctr"/>
-          </a:p>
-        </p:txBody>
-      </p:sp>
-      <p:sp>
-        <p:nvSpPr>
-          <p:cNvPr id="4" name="TextBox 3"/>
-          <p:cNvSpPr txBox="1"/>
+          <a:bodyPr wrap="square" lIns="125999" tIns="108000" rIns="125999" bIns="108000" rtlCol="0" anchor="t"/>
+          <a:lstStyle/>
+          <a:p>
+            <a:pPr algn="l">
+              <a:spcAft>
+                <a:spcPts val="500"/>
+              </a:spcAft>
+            </a:pPr>
+            <a:r>
+              <a:rPr sz="1600" b="1">
+                <a:solidFill>
+                  <a:srgbClr val="02C39A"/>
+                </a:solidFill>
+                <a:latin typeface="Microsoft YaHei"/>
+                <a:ea typeface="Microsoft YaHei"/>
+              </a:rPr>
+              <a:t>工程 / 业务意义</a:t>
+            </a:r>
+          </a:p>
+          <a:p>
+            <a:pPr algn="l">
+              <a:spcAft>
+                <a:spcPts val="300"/>
+              </a:spcAft>
+            </a:pPr>
+            <a:r>
+              <a:rPr sz="1400" b="0">
+                <a:solidFill>
+                  <a:srgbClr val="D6F5EE"/>
+                </a:solidFill>
+                <a:latin typeface="Microsoft YaHei"/>
+                <a:ea typeface="Microsoft YaHei"/>
+              </a:rPr>
+              <a:t>设施维护团队会收到大量混凝土表面照片，人工逐张查看耗时；光照、纹理、阴影和污渍又与裂缝相似。</a:t>
+            </a:r>
+          </a:p>
+          <a:p>
+            <a:pPr algn="l">
+              <a:spcAft>
+                <a:spcPts val="300"/>
+              </a:spcAft>
+            </a:pPr>
+            <a:r>
+              <a:rPr sz="1400" b="0">
+                <a:solidFill>
+                  <a:srgbClr val="D6F5EE"/>
+                </a:solidFill>
+                <a:latin typeface="Microsoft YaHei"/>
+                <a:ea typeface="Microsoft YaHei"/>
+              </a:rPr>
+              <a:t>本系统先把照片分成“可能有裂缝 / 未发现裂缝”，把疑似照片优先交给人工复核，减少无效复核量，</a:t>
+            </a:r>
+          </a:p>
+          <a:p>
+            <a:pPr algn="l">
+              <a:spcAft>
+                <a:spcPts val="300"/>
+              </a:spcAft>
+            </a:pPr>
+            <a:r>
+              <a:rPr sz="1400" b="0">
+                <a:solidFill>
+                  <a:srgbClr val="D6F5EE"/>
+                </a:solidFill>
+                <a:latin typeface="Microsoft YaHei"/>
+                <a:ea typeface="Microsoft YaHei"/>
+              </a:rPr>
+              <a:t>并把真正裂缝被漏掉（未送复核）的风险暴露出来。</a:t>
+            </a:r>
+          </a:p>
+        </p:txBody>
+      </p:sp>
+      <p:sp>
+        <p:nvSpPr>
+          <p:cNvPr id="6" name="Rounded Rectangle 5"/>
+          <p:cNvSpPr/>
           <p:nvPr/>
         </p:nvSpPr>
         <p:spPr>
           <a:xfrm>
-            <a:off x="914400" y="1920240"/>
-            <a:ext cx="10332720" cy="1463040"/>
+            <a:off x="540000" y="2988000"/>
+            <a:ext cx="5544000" cy="2376000"/>
           </a:xfrm>
-          <a:prstGeom prst="rect">
-            <a:avLst/>
-          </a:prstGeom>
-          <a:noFill/>
-        </p:spPr>
-        <p:txBody>
-          <a:bodyPr wrap="square">
-            <a:spAutoFit/>
-          </a:bodyPr>
-          <a:lstStyle/>
-          <a:p>
-            <a:pPr algn="ctr"/>
-            <a:r>
-              <a:rPr sz="4400" b="1">
-                <a:solidFill>
-                  <a:srgbClr val="FFFFFF"/>
-                </a:solidFill>
-                <a:latin typeface="Microsoft YaHei"/>
-                <a:ea typeface="Microsoft YaHei"/>
-              </a:rPr>
-              <a:t>混凝土裂缝图像初步筛查器</a:t>
-            </a:r>
-          </a:p>
-        </p:txBody>
-      </p:sp>
-      <p:sp>
-        <p:nvSpPr>
-          <p:cNvPr id="5" name="TextBox 4"/>
-          <p:cNvSpPr txBox="1"/>
-          <p:nvPr/>
-        </p:nvSpPr>
-        <p:spPr>
-          <a:xfrm>
-            <a:off x="914400" y="3291840"/>
-            <a:ext cx="10332720" cy="731520"/>
-          </a:xfrm>
-          <a:prstGeom prst="rect">
-            <a:avLst/>
-          </a:prstGeom>
-          <a:noFill/>
-        </p:spPr>
-        <p:txBody>
-          <a:bodyPr wrap="square">
-            <a:spAutoFit/>
-          </a:bodyPr>
-          <a:lstStyle/>
-          <a:p>
-            <a:pPr algn="ctr"/>
-            <a:r>
-              <a:rPr sz="2000" b="0">
-                <a:solidFill>
-                  <a:srgbClr val="CFDDEC"/>
-                </a:solidFill>
-                <a:latin typeface="Microsoft YaHei"/>
-                <a:ea typeface="Microsoft YaHei"/>
-              </a:rPr>
-              <a:t>基线 vs 小型 CNN ｜ Day 2 视觉答辩</a:t>
-            </a:r>
-          </a:p>
-        </p:txBody>
-      </p:sp>
-      <p:sp>
-        <p:nvSpPr>
-          <p:cNvPr id="6" name="TextBox 5"/>
-          <p:cNvSpPr txBox="1"/>
-          <p:nvPr/>
-        </p:nvSpPr>
-        <p:spPr>
-          <a:xfrm>
-            <a:off x="914400" y="5029200"/>
-            <a:ext cx="10332720" cy="1097280"/>
-          </a:xfrm>
-          <a:prstGeom prst="rect">
-            <a:avLst/>
-          </a:prstGeom>
-          <a:noFill/>
-        </p:spPr>
-        <p:txBody>
-          <a:bodyPr wrap="square">
-            <a:spAutoFit/>
-          </a:bodyPr>
-          <a:lstStyle/>
-          <a:p>
-            <a:pPr algn="ctr"/>
-            <a:r>
-              <a:rPr sz="1600" b="0">
-                <a:solidFill>
-                  <a:srgbClr val="E8E8E8"/>
-                </a:solidFill>
-                <a:latin typeface="Microsoft YaHei"/>
-                <a:ea typeface="Microsoft YaHei"/>
-              </a:rPr>
-              <a:t>好难起名组：玄浩辰 黄皓晨 穆嘉奕 谢一苇</a:t>
-            </a:r>
-          </a:p>
-          <a:p>
-            <a:pPr algn="ctr"/>
-            <a:r>
-              <a:rPr sz="1400" b="0">
-                <a:solidFill>
-                  <a:srgbClr val="AFC2D6"/>
-                </a:solidFill>
-                <a:latin typeface="Microsoft YaHei"/>
-                <a:ea typeface="Microsoft YaHei"/>
-              </a:rPr>
-              <a:t>2026-08-18</a:t>
-            </a:r>
-          </a:p>
-        </p:txBody>
-      </p:sp>
-    </p:spTree>
-  </p:cSld>
-  <p:clrMapOvr>
-    <a:masterClrMapping/>
-  </p:clrMapOvr>
-</p:sld>
-</file>
-
-<file path=ppt/slides/slide2.xml><?xml version="1.0" encoding="utf-8"?>
-<p:sld xmlns:a="http://schemas.openxmlformats.org/drawingml/2006/main" xmlns:p="http://schemas.openxmlformats.org/presentationml/2006/main" xmlns:r="http://schemas.openxmlformats.org/officeDocument/2006/relationships">
-  <p:cSld>
-    <p:spTree>
-      <p:nvGrpSpPr>
-        <p:cNvPr id="1" name=""/>
-        <p:cNvGrpSpPr/>
-        <p:nvPr/>
-      </p:nvGrpSpPr>
-      <p:grpSpPr/>
-      <p:sp>
-        <p:nvSpPr>
-          <p:cNvPr id="2" name="Rectangle 1"/>
-          <p:cNvSpPr/>
-          <p:nvPr/>
-        </p:nvSpPr>
-        <p:spPr>
-          <a:xfrm>
-            <a:off x="0" y="0"/>
-            <a:ext cx="12191695" cy="1051560"/>
-          </a:xfrm>
-          <a:prstGeom prst="rect">
+          <a:prstGeom prst="roundRect">
             <a:avLst/>
           </a:prstGeom>
           <a:solidFill>
-            <a:srgbClr val="1F3A5F"/>
+            <a:srgbClr val="224D58"/>
           </a:solidFill>
           <a:ln>
             <a:noFill/>
@@ -4056,64 +3778,111 @@
           </a:fontRef>
         </p:style>
         <p:txBody>
-          <a:bodyPr rtlCol="0" anchor="ctr"/>
-          <a:lstStyle/>
-          <a:p>
-            <a:pPr algn="ctr"/>
-          </a:p>
-        </p:txBody>
-      </p:sp>
-      <p:sp>
-        <p:nvSpPr>
-          <p:cNvPr id="3" name="TextBox 2"/>
-          <p:cNvSpPr txBox="1"/>
+          <a:bodyPr wrap="square" lIns="125999" tIns="108000" rIns="125999" bIns="108000" rtlCol="0" anchor="t"/>
+          <a:lstStyle/>
+          <a:p>
+            <a:pPr algn="l">
+              <a:spcAft>
+                <a:spcPts val="500"/>
+              </a:spcAft>
+            </a:pPr>
+            <a:r>
+              <a:rPr sz="1600" b="1">
+                <a:solidFill>
+                  <a:srgbClr val="02C39A"/>
+                </a:solidFill>
+                <a:latin typeface="Microsoft YaHei"/>
+                <a:ea typeface="Microsoft YaHei"/>
+              </a:rPr>
+              <a:t>任务定义：图像二分类</a:t>
+            </a:r>
+          </a:p>
+          <a:p>
+            <a:pPr algn="l">
+              <a:spcAft>
+                <a:spcPts val="300"/>
+              </a:spcAft>
+            </a:pPr>
+            <a:r>
+              <a:rPr sz="1400" b="0">
+                <a:solidFill>
+                  <a:srgbClr val="D6F5EE"/>
+                </a:solidFill>
+                <a:latin typeface="Microsoft YaHei"/>
+                <a:ea typeface="Microsoft YaHei"/>
+              </a:rPr>
+              <a:t>· Target（目标）：裂缝 crack / 无裂缝 no_crack</a:t>
+            </a:r>
+          </a:p>
+          <a:p>
+            <a:pPr algn="l">
+              <a:spcAft>
+                <a:spcPts val="300"/>
+              </a:spcAft>
+            </a:pPr>
+            <a:r>
+              <a:rPr sz="1400" b="0">
+                <a:solidFill>
+                  <a:srgbClr val="D6F5EE"/>
+                </a:solidFill>
+                <a:latin typeface="Microsoft YaHei"/>
+                <a:ea typeface="Microsoft YaHei"/>
+              </a:rPr>
+              <a:t>· Features（输入）：3×64×64 RGB 图像张量</a:t>
+            </a:r>
+          </a:p>
+          <a:p>
+            <a:pPr algn="l">
+              <a:spcAft>
+                <a:spcPts val="300"/>
+              </a:spcAft>
+            </a:pPr>
+            <a:r>
+              <a:rPr sz="1400" b="0">
+                <a:solidFill>
+                  <a:srgbClr val="D6F5EE"/>
+                </a:solidFill>
+                <a:latin typeface="Microsoft YaHei"/>
+                <a:ea typeface="Microsoft YaHei"/>
+              </a:rPr>
+              <a:t>· 一条样本：一张混凝土表面照片</a:t>
+            </a:r>
+          </a:p>
+          <a:p>
+            <a:pPr algn="l">
+              <a:spcAft>
+                <a:spcPts val="300"/>
+              </a:spcAft>
+            </a:pPr>
+            <a:r>
+              <a:rPr sz="1400" b="0">
+                <a:solidFill>
+                  <a:srgbClr val="D6F5EE"/>
+                </a:solidFill>
+                <a:latin typeface="Microsoft YaHei"/>
+                <a:ea typeface="Microsoft YaHei"/>
+              </a:rPr>
+              <a:t>· 模型输出：二分类得分 → 类别</a:t>
+            </a:r>
+          </a:p>
+        </p:txBody>
+      </p:sp>
+      <p:sp>
+        <p:nvSpPr>
+          <p:cNvPr id="7" name="Rounded Rectangle 6"/>
+          <p:cNvSpPr/>
           <p:nvPr/>
         </p:nvSpPr>
         <p:spPr>
           <a:xfrm>
-            <a:off x="640080" y="228600"/>
-            <a:ext cx="10515600" cy="640080"/>
+            <a:off x="6480000" y="2988000"/>
+            <a:ext cx="5184000" cy="2376000"/>
           </a:xfrm>
-          <a:prstGeom prst="rect">
-            <a:avLst/>
-          </a:prstGeom>
-          <a:noFill/>
-        </p:spPr>
-        <p:txBody>
-          <a:bodyPr wrap="square">
-            <a:spAutoFit/>
-          </a:bodyPr>
-          <a:lstStyle/>
-          <a:p>
-            <a:r>
-              <a:rPr sz="3000" b="1">
-                <a:solidFill>
-                  <a:srgbClr val="FFFFFF"/>
-                </a:solidFill>
-                <a:latin typeface="Microsoft YaHei"/>
-                <a:ea typeface="Microsoft YaHei"/>
-              </a:rPr>
-              <a:t>问题与使用者</a:t>
-            </a:r>
-          </a:p>
-        </p:txBody>
-      </p:sp>
-      <p:sp>
-        <p:nvSpPr>
-          <p:cNvPr id="4" name="Rectangle 3"/>
-          <p:cNvSpPr/>
-          <p:nvPr/>
-        </p:nvSpPr>
-        <p:spPr>
-          <a:xfrm>
-            <a:off x="0" y="1051560"/>
-            <a:ext cx="164592" cy="4892040"/>
-          </a:xfrm>
-          <a:prstGeom prst="rect">
+          <a:prstGeom prst="roundRect">
             <a:avLst/>
           </a:prstGeom>
           <a:solidFill>
-            <a:srgbClr val="E86A17"/>
+            <a:srgbClr val="FBE4C8"/>
           </a:solidFill>
           <a:ln>
             <a:noFill/>
@@ -4135,153 +3904,117 @@
           </a:fontRef>
         </p:style>
         <p:txBody>
-          <a:bodyPr rtlCol="0" anchor="ctr"/>
-          <a:lstStyle/>
-          <a:p>
-            <a:pPr algn="ctr"/>
-          </a:p>
-        </p:txBody>
-      </p:sp>
-      <p:sp>
-        <p:nvSpPr>
-          <p:cNvPr id="5" name="TextBox 4"/>
+          <a:bodyPr wrap="square" lIns="125999" tIns="108000" rIns="125999" bIns="108000" rtlCol="0" anchor="t"/>
+          <a:lstStyle/>
+          <a:p>
+            <a:pPr algn="l">
+              <a:spcAft>
+                <a:spcPts val="500"/>
+              </a:spcAft>
+            </a:pPr>
+            <a:r>
+              <a:rPr sz="1600" b="1">
+                <a:solidFill>
+                  <a:srgbClr val="6B3E16"/>
+                </a:solidFill>
+                <a:latin typeface="Microsoft YaHei"/>
+                <a:ea typeface="Microsoft YaHei"/>
+              </a:rPr>
+              <a:t>最危险的错误与边界</a:t>
+            </a:r>
+          </a:p>
+          <a:p>
+            <a:pPr algn="l">
+              <a:spcAft>
+                <a:spcPts val="300"/>
+              </a:spcAft>
+            </a:pPr>
+            <a:r>
+              <a:rPr sz="1400" b="1">
+                <a:solidFill>
+                  <a:srgbClr val="6B3E16"/>
+                </a:solidFill>
+                <a:latin typeface="Microsoft YaHei"/>
+                <a:ea typeface="Microsoft YaHei"/>
+              </a:rPr>
+              <a:t>· 漏检裂缝（FN）：真实裂缝被标成无裂缝，不会被送去复核</a:t>
+            </a:r>
+          </a:p>
+          <a:p>
+            <a:pPr algn="l">
+              <a:spcAft>
+                <a:spcPts val="300"/>
+              </a:spcAft>
+            </a:pPr>
+            <a:r>
+              <a:rPr sz="1400" b="0">
+                <a:solidFill>
+                  <a:srgbClr val="6B3E16"/>
+                </a:solidFill>
+                <a:latin typeface="Microsoft YaHei"/>
+                <a:ea typeface="Microsoft YaHei"/>
+              </a:rPr>
+              <a:t>· 误报（FP）：无裂缝被标为裂缝，只增加复核量</a:t>
+            </a:r>
+          </a:p>
+          <a:p>
+            <a:pPr algn="l">
+              <a:spcAft>
+                <a:spcPts val="300"/>
+              </a:spcAft>
+            </a:pPr>
+            <a:r>
+              <a:rPr sz="1400" b="0">
+                <a:solidFill>
+                  <a:srgbClr val="6B3E16"/>
+                </a:solidFill>
+                <a:latin typeface="Microsoft YaHei"/>
+                <a:ea typeface="Microsoft YaHei"/>
+              </a:rPr>
+              <a:t>· 边界：只用于复核排序；不替代现场检查、工程师判断或安全决策</a:t>
+            </a:r>
+          </a:p>
+        </p:txBody>
+      </p:sp>
+      <p:sp>
+        <p:nvSpPr>
+          <p:cNvPr id="8" name="TextBox 7"/>
           <p:cNvSpPr txBox="1"/>
           <p:nvPr/>
         </p:nvSpPr>
         <p:spPr>
           <a:xfrm>
-            <a:off x="914400" y="1463040"/>
-            <a:ext cx="10424160" cy="4572000"/>
+            <a:off x="540000" y="6263999"/>
+            <a:ext cx="11160000" cy="360000"/>
           </a:xfrm>
           <a:prstGeom prst="rect">
             <a:avLst/>
           </a:prstGeom>
           <a:noFill/>
+          <a:ln>
+            <a:noFill/>
+          </a:ln>
         </p:spPr>
         <p:txBody>
-          <a:bodyPr wrap="square">
+          <a:bodyPr wrap="square" lIns="108000" tIns="72000" rIns="108000" bIns="72000">
             <a:spAutoFit/>
           </a:bodyPr>
           <a:lstStyle/>
           <a:p>
-            <a:pPr>
-              <a:spcAft>
-                <a:spcPts val="1200"/>
-              </a:spcAft>
-            </a:pPr>
-            <a:r>
-              <a:rPr sz="2000" b="1">
-                <a:solidFill>
-                  <a:srgbClr val="1F3A5F"/>
+            <a:pPr algn="l">
+              <a:spcAft>
+                <a:spcPts val="300"/>
+              </a:spcAft>
+            </a:pPr>
+            <a:r>
+              <a:rPr sz="1400" b="1">
+                <a:solidFill>
+                  <a:srgbClr val="8DDDD0"/>
                 </a:solidFill>
                 <a:latin typeface="Microsoft YaHei"/>
                 <a:ea typeface="Microsoft YaHei"/>
               </a:rPr>
-              <a:t>•  使用者：设施维护团队（先大量拍照、再人工复核）</a:t>
-            </a:r>
-          </a:p>
-          <a:p>
-            <a:pPr>
-              <a:spcAft>
-                <a:spcPts val="1200"/>
-              </a:spcAft>
-            </a:pPr>
-            <a:r>
-              <a:rPr sz="2000" b="0">
-                <a:solidFill>
-                  <a:srgbClr val="1F3A5F"/>
-                </a:solidFill>
-                <a:latin typeface="Microsoft YaHei"/>
-                <a:ea typeface="Microsoft YaHei"/>
-              </a:rPr>
-              <a:t>•  输入：混凝土表面照片；输出：疑似裂缝 / 无裂缝</a:t>
-            </a:r>
-          </a:p>
-          <a:p>
-            <a:pPr>
-              <a:spcAft>
-                <a:spcPts val="1200"/>
-              </a:spcAft>
-            </a:pPr>
-            <a:r>
-              <a:rPr sz="2000" b="0">
-                <a:solidFill>
-                  <a:srgbClr val="1F3A5F"/>
-                </a:solidFill>
-                <a:latin typeface="Microsoft YaHei"/>
-                <a:ea typeface="Microsoft YaHei"/>
-              </a:rPr>
-              <a:t>•  用途：优先安排人工复核，减少无效复核量</a:t>
-            </a:r>
-          </a:p>
-          <a:p>
-            <a:pPr>
-              <a:spcAft>
-                <a:spcPts val="1200"/>
-              </a:spcAft>
-            </a:pPr>
-            <a:r>
-              <a:rPr sz="2000" b="0">
-                <a:solidFill>
-                  <a:srgbClr val="1F3A5F"/>
-                </a:solidFill>
-                <a:latin typeface="Microsoft YaHei"/>
-                <a:ea typeface="Microsoft YaHei"/>
-              </a:rPr>
-              <a:t>•  边界：只用于复核排序，不替代现场检查、工程师判断或安全决策</a:t>
-            </a:r>
-          </a:p>
-          <a:p>
-            <a:pPr>
-              <a:spcAft>
-                <a:spcPts val="1200"/>
-              </a:spcAft>
-            </a:pPr>
-            <a:r>
-              <a:rPr sz="2000" b="1">
-                <a:solidFill>
-                  <a:srgbClr val="1F3A5F"/>
-                </a:solidFill>
-                <a:latin typeface="Microsoft YaHei"/>
-                <a:ea typeface="Microsoft YaHei"/>
-              </a:rPr>
-              <a:t>•  最危险的错误：漏检裂缝（真实裂缝被标成无裂缝，不会被送去复核）</a:t>
-            </a:r>
-          </a:p>
-        </p:txBody>
-      </p:sp>
-      <p:sp>
-        <p:nvSpPr>
-          <p:cNvPr id="6" name="TextBox 5"/>
-          <p:cNvSpPr txBox="1"/>
-          <p:nvPr/>
-        </p:nvSpPr>
-        <p:spPr>
-          <a:xfrm>
-            <a:off x="11155680" y="6446520"/>
-            <a:ext cx="914400" cy="365760"/>
-          </a:xfrm>
-          <a:prstGeom prst="rect">
-            <a:avLst/>
-          </a:prstGeom>
-          <a:noFill/>
-        </p:spPr>
-        <p:txBody>
-          <a:bodyPr wrap="square">
-            <a:spAutoFit/>
-          </a:bodyPr>
-          <a:lstStyle/>
-          <a:p>
-            <a:pPr algn="r"/>
-            <a:r>
-              <a:rPr sz="1200" b="0">
-                <a:solidFill>
-                  <a:srgbClr val="4A4A4A"/>
-                </a:solidFill>
-                <a:latin typeface="Microsoft YaHei"/>
-                <a:ea typeface="Microsoft YaHei"/>
-              </a:rPr>
-              <a:t>02</a:t>
+              <a:t>好难起名组：玄浩辰 黄皓晨 穆嘉奕 谢一苇 · 2026-08-18 · 第 1 页约 30 秒</a:t>
             </a:r>
           </a:p>
         </p:txBody>
@@ -4294,8 +4027,8 @@
 </p:sld>
 </file>
 
-<file path=ppt/slides/slide3.xml><?xml version="1.0" encoding="utf-8"?>
-<p:sld xmlns:a="http://schemas.openxmlformats.org/drawingml/2006/main" xmlns:p="http://schemas.openxmlformats.org/presentationml/2006/main" xmlns:r="http://schemas.openxmlformats.org/officeDocument/2006/relationships">
+<file path=ppt/slides/slide2.xml><?xml version="1.0" encoding="utf-8"?>
+<p:sld xmlns:a="http://schemas.openxmlformats.org/drawingml/2006/main" xmlns:r="http://schemas.openxmlformats.org/officeDocument/2006/relationships" xmlns:p="http://schemas.openxmlformats.org/presentationml/2006/main">
   <p:cSld>
     <p:spTree>
       <p:nvGrpSpPr>
@@ -4303,7 +4036,14 @@
         <p:cNvGrpSpPr/>
         <p:nvPr/>
       </p:nvGrpSpPr>
-      <p:grpSpPr/>
+      <p:grpSpPr>
+        <a:xfrm>
+          <a:off x="0" y="0"/>
+          <a:ext cx="0" cy="0"/>
+          <a:chOff x="0" y="0"/>
+          <a:chExt cx="0" cy="0"/>
+        </a:xfrm>
+      </p:grpSpPr>
       <p:sp>
         <p:nvSpPr>
           <p:cNvPr id="2" name="Rectangle 1"/>
@@ -4313,13 +4053,13 @@
         <p:spPr>
           <a:xfrm>
             <a:off x="0" y="0"/>
-            <a:ext cx="12191695" cy="1051560"/>
+            <a:ext cx="12192000" cy="6858000"/>
           </a:xfrm>
           <a:prstGeom prst="rect">
             <a:avLst/>
           </a:prstGeom>
           <a:solidFill>
-            <a:srgbClr val="1F3A5F"/>
+            <a:srgbClr val="F7FBFA"/>
           </a:solidFill>
           <a:ln>
             <a:noFill/>
@@ -4345,6 +4085,7 @@
           <a:lstStyle/>
           <a:p>
             <a:pPr algn="ctr"/>
+            <a:endParaRPr/>
           </a:p>
         </p:txBody>
       </p:sp>
@@ -4356,49 +4097,100 @@
         </p:nvSpPr>
         <p:spPr>
           <a:xfrm>
-            <a:off x="640080" y="228600"/>
-            <a:ext cx="10515600" cy="640080"/>
+            <a:off x="540000" y="234000"/>
+            <a:ext cx="5400000" cy="288000"/>
           </a:xfrm>
           <a:prstGeom prst="rect">
             <a:avLst/>
           </a:prstGeom>
           <a:noFill/>
+          <a:ln>
+            <a:noFill/>
+          </a:ln>
         </p:spPr>
         <p:txBody>
-          <a:bodyPr wrap="square">
+          <a:bodyPr wrap="square" lIns="108000" tIns="72000" rIns="108000" bIns="72000">
             <a:spAutoFit/>
           </a:bodyPr>
           <a:lstStyle/>
           <a:p>
+            <a:pPr algn="l">
+              <a:spcAft>
+                <a:spcPts val="300"/>
+              </a:spcAft>
+            </a:pPr>
+            <a:r>
+              <a:rPr sz="1400" b="1">
+                <a:solidFill>
+                  <a:srgbClr val="02C39A"/>
+                </a:solidFill>
+                <a:latin typeface="Microsoft YaHei"/>
+                <a:ea typeface="Microsoft YaHei"/>
+              </a:rPr>
+              <a:t>02 · 约 45 秒</a:t>
+            </a:r>
+          </a:p>
+        </p:txBody>
+      </p:sp>
+      <p:sp>
+        <p:nvSpPr>
+          <p:cNvPr id="4" name="TextBox 3"/>
+          <p:cNvSpPr txBox="1"/>
+          <p:nvPr/>
+        </p:nvSpPr>
+        <p:spPr>
+          <a:xfrm>
+            <a:off x="540000" y="522000"/>
+            <a:ext cx="11160000" cy="503999"/>
+          </a:xfrm>
+          <a:prstGeom prst="rect">
+            <a:avLst/>
+          </a:prstGeom>
+          <a:noFill/>
+          <a:ln>
+            <a:noFill/>
+          </a:ln>
+        </p:spPr>
+        <p:txBody>
+          <a:bodyPr wrap="square" lIns="108000" tIns="72000" rIns="108000" bIns="72000">
+            <a:spAutoFit/>
+          </a:bodyPr>
+          <a:lstStyle/>
+          <a:p>
+            <a:pPr algn="l">
+              <a:spcAft>
+                <a:spcPts val="300"/>
+              </a:spcAft>
+            </a:pPr>
             <a:r>
               <a:rPr sz="3000" b="1">
                 <a:solidFill>
-                  <a:srgbClr val="FFFFFF"/>
+                  <a:srgbClr val="183B45"/>
                 </a:solidFill>
                 <a:latin typeface="Microsoft YaHei"/>
                 <a:ea typeface="Microsoft YaHei"/>
               </a:rPr>
-              <a:t>真实数据与简单基线</a:t>
-            </a:r>
-          </a:p>
-        </p:txBody>
-      </p:sp>
-      <p:sp>
-        <p:nvSpPr>
-          <p:cNvPr id="4" name="Rectangle 3"/>
+              <a:t>方法与基线：从多数类到卷积神经网络</a:t>
+            </a:r>
+          </a:p>
+        </p:txBody>
+      </p:sp>
+      <p:sp>
+        <p:nvSpPr>
+          <p:cNvPr id="5" name="Rectangle 4"/>
           <p:cNvSpPr/>
           <p:nvPr/>
         </p:nvSpPr>
         <p:spPr>
           <a:xfrm>
-            <a:off x="0" y="1051560"/>
-            <a:ext cx="164592" cy="4892040"/>
+            <a:off x="540000" y="1062000"/>
+            <a:ext cx="1440000" cy="43200"/>
           </a:xfrm>
           <a:prstGeom prst="rect">
             <a:avLst/>
           </a:prstGeom>
           <a:solidFill>
-            <a:srgbClr val="E86A17"/>
+            <a:srgbClr val="02C39A"/>
           </a:solidFill>
           <a:ln>
             <a:noFill/>
@@ -4424,170 +4216,26 @@
           <a:lstStyle/>
           <a:p>
             <a:pPr algn="ctr"/>
-          </a:p>
-        </p:txBody>
-      </p:sp>
-      <p:sp>
-        <p:nvSpPr>
-          <p:cNvPr id="5" name="TextBox 4"/>
-          <p:cNvSpPr txBox="1"/>
+            <a:endParaRPr/>
+          </a:p>
+        </p:txBody>
+      </p:sp>
+      <p:sp>
+        <p:nvSpPr>
+          <p:cNvPr id="6" name="Rounded Rectangle 5"/>
+          <p:cNvSpPr/>
           <p:nvPr/>
         </p:nvSpPr>
         <p:spPr>
           <a:xfrm>
-            <a:off x="914400" y="1463040"/>
-            <a:ext cx="10424160" cy="4572000"/>
+            <a:off x="540000" y="1188000"/>
+            <a:ext cx="5544000" cy="2160000"/>
           </a:xfrm>
-          <a:prstGeom prst="rect">
-            <a:avLst/>
-          </a:prstGeom>
-          <a:noFill/>
-        </p:spPr>
-        <p:txBody>
-          <a:bodyPr wrap="square">
-            <a:spAutoFit/>
-          </a:bodyPr>
-          <a:lstStyle/>
-          <a:p>
-            <a:pPr>
-              <a:spcAft>
-                <a:spcPts val="1200"/>
-              </a:spcAft>
-            </a:pPr>
-            <a:r>
-              <a:rPr sz="1900" b="1">
-                <a:solidFill>
-                  <a:srgbClr val="1F3A5F"/>
-                </a:solidFill>
-                <a:latin typeface="Microsoft YaHei"/>
-                <a:ea typeface="Microsoft YaHei"/>
-              </a:rPr>
-              <a:t>•  数据：Kaggle Surface Crack Detection，Positive/Negative 各 20000 张</a:t>
-            </a:r>
-          </a:p>
-          <a:p>
-            <a:pPr>
-              <a:spcAft>
-                <a:spcPts val="1200"/>
-              </a:spcAft>
-            </a:pPr>
-            <a:r>
-              <a:rPr sz="1900" b="0">
-                <a:solidFill>
-                  <a:srgbClr val="1F3A5F"/>
-                </a:solidFill>
-                <a:latin typeface="Microsoft YaHei"/>
-                <a:ea typeface="Microsoft YaHei"/>
-              </a:rPr>
-              <a:t>•  检查：python train.py --check-data → PASSED</a:t>
-            </a:r>
-          </a:p>
-          <a:p>
-            <a:pPr>
-              <a:spcAft>
-                <a:spcPts val="1200"/>
-              </a:spcAft>
-            </a:pPr>
-            <a:r>
-              <a:rPr sz="1900" b="0">
-                <a:solidFill>
-                  <a:srgbClr val="1F3A5F"/>
-                </a:solidFill>
-                <a:latin typeface="Microsoft YaHei"/>
-                <a:ea typeface="Microsoft YaHei"/>
-              </a:rPr>
-              <a:t>•  基线：多数类——所有图判为裂缝，acc 0.50，误报 150</a:t>
-            </a:r>
-          </a:p>
-          <a:p>
-            <a:pPr>
-              <a:spcAft>
-                <a:spcPts val="1200"/>
-              </a:spcAft>
-            </a:pPr>
-            <a:r>
-              <a:rPr sz="1900" b="1">
-                <a:solidFill>
-                  <a:srgbClr val="1F3A5F"/>
-                </a:solidFill>
-                <a:latin typeface="Microsoft YaHei"/>
-                <a:ea typeface="Microsoft YaHei"/>
-              </a:rPr>
-              <a:t>•  结论：基线几乎不可用，必须学习特征</a:t>
-            </a:r>
-          </a:p>
-        </p:txBody>
-      </p:sp>
-      <p:sp>
-        <p:nvSpPr>
-          <p:cNvPr id="6" name="TextBox 5"/>
-          <p:cNvSpPr txBox="1"/>
-          <p:nvPr/>
-        </p:nvSpPr>
-        <p:spPr>
-          <a:xfrm>
-            <a:off x="11155680" y="6446520"/>
-            <a:ext cx="914400" cy="365760"/>
-          </a:xfrm>
-          <a:prstGeom prst="rect">
-            <a:avLst/>
-          </a:prstGeom>
-          <a:noFill/>
-        </p:spPr>
-        <p:txBody>
-          <a:bodyPr wrap="square">
-            <a:spAutoFit/>
-          </a:bodyPr>
-          <a:lstStyle/>
-          <a:p>
-            <a:pPr algn="r"/>
-            <a:r>
-              <a:rPr sz="1200" b="0">
-                <a:solidFill>
-                  <a:srgbClr val="4A4A4A"/>
-                </a:solidFill>
-                <a:latin typeface="Microsoft YaHei"/>
-                <a:ea typeface="Microsoft YaHei"/>
-              </a:rPr>
-              <a:t>03</a:t>
-            </a:r>
-          </a:p>
-        </p:txBody>
-      </p:sp>
-    </p:spTree>
-  </p:cSld>
-  <p:clrMapOvr>
-    <a:masterClrMapping/>
-  </p:clrMapOvr>
-</p:sld>
-</file>
-
-<file path=ppt/slides/slide4.xml><?xml version="1.0" encoding="utf-8"?>
-<p:sld xmlns:a="http://schemas.openxmlformats.org/drawingml/2006/main" xmlns:p="http://schemas.openxmlformats.org/presentationml/2006/main" xmlns:r="http://schemas.openxmlformats.org/officeDocument/2006/relationships">
-  <p:cSld>
-    <p:spTree>
-      <p:nvGrpSpPr>
-        <p:cNvPr id="1" name=""/>
-        <p:cNvGrpSpPr/>
-        <p:nvPr/>
-      </p:nvGrpSpPr>
-      <p:grpSpPr/>
-      <p:sp>
-        <p:nvSpPr>
-          <p:cNvPr id="2" name="Rectangle 1"/>
-          <p:cNvSpPr/>
-          <p:nvPr/>
-        </p:nvSpPr>
-        <p:spPr>
-          <a:xfrm>
-            <a:off x="0" y="0"/>
-            <a:ext cx="12191695" cy="1051560"/>
-          </a:xfrm>
-          <a:prstGeom prst="rect">
+          <a:prstGeom prst="roundRect">
             <a:avLst/>
           </a:prstGeom>
           <a:solidFill>
-            <a:srgbClr val="1F3A5F"/>
+            <a:srgbClr val="C9E8F2"/>
           </a:solidFill>
           <a:ln>
             <a:noFill/>
@@ -4609,64 +4257,111 @@
           </a:fontRef>
         </p:style>
         <p:txBody>
-          <a:bodyPr rtlCol="0" anchor="ctr"/>
-          <a:lstStyle/>
-          <a:p>
-            <a:pPr algn="ctr"/>
-          </a:p>
-        </p:txBody>
-      </p:sp>
-      <p:sp>
-        <p:nvSpPr>
-          <p:cNvPr id="3" name="TextBox 2"/>
-          <p:cNvSpPr txBox="1"/>
+          <a:bodyPr wrap="square" lIns="125999" tIns="108000" rIns="125999" bIns="108000" rtlCol="0" anchor="t"/>
+          <a:lstStyle/>
+          <a:p>
+            <a:pPr algn="l">
+              <a:spcAft>
+                <a:spcPts val="600"/>
+              </a:spcAft>
+            </a:pPr>
+            <a:r>
+              <a:rPr sz="1600" b="1">
+                <a:solidFill>
+                  <a:srgbClr val="173F5F"/>
+                </a:solidFill>
+                <a:latin typeface="Microsoft YaHei"/>
+                <a:ea typeface="Microsoft YaHei"/>
+              </a:rPr>
+              <a:t>① 简单基线（Baseline）：多数类</a:t>
+            </a:r>
+          </a:p>
+          <a:p>
+            <a:pPr algn="l">
+              <a:spcAft>
+                <a:spcPts val="300"/>
+              </a:spcAft>
+            </a:pPr>
+            <a:r>
+              <a:rPr sz="1400" b="0">
+                <a:solidFill>
+                  <a:srgbClr val="173F5F"/>
+                </a:solidFill>
+                <a:latin typeface="Microsoft YaHei"/>
+                <a:ea typeface="Microsoft YaHei"/>
+              </a:rPr>
+              <a:t>· 原理：零训练、无参数，把所有图判成训练集里最多的类</a:t>
+            </a:r>
+          </a:p>
+          <a:p>
+            <a:pPr algn="l">
+              <a:spcAft>
+                <a:spcPts val="300"/>
+              </a:spcAft>
+            </a:pPr>
+            <a:r>
+              <a:rPr sz="1400" b="0">
+                <a:solidFill>
+                  <a:srgbClr val="173F5F"/>
+                </a:solidFill>
+                <a:latin typeface="Microsoft YaHei"/>
+                <a:ea typeface="Microsoft YaHei"/>
+              </a:rPr>
+              <a:t>· 为什么用它：提供最低可比较下限，防止高估任何模型</a:t>
+            </a:r>
+          </a:p>
+          <a:p>
+            <a:pPr algn="l">
+              <a:spcAft>
+                <a:spcPts val="300"/>
+              </a:spcAft>
+            </a:pPr>
+            <a:r>
+              <a:rPr sz="1400" b="1">
+                <a:solidFill>
+                  <a:srgbClr val="173F5F"/>
+                </a:solidFill>
+                <a:latin typeface="Microsoft YaHei"/>
+                <a:ea typeface="Microsoft YaHei"/>
+              </a:rPr>
+              <a:t>· 真实结果：acc 0.50，误报 150（测试 300 张全判裂缝）</a:t>
+            </a:r>
+          </a:p>
+          <a:p>
+            <a:pPr algn="l">
+              <a:spcAft>
+                <a:spcPts val="300"/>
+              </a:spcAft>
+            </a:pPr>
+            <a:r>
+              <a:rPr sz="1400" b="0">
+                <a:solidFill>
+                  <a:srgbClr val="173F5F"/>
+                </a:solidFill>
+                <a:latin typeface="Microsoft YaHei"/>
+                <a:ea typeface="Microsoft YaHei"/>
+              </a:rPr>
+              <a:t>· 结论：基线几乎不可用，必须让模型学习图像特征</a:t>
+            </a:r>
+          </a:p>
+        </p:txBody>
+      </p:sp>
+      <p:sp>
+        <p:nvSpPr>
+          <p:cNvPr id="7" name="Rounded Rectangle 6"/>
+          <p:cNvSpPr/>
           <p:nvPr/>
         </p:nvSpPr>
         <p:spPr>
           <a:xfrm>
-            <a:off x="640080" y="228600"/>
-            <a:ext cx="10515600" cy="640080"/>
+            <a:off x="6480000" y="1188000"/>
+            <a:ext cx="5184000" cy="2160000"/>
           </a:xfrm>
-          <a:prstGeom prst="rect">
-            <a:avLst/>
-          </a:prstGeom>
-          <a:noFill/>
-        </p:spPr>
-        <p:txBody>
-          <a:bodyPr wrap="square">
-            <a:spAutoFit/>
-          </a:bodyPr>
-          <a:lstStyle/>
-          <a:p>
-            <a:r>
-              <a:rPr sz="3000" b="1">
-                <a:solidFill>
-                  <a:srgbClr val="FFFFFF"/>
-                </a:solidFill>
-                <a:latin typeface="Microsoft YaHei"/>
-                <a:ea typeface="Microsoft YaHei"/>
-              </a:rPr>
-              <a:t>候选方法与结果</a:t>
-            </a:r>
-          </a:p>
-        </p:txBody>
-      </p:sp>
-      <p:sp>
-        <p:nvSpPr>
-          <p:cNvPr id="4" name="Rectangle 3"/>
-          <p:cNvSpPr/>
-          <p:nvPr/>
-        </p:nvSpPr>
-        <p:spPr>
-          <a:xfrm>
-            <a:off x="0" y="1051560"/>
-            <a:ext cx="164592" cy="4892040"/>
-          </a:xfrm>
-          <a:prstGeom prst="rect">
+          <a:prstGeom prst="roundRect">
             <a:avLst/>
           </a:prstGeom>
           <a:solidFill>
-            <a:srgbClr val="E86A17"/>
+            <a:srgbClr val="D7F4EE"/>
           </a:solidFill>
           <a:ln>
             <a:noFill/>
@@ -4688,174 +4383,111 @@
           </a:fontRef>
         </p:style>
         <p:txBody>
-          <a:bodyPr rtlCol="0" anchor="ctr"/>
-          <a:lstStyle/>
-          <a:p>
-            <a:pPr algn="ctr"/>
-          </a:p>
-        </p:txBody>
-      </p:sp>
-      <p:sp>
-        <p:nvSpPr>
-          <p:cNvPr id="5" name="TextBox 4"/>
-          <p:cNvSpPr txBox="1"/>
+          <a:bodyPr wrap="square" lIns="125999" tIns="108000" rIns="125999" bIns="108000" rtlCol="0" anchor="t"/>
+          <a:lstStyle/>
+          <a:p>
+            <a:pPr algn="l">
+              <a:spcAft>
+                <a:spcPts val="600"/>
+              </a:spcAft>
+            </a:pPr>
+            <a:r>
+              <a:rPr sz="1600" b="1">
+                <a:solidFill>
+                  <a:srgbClr val="123A3A"/>
+                </a:solidFill>
+                <a:latin typeface="Microsoft YaHei"/>
+                <a:ea typeface="Microsoft YaHei"/>
+              </a:rPr>
+              <a:t>② 候选（Candidate）：SmallCNN</a:t>
+            </a:r>
+          </a:p>
+          <a:p>
+            <a:pPr algn="l">
+              <a:spcAft>
+                <a:spcPts val="300"/>
+              </a:spcAft>
+            </a:pPr>
+            <a:r>
+              <a:rPr sz="1400" b="0">
+                <a:solidFill>
+                  <a:srgbClr val="123A3A"/>
+                </a:solidFill>
+                <a:latin typeface="Microsoft YaHei"/>
+                <a:ea typeface="Microsoft YaHei"/>
+              </a:rPr>
+              <a:t>· 原理差异：卷积核在图上滑动，自动学习局部纹理（裂缝是线状纹理）</a:t>
+            </a:r>
+          </a:p>
+          <a:p>
+            <a:pPr algn="l">
+              <a:spcAft>
+                <a:spcPts val="300"/>
+              </a:spcAft>
+            </a:pPr>
+            <a:r>
+              <a:rPr sz="1400" b="0">
+                <a:solidFill>
+                  <a:srgbClr val="123A3A"/>
+                </a:solidFill>
+                <a:latin typeface="Microsoft YaHei"/>
+                <a:ea typeface="Microsoft YaHei"/>
+              </a:rPr>
+              <a:t>· 参数共享 + 池化降采样 → 参数量少、对小位移更稳健</a:t>
+            </a:r>
+          </a:p>
+          <a:p>
+            <a:pPr algn="l">
+              <a:spcAft>
+                <a:spcPts val="300"/>
+              </a:spcAft>
+            </a:pPr>
+            <a:r>
+              <a:rPr sz="1400" b="0">
+                <a:solidFill>
+                  <a:srgbClr val="123A3A"/>
+                </a:solidFill>
+                <a:latin typeface="Microsoft YaHei"/>
+                <a:ea typeface="Microsoft YaHei"/>
+              </a:rPr>
+              <a:t>· 训练设置：600/类、75/25、seed 2026、8 epochs（900/300）</a:t>
+            </a:r>
+          </a:p>
+          <a:p>
+            <a:pPr algn="l">
+              <a:spcAft>
+                <a:spcPts val="300"/>
+              </a:spcAft>
+            </a:pPr>
+            <a:r>
+              <a:rPr sz="1400" b="1">
+                <a:solidFill>
+                  <a:srgbClr val="123A3A"/>
+                </a:solidFill>
+                <a:latin typeface="Microsoft YaHei"/>
+                <a:ea typeface="Microsoft YaHei"/>
+              </a:rPr>
+              <a:t>· 与基线同数据、同划分、同测试集，只改“方法”一个变量</a:t>
+            </a:r>
+          </a:p>
+        </p:txBody>
+      </p:sp>
+      <p:sp>
+        <p:nvSpPr>
+          <p:cNvPr id="8" name="Rounded Rectangle 7"/>
+          <p:cNvSpPr/>
           <p:nvPr/>
         </p:nvSpPr>
         <p:spPr>
           <a:xfrm>
-            <a:off x="914400" y="1463040"/>
-            <a:ext cx="10424160" cy="4572000"/>
+            <a:off x="540000" y="3456000"/>
+            <a:ext cx="11124000" cy="2988000"/>
           </a:xfrm>
-          <a:prstGeom prst="rect">
-            <a:avLst/>
-          </a:prstGeom>
-          <a:noFill/>
-        </p:spPr>
-        <p:txBody>
-          <a:bodyPr wrap="square">
-            <a:spAutoFit/>
-          </a:bodyPr>
-          <a:lstStyle/>
-          <a:p>
-            <a:pPr>
-              <a:spcAft>
-                <a:spcPts val="1200"/>
-              </a:spcAft>
-            </a:pPr>
-            <a:r>
-              <a:rPr sz="1900" b="1">
-                <a:solidFill>
-                  <a:srgbClr val="1F3A5F"/>
-                </a:solidFill>
-                <a:latin typeface="Microsoft YaHei"/>
-                <a:ea typeface="Microsoft YaHei"/>
-              </a:rPr>
-              <a:t>•  候选：SmallCNN（2 卷积 + 2 池化 + 线性）</a:t>
-            </a:r>
-          </a:p>
-          <a:p>
-            <a:pPr>
-              <a:spcAft>
-                <a:spcPts val="1200"/>
-              </a:spcAft>
-            </a:pPr>
-            <a:r>
-              <a:rPr sz="1900" b="0">
-                <a:solidFill>
-                  <a:srgbClr val="1F3A5F"/>
-                </a:solidFill>
-                <a:latin typeface="Microsoft YaHei"/>
-                <a:ea typeface="Microsoft YaHei"/>
-              </a:rPr>
-              <a:t>•  训练：600/类、75/25、seed 2026、8 epochs（900/300）</a:t>
-            </a:r>
-          </a:p>
-          <a:p>
-            <a:pPr>
-              <a:spcAft>
-                <a:spcPts val="1200"/>
-              </a:spcAft>
-            </a:pPr>
-            <a:r>
-              <a:rPr sz="2000" b="1">
-                <a:solidFill>
-                  <a:srgbClr val="1F3A5F"/>
-                </a:solidFill>
-                <a:latin typeface="Microsoft YaHei"/>
-                <a:ea typeface="Microsoft YaHei"/>
-              </a:rPr>
-              <a:t>•  对比：基线 acc 0.50 ｜ CNN acc 0.943</a:t>
-            </a:r>
-          </a:p>
-          <a:p>
-            <a:pPr>
-              <a:spcAft>
-                <a:spcPts val="1200"/>
-              </a:spcAft>
-            </a:pPr>
-            <a:r>
-              <a:rPr sz="2000" b="0">
-                <a:solidFill>
-                  <a:srgbClr val="1F3A5F"/>
-                </a:solidFill>
-                <a:latin typeface="Microsoft YaHei"/>
-                <a:ea typeface="Microsoft YaHei"/>
-              </a:rPr>
-              <a:t>•  CNN：漏检 14 ｜ 误报 3；train_loss 0.68 → 0.20</a:t>
-            </a:r>
-          </a:p>
-        </p:txBody>
-      </p:sp>
-      <p:sp>
-        <p:nvSpPr>
-          <p:cNvPr id="6" name="TextBox 5"/>
-          <p:cNvSpPr txBox="1"/>
-          <p:nvPr/>
-        </p:nvSpPr>
-        <p:spPr>
-          <a:xfrm>
-            <a:off x="11155680" y="6446520"/>
-            <a:ext cx="914400" cy="365760"/>
-          </a:xfrm>
-          <a:prstGeom prst="rect">
-            <a:avLst/>
-          </a:prstGeom>
-          <a:noFill/>
-        </p:spPr>
-        <p:txBody>
-          <a:bodyPr wrap="square">
-            <a:spAutoFit/>
-          </a:bodyPr>
-          <a:lstStyle/>
-          <a:p>
-            <a:pPr algn="r"/>
-            <a:r>
-              <a:rPr sz="1200" b="0">
-                <a:solidFill>
-                  <a:srgbClr val="4A4A4A"/>
-                </a:solidFill>
-                <a:latin typeface="Microsoft YaHei"/>
-                <a:ea typeface="Microsoft YaHei"/>
-              </a:rPr>
-              <a:t>04</a:t>
-            </a:r>
-          </a:p>
-        </p:txBody>
-      </p:sp>
-    </p:spTree>
-  </p:cSld>
-  <p:clrMapOvr>
-    <a:masterClrMapping/>
-  </p:clrMapOvr>
-</p:sld>
-</file>
-
-<file path=ppt/slides/slide5.xml><?xml version="1.0" encoding="utf-8"?>
-<p:sld xmlns:a="http://schemas.openxmlformats.org/drawingml/2006/main" xmlns:p="http://schemas.openxmlformats.org/presentationml/2006/main" xmlns:r="http://schemas.openxmlformats.org/officeDocument/2006/relationships">
-  <p:cSld>
-    <p:spTree>
-      <p:nvGrpSpPr>
-        <p:cNvPr id="1" name=""/>
-        <p:cNvGrpSpPr/>
-        <p:nvPr/>
-      </p:nvGrpSpPr>
-      <p:grpSpPr/>
-      <p:sp>
-        <p:nvSpPr>
-          <p:cNvPr id="2" name="Rectangle 1"/>
-          <p:cNvSpPr/>
-          <p:nvPr/>
-        </p:nvSpPr>
-        <p:spPr>
-          <a:xfrm>
-            <a:off x="0" y="0"/>
-            <a:ext cx="12191695" cy="1051560"/>
-          </a:xfrm>
-          <a:prstGeom prst="rect">
+          <a:prstGeom prst="roundRect">
             <a:avLst/>
           </a:prstGeom>
           <a:solidFill>
-            <a:srgbClr val="1F3A5F"/>
+            <a:srgbClr val="122A33"/>
           </a:solidFill>
           <a:ln>
             <a:noFill/>
@@ -4877,64 +4509,252 @@
           </a:fontRef>
         </p:style>
         <p:txBody>
-          <a:bodyPr rtlCol="0" anchor="ctr"/>
-          <a:lstStyle/>
-          <a:p>
-            <a:pPr algn="ctr"/>
-          </a:p>
-        </p:txBody>
-      </p:sp>
-      <p:sp>
-        <p:nvSpPr>
-          <p:cNvPr id="3" name="TextBox 2"/>
-          <p:cNvSpPr txBox="1"/>
+          <a:bodyPr wrap="square" lIns="125999" tIns="108000" rIns="125999" bIns="108000" rtlCol="0" anchor="t"/>
+          <a:lstStyle/>
+          <a:p>
+            <a:pPr algn="l">
+              <a:spcAft>
+                <a:spcPts val="500"/>
+              </a:spcAft>
+            </a:pPr>
+            <a:r>
+              <a:rPr sz="1500" b="1">
+                <a:solidFill>
+                  <a:srgbClr val="02C39A"/>
+                </a:solidFill>
+                <a:latin typeface="Microsoft YaHei"/>
+                <a:ea typeface="Microsoft YaHei"/>
+              </a:rPr>
+              <a:t>③ 真实核心代码（取自课程 starter）——模型构建与预处理</a:t>
+            </a:r>
+          </a:p>
+          <a:p>
+            <a:pPr algn="l">
+              <a:spcAft>
+                <a:spcPts val="300"/>
+              </a:spcAft>
+            </a:pPr>
+            <a:r>
+              <a:rPr sz="1200" b="0">
+                <a:solidFill>
+                  <a:srgbClr val="8DDDD0"/>
+                </a:solidFill>
+                <a:latin typeface="Consolas"/>
+                <a:ea typeface="Microsoft YaHei"/>
+              </a:rPr>
+              <a:t># models.py · 课程指定的 SmallCNN 层结构（3×64×64 → 2 类）</a:t>
+            </a:r>
+          </a:p>
+          <a:p>
+            <a:pPr algn="l">
+              <a:spcAft>
+                <a:spcPts val="300"/>
+              </a:spcAft>
+            </a:pPr>
+            <a:r>
+              <a:rPr sz="1300" b="0">
+                <a:solidFill>
+                  <a:srgbClr val="E8F7F4"/>
+                </a:solidFill>
+                <a:latin typeface="Consolas"/>
+                <a:ea typeface="Microsoft YaHei"/>
+              </a:rPr>
+              <a:t>self.net = nn.Sequential(</a:t>
+            </a:r>
+          </a:p>
+          <a:p>
+            <a:pPr algn="l">
+              <a:spcAft>
+                <a:spcPts val="300"/>
+              </a:spcAft>
+            </a:pPr>
+            <a:r>
+              <a:rPr sz="1300" b="0">
+                <a:solidFill>
+                  <a:srgbClr val="E8F7F4"/>
+                </a:solidFill>
+                <a:latin typeface="Consolas"/>
+                <a:ea typeface="Microsoft YaHei"/>
+              </a:rPr>
+              <a:t>    nn.Conv2d(3, 8, 3, padding=1), nn.ReLU(), nn.MaxPool2d(2),</a:t>
+            </a:r>
+          </a:p>
+          <a:p>
+            <a:pPr algn="l">
+              <a:spcAft>
+                <a:spcPts val="300"/>
+              </a:spcAft>
+            </a:pPr>
+            <a:r>
+              <a:rPr sz="1300" b="0">
+                <a:solidFill>
+                  <a:srgbClr val="E8F7F4"/>
+                </a:solidFill>
+                <a:latin typeface="Consolas"/>
+                <a:ea typeface="Microsoft YaHei"/>
+              </a:rPr>
+              <a:t>    nn.Conv2d(8, 16, 3, padding=1), nn.ReLU(), nn.MaxPool2d(2),</a:t>
+            </a:r>
+          </a:p>
+          <a:p>
+            <a:pPr algn="l">
+              <a:spcAft>
+                <a:spcPts val="300"/>
+              </a:spcAft>
+            </a:pPr>
+            <a:r>
+              <a:rPr sz="1300" b="0">
+                <a:solidFill>
+                  <a:srgbClr val="E8F7F4"/>
+                </a:solidFill>
+                <a:latin typeface="Consolas"/>
+                <a:ea typeface="Microsoft YaHei"/>
+              </a:rPr>
+              <a:t>    nn.Flatten(), nn.Linear(16*16*16, 2))</a:t>
+            </a:r>
+          </a:p>
+          <a:p>
+            <a:pPr algn="l">
+              <a:spcAft>
+                <a:spcPts val="300"/>
+              </a:spcAft>
+            </a:pPr>
+            <a:r>
+              <a:rPr sz="1200" b="1">
+                <a:solidFill>
+                  <a:srgbClr val="02C39A"/>
+                </a:solidFill>
+                <a:latin typeface="Microsoft YaHei"/>
+                <a:ea typeface="Microsoft YaHei"/>
+              </a:rPr>
+              <a:t># 一句话：两层卷积+池化逐层提取局部纹理并降维，最后展平经全连接输出两类得分</a:t>
+            </a:r>
+          </a:p>
+          <a:p>
+            <a:pPr algn="l">
+              <a:spcAft>
+                <a:spcPts val="300"/>
+              </a:spcAft>
+            </a:pPr>
+            <a:endParaRPr sz="1200" b="1">
+              <a:solidFill>
+                <a:srgbClr val="02C39A"/>
+              </a:solidFill>
+              <a:latin typeface="Microsoft YaHei"/>
+              <a:ea typeface="Microsoft YaHei"/>
+            </a:endParaRPr>
+          </a:p>
+          <a:p>
+            <a:pPr algn="l">
+              <a:spcAft>
+                <a:spcPts val="300"/>
+              </a:spcAft>
+            </a:pPr>
+            <a:r>
+              <a:rPr sz="1200" b="0">
+                <a:solidFill>
+                  <a:srgbClr val="8DDDD0"/>
+                </a:solidFill>
+                <a:latin typeface="Consolas"/>
+                <a:ea typeface="Microsoft YaHei"/>
+              </a:rPr>
+              <a:t># train.py · 图像预处理：统一尺寸并转成张量</a:t>
+            </a:r>
+          </a:p>
+          <a:p>
+            <a:pPr algn="l">
+              <a:spcAft>
+                <a:spcPts val="300"/>
+              </a:spcAft>
+            </a:pPr>
+            <a:r>
+              <a:rPr sz="1300" b="0">
+                <a:solidFill>
+                  <a:srgbClr val="E8F7F4"/>
+                </a:solidFill>
+                <a:latin typeface="Consolas"/>
+                <a:ea typeface="Microsoft YaHei"/>
+              </a:rPr>
+              <a:t>transform = transforms.Compose([</a:t>
+            </a:r>
+          </a:p>
+          <a:p>
+            <a:pPr algn="l">
+              <a:spcAft>
+                <a:spcPts val="300"/>
+              </a:spcAft>
+            </a:pPr>
+            <a:r>
+              <a:rPr sz="1300" b="0">
+                <a:solidFill>
+                  <a:srgbClr val="E8F7F4"/>
+                </a:solidFill>
+                <a:latin typeface="Consolas"/>
+                <a:ea typeface="Microsoft YaHei"/>
+              </a:rPr>
+              <a:t>    transforms.Resize((64, 64)), transforms.ToTensor()])</a:t>
+            </a:r>
+          </a:p>
+          <a:p>
+            <a:pPr algn="l">
+              <a:spcAft>
+                <a:spcPts val="300"/>
+              </a:spcAft>
+            </a:pPr>
+            <a:r>
+              <a:rPr sz="1200" b="1">
+                <a:solidFill>
+                  <a:srgbClr val="02C39A"/>
+                </a:solidFill>
+                <a:latin typeface="Microsoft YaHei"/>
+                <a:ea typeface="Microsoft YaHei"/>
+              </a:rPr>
+              <a:t># 一句话：把任意尺寸照片统一为 3×64×64、0~1 张量，保证 CNN 输入形状一致</a:t>
+            </a:r>
+          </a:p>
+        </p:txBody>
+      </p:sp>
+    </p:spTree>
+  </p:cSld>
+  <p:clrMapOvr>
+    <a:masterClrMapping/>
+  </p:clrMapOvr>
+</p:sld>
+</file>
+
+<file path=ppt/slides/slide3.xml><?xml version="1.0" encoding="utf-8"?>
+<p:sld xmlns:a="http://schemas.openxmlformats.org/drawingml/2006/main" xmlns:r="http://schemas.openxmlformats.org/officeDocument/2006/relationships" xmlns:p="http://schemas.openxmlformats.org/presentationml/2006/main">
+  <p:cSld>
+    <p:spTree>
+      <p:nvGrpSpPr>
+        <p:cNvPr id="1" name=""/>
+        <p:cNvGrpSpPr/>
+        <p:nvPr/>
+      </p:nvGrpSpPr>
+      <p:grpSpPr>
+        <a:xfrm>
+          <a:off x="0" y="0"/>
+          <a:ext cx="0" cy="0"/>
+          <a:chOff x="0" y="0"/>
+          <a:chExt cx="0" cy="0"/>
+        </a:xfrm>
+      </p:grpSpPr>
+      <p:sp>
+        <p:nvSpPr>
+          <p:cNvPr id="2" name="Rectangle 1"/>
+          <p:cNvSpPr/>
           <p:nvPr/>
         </p:nvSpPr>
         <p:spPr>
           <a:xfrm>
-            <a:off x="640080" y="228600"/>
-            <a:ext cx="10515600" cy="640080"/>
-          </a:xfrm>
-          <a:prstGeom prst="rect">
-            <a:avLst/>
-          </a:prstGeom>
-          <a:noFill/>
-        </p:spPr>
-        <p:txBody>
-          <a:bodyPr wrap="square">
-            <a:spAutoFit/>
-          </a:bodyPr>
-          <a:lstStyle/>
-          <a:p>
-            <a:r>
-              <a:rPr sz="3000" b="1">
-                <a:solidFill>
-                  <a:srgbClr val="FFFFFF"/>
-                </a:solidFill>
-                <a:latin typeface="Microsoft YaHei"/>
-                <a:ea typeface="Microsoft YaHei"/>
-              </a:rPr>
-              <a:t>失败、限制与结论</a:t>
-            </a:r>
-          </a:p>
-        </p:txBody>
-      </p:sp>
-      <p:sp>
-        <p:nvSpPr>
-          <p:cNvPr id="4" name="Rectangle 3"/>
-          <p:cNvSpPr/>
-          <p:nvPr/>
-        </p:nvSpPr>
-        <p:spPr>
-          <a:xfrm>
-            <a:off x="0" y="1051560"/>
-            <a:ext cx="164592" cy="4892040"/>
+            <a:off x="-12000" y="0"/>
+            <a:ext cx="12192000" cy="6858000"/>
           </a:xfrm>
           <a:prstGeom prst="rect">
             <a:avLst/>
           </a:prstGeom>
           <a:solidFill>
-            <a:srgbClr val="E86A17"/>
+            <a:srgbClr val="F7FBFA"/>
           </a:solidFill>
           <a:ln>
             <a:noFill/>
@@ -4960,132 +4780,1218 @@
           <a:lstStyle/>
           <a:p>
             <a:pPr algn="ctr"/>
-          </a:p>
-        </p:txBody>
-      </p:sp>
-      <p:sp>
-        <p:nvSpPr>
-          <p:cNvPr id="5" name="TextBox 4"/>
+            <a:endParaRPr/>
+          </a:p>
+        </p:txBody>
+      </p:sp>
+      <p:sp>
+        <p:nvSpPr>
+          <p:cNvPr id="3" name="TextBox 2"/>
           <p:cNvSpPr txBox="1"/>
           <p:nvPr/>
         </p:nvSpPr>
         <p:spPr>
           <a:xfrm>
-            <a:off x="914400" y="1463040"/>
-            <a:ext cx="10424160" cy="4572000"/>
+            <a:off x="540000" y="234000"/>
+            <a:ext cx="5400000" cy="288000"/>
           </a:xfrm>
           <a:prstGeom prst="rect">
             <a:avLst/>
           </a:prstGeom>
           <a:noFill/>
+          <a:ln>
+            <a:noFill/>
+          </a:ln>
         </p:spPr>
         <p:txBody>
-          <a:bodyPr wrap="square">
+          <a:bodyPr wrap="square" lIns="108000" tIns="72000" rIns="108000" bIns="72000">
             <a:spAutoFit/>
           </a:bodyPr>
           <a:lstStyle/>
           <a:p>
-            <a:pPr>
-              <a:spcAft>
-                <a:spcPts val="1200"/>
-              </a:spcAft>
-            </a:pPr>
-            <a:r>
-              <a:rPr sz="1900" b="1">
-                <a:solidFill>
-                  <a:srgbClr val="1F3A5F"/>
+            <a:pPr algn="l">
+              <a:spcAft>
+                <a:spcPts val="300"/>
+              </a:spcAft>
+            </a:pPr>
+            <a:r>
+              <a:rPr sz="1400" b="1">
+                <a:solidFill>
+                  <a:srgbClr val="02C39A"/>
                 </a:solidFill>
                 <a:latin typeface="Microsoft YaHei"/>
                 <a:ea typeface="Microsoft YaHei"/>
               </a:rPr>
-              <a:t>•  失败：CNN 仍漏检 14 张裂缝（如 04283.jpg，2ep 与 8ep 均漏检）</a:t>
-            </a:r>
-          </a:p>
-          <a:p>
-            <a:pPr>
-              <a:spcAft>
-                <a:spcPts val="1200"/>
-              </a:spcAft>
-            </a:pPr>
-            <a:r>
-              <a:rPr sz="1900" b="0">
-                <a:solidFill>
-                  <a:srgbClr val="1F3A5F"/>
-                </a:solidFill>
-                <a:latin typeface="Microsoft YaHei"/>
-                <a:ea typeface="Microsoft YaHei"/>
-              </a:rPr>
-              <a:t>•  限制：不能替代现场检查 / 工程判断；切块数据有泄漏，数字偏乐观</a:t>
-            </a:r>
-          </a:p>
-          <a:p>
-            <a:pPr>
-              <a:spcAft>
-                <a:spcPts val="1200"/>
-              </a:spcAft>
-            </a:pPr>
-            <a:r>
-              <a:rPr sz="2000" b="1">
-                <a:solidFill>
-                  <a:srgbClr val="1F3A5F"/>
-                </a:solidFill>
-                <a:latin typeface="Microsoft YaHei"/>
-                <a:ea typeface="Microsoft YaHei"/>
-              </a:rPr>
-              <a:t>•  结论：CNN 显著优于基线，大幅减少人工复核量</a:t>
-            </a:r>
-          </a:p>
-          <a:p>
-            <a:pPr>
-              <a:spcAft>
-                <a:spcPts val="1200"/>
-              </a:spcAft>
-            </a:pPr>
-            <a:r>
-              <a:rPr sz="1900" b="0">
-                <a:solidFill>
-                  <a:srgbClr val="1F3A5F"/>
-                </a:solidFill>
-                <a:latin typeface="Microsoft YaHei"/>
-                <a:ea typeface="Microsoft YaHei"/>
-              </a:rPr>
-              <a:t>•  下一步：看漏检图像共性，再考虑数据增强</a:t>
-            </a:r>
-          </a:p>
-        </p:txBody>
-      </p:sp>
-      <p:sp>
-        <p:nvSpPr>
-          <p:cNvPr id="6" name="TextBox 5"/>
+              <a:t>03 · 约 60 秒</a:t>
+            </a:r>
+          </a:p>
+        </p:txBody>
+      </p:sp>
+      <p:sp>
+        <p:nvSpPr>
+          <p:cNvPr id="4" name="TextBox 3"/>
           <p:cNvSpPr txBox="1"/>
           <p:nvPr/>
         </p:nvSpPr>
         <p:spPr>
           <a:xfrm>
-            <a:off x="11155680" y="6446520"/>
-            <a:ext cx="914400" cy="365760"/>
+            <a:off x="540000" y="522000"/>
+            <a:ext cx="11160000" cy="503999"/>
           </a:xfrm>
           <a:prstGeom prst="rect">
             <a:avLst/>
           </a:prstGeom>
           <a:noFill/>
+          <a:ln>
+            <a:noFill/>
+          </a:ln>
         </p:spPr>
         <p:txBody>
-          <a:bodyPr wrap="square">
+          <a:bodyPr wrap="square" lIns="108000" tIns="72000" rIns="108000" bIns="72000">
             <a:spAutoFit/>
           </a:bodyPr>
           <a:lstStyle/>
           <a:p>
-            <a:pPr algn="r"/>
-            <a:r>
-              <a:rPr sz="1200" b="0">
-                <a:solidFill>
-                  <a:srgbClr val="4A4A4A"/>
+            <a:pPr algn="l">
+              <a:spcAft>
+                <a:spcPts val="300"/>
+              </a:spcAft>
+            </a:pPr>
+            <a:r>
+              <a:rPr sz="3000" b="1">
+                <a:solidFill>
+                  <a:srgbClr val="183B45"/>
                 </a:solidFill>
                 <a:latin typeface="Microsoft YaHei"/>
                 <a:ea typeface="Microsoft YaHei"/>
               </a:rPr>
-              <a:t>05</a:t>
+              <a:t>最重要证据：基线与 CNN 的对比</a:t>
+            </a:r>
+          </a:p>
+        </p:txBody>
+      </p:sp>
+      <p:sp>
+        <p:nvSpPr>
+          <p:cNvPr id="5" name="Rectangle 4"/>
+          <p:cNvSpPr/>
+          <p:nvPr/>
+        </p:nvSpPr>
+        <p:spPr>
+          <a:xfrm>
+            <a:off x="540000" y="1062000"/>
+            <a:ext cx="1440000" cy="43200"/>
+          </a:xfrm>
+          <a:prstGeom prst="rect">
+            <a:avLst/>
+          </a:prstGeom>
+          <a:solidFill>
+            <a:srgbClr val="02C39A"/>
+          </a:solidFill>
+          <a:ln>
+            <a:noFill/>
+          </a:ln>
+          <a:effectLst/>
+        </p:spPr>
+        <p:style>
+          <a:lnRef idx="1">
+            <a:schemeClr val="accent1"/>
+          </a:lnRef>
+          <a:fillRef idx="3">
+            <a:schemeClr val="accent1"/>
+          </a:fillRef>
+          <a:effectRef idx="2">
+            <a:schemeClr val="accent1"/>
+          </a:effectRef>
+          <a:fontRef idx="minor">
+            <a:schemeClr val="lt1"/>
+          </a:fontRef>
+        </p:style>
+        <p:txBody>
+          <a:bodyPr rtlCol="0" anchor="ctr"/>
+          <a:lstStyle/>
+          <a:p>
+            <a:pPr algn="ctr"/>
+            <a:endParaRPr/>
+          </a:p>
+        </p:txBody>
+      </p:sp>
+      <p:sp>
+        <p:nvSpPr>
+          <p:cNvPr id="6" name="Rounded Rectangle 5"/>
+          <p:cNvSpPr/>
+          <p:nvPr/>
+        </p:nvSpPr>
+        <p:spPr>
+          <a:xfrm>
+            <a:off x="540000" y="1188000"/>
+            <a:ext cx="5544000" cy="2268000"/>
+          </a:xfrm>
+          <a:prstGeom prst="roundRect">
+            <a:avLst/>
+          </a:prstGeom>
+          <a:solidFill>
+            <a:srgbClr val="183B45"/>
+          </a:solidFill>
+          <a:ln>
+            <a:noFill/>
+          </a:ln>
+          <a:effectLst/>
+        </p:spPr>
+        <p:style>
+          <a:lnRef idx="1">
+            <a:schemeClr val="accent1"/>
+          </a:lnRef>
+          <a:fillRef idx="3">
+            <a:schemeClr val="accent1"/>
+          </a:fillRef>
+          <a:effectRef idx="2">
+            <a:schemeClr val="accent1"/>
+          </a:effectRef>
+          <a:fontRef idx="minor">
+            <a:schemeClr val="lt1"/>
+          </a:fontRef>
+        </p:style>
+        <p:txBody>
+          <a:bodyPr wrap="square" lIns="125999" tIns="108000" rIns="125999" bIns="108000" rtlCol="0" anchor="t"/>
+          <a:lstStyle/>
+          <a:p>
+            <a:pPr algn="l">
+              <a:spcAft>
+                <a:spcPts val="600"/>
+              </a:spcAft>
+            </a:pPr>
+            <a:r>
+              <a:rPr sz="1600" b="1">
+                <a:solidFill>
+                  <a:srgbClr val="02C39A"/>
+                </a:solidFill>
+                <a:latin typeface="Microsoft YaHei"/>
+                <a:ea typeface="Microsoft YaHei"/>
+              </a:rPr>
+              <a:t>主指标（测试集 300 张，25%）</a:t>
+            </a:r>
+          </a:p>
+          <a:p>
+            <a:pPr algn="l">
+              <a:spcAft>
+                <a:spcPts val="300"/>
+              </a:spcAft>
+            </a:pPr>
+            <a:r>
+              <a:rPr sz="1400" b="1">
+                <a:solidFill>
+                  <a:srgbClr val="FFFFFF"/>
+                </a:solidFill>
+                <a:latin typeface="Microsoft YaHei"/>
+                <a:ea typeface="Microsoft YaHei"/>
+              </a:rPr>
+              <a:t>准确率 acc：基线 0.500 → CNN 0.943</a:t>
+            </a:r>
+          </a:p>
+          <a:p>
+            <a:pPr algn="l">
+              <a:spcAft>
+                <a:spcPts val="300"/>
+              </a:spcAft>
+            </a:pPr>
+            <a:r>
+              <a:rPr sz="1400" b="0">
+                <a:solidFill>
+                  <a:srgbClr val="FFFFFF"/>
+                </a:solidFill>
+                <a:latin typeface="Microsoft YaHei"/>
+                <a:ea typeface="Microsoft YaHei"/>
+              </a:rPr>
+              <a:t>漏检 FN：基线 0 → CNN 14</a:t>
+            </a:r>
+          </a:p>
+          <a:p>
+            <a:pPr algn="l">
+              <a:spcAft>
+                <a:spcPts val="300"/>
+              </a:spcAft>
+            </a:pPr>
+            <a:r>
+              <a:rPr sz="1400" b="0">
+                <a:solidFill>
+                  <a:srgbClr val="FFFFFF"/>
+                </a:solidFill>
+                <a:latin typeface="Microsoft YaHei"/>
+                <a:ea typeface="Microsoft YaHei"/>
+              </a:rPr>
+              <a:t>误报 FP：基线 150 → CNN 3</a:t>
+            </a:r>
+          </a:p>
+          <a:p>
+            <a:pPr algn="l">
+              <a:spcAft>
+                <a:spcPts val="300"/>
+              </a:spcAft>
+            </a:pPr>
+            <a:r>
+              <a:rPr sz="1400" b="0">
+                <a:solidFill>
+                  <a:srgbClr val="FFFFFF"/>
+                </a:solidFill>
+                <a:latin typeface="Microsoft YaHei"/>
+                <a:ea typeface="Microsoft YaHei"/>
+              </a:rPr>
+              <a:t>train_loss：0.68 → 0.20（8 epochs）</a:t>
+            </a:r>
+          </a:p>
+          <a:p>
+            <a:pPr algn="l">
+              <a:spcAft>
+                <a:spcPts val="300"/>
+              </a:spcAft>
+            </a:pPr>
+            <a:r>
+              <a:rPr sz="1400" b="0">
+                <a:solidFill>
+                  <a:srgbClr val="FFFFFF"/>
+                </a:solidFill>
+                <a:latin typeface="Microsoft YaHei"/>
+                <a:ea typeface="Microsoft YaHei"/>
+              </a:rPr>
+              <a:t>数据划分：600/类、75/25 → 训练 900 / 测试 300</a:t>
+            </a:r>
+          </a:p>
+        </p:txBody>
+      </p:sp>
+      <p:sp>
+        <p:nvSpPr>
+          <p:cNvPr id="7" name="Rounded Rectangle 6"/>
+          <p:cNvSpPr/>
+          <p:nvPr/>
+        </p:nvSpPr>
+        <p:spPr>
+          <a:xfrm>
+            <a:off x="6480000" y="1188000"/>
+            <a:ext cx="5184000" cy="2268000"/>
+          </a:xfrm>
+          <a:prstGeom prst="roundRect">
+            <a:avLst/>
+          </a:prstGeom>
+          <a:solidFill>
+            <a:srgbClr val="FBE4C8"/>
+          </a:solidFill>
+          <a:ln>
+            <a:noFill/>
+          </a:ln>
+          <a:effectLst/>
+        </p:spPr>
+        <p:style>
+          <a:lnRef idx="1">
+            <a:schemeClr val="accent1"/>
+          </a:lnRef>
+          <a:fillRef idx="3">
+            <a:schemeClr val="accent1"/>
+          </a:fillRef>
+          <a:effectRef idx="2">
+            <a:schemeClr val="accent1"/>
+          </a:effectRef>
+          <a:fontRef idx="minor">
+            <a:schemeClr val="lt1"/>
+          </a:fontRef>
+        </p:style>
+        <p:txBody>
+          <a:bodyPr wrap="square" lIns="125999" tIns="108000" rIns="125999" bIns="108000" rtlCol="0" anchor="t"/>
+          <a:lstStyle/>
+          <a:p>
+            <a:pPr algn="l">
+              <a:spcAft>
+                <a:spcPts val="500"/>
+              </a:spcAft>
+            </a:pPr>
+            <a:r>
+              <a:rPr sz="1600" b="1">
+                <a:solidFill>
+                  <a:srgbClr val="6B3E16"/>
+                </a:solidFill>
+                <a:latin typeface="Microsoft YaHei"/>
+                <a:ea typeface="Microsoft YaHei"/>
+              </a:rPr>
+              <a:t>可视化证据（占位）</a:t>
+            </a:r>
+          </a:p>
+          <a:p>
+            <a:pPr algn="l">
+              <a:spcAft>
+                <a:spcPts val="300"/>
+              </a:spcAft>
+            </a:pPr>
+            <a:r>
+              <a:rPr sz="1400" b="1">
+                <a:solidFill>
+                  <a:srgbClr val="6B3E16"/>
+                </a:solidFill>
+                <a:latin typeface="Microsoft YaHei"/>
+                <a:ea typeface="Microsoft YaHei"/>
+              </a:rPr>
+              <a:t>[ 请在此处插入真实的 Loss 曲线图 或 预测对比图 / 混淆矩阵 ]</a:t>
+            </a:r>
+          </a:p>
+          <a:p>
+            <a:pPr algn="l">
+              <a:spcAft>
+                <a:spcPts val="300"/>
+              </a:spcAft>
+            </a:pPr>
+            <a:endParaRPr sz="1400" b="1">
+              <a:solidFill>
+                <a:srgbClr val="6B3E16"/>
+              </a:solidFill>
+              <a:latin typeface="Microsoft YaHei"/>
+              <a:ea typeface="Microsoft YaHei"/>
+            </a:endParaRPr>
+          </a:p>
+          <a:p>
+            <a:pPr algn="l">
+              <a:spcAft>
+                <a:spcPts val="300"/>
+              </a:spcAft>
+            </a:pPr>
+            <a:r>
+              <a:rPr sz="1300" b="0">
+                <a:solidFill>
+                  <a:srgbClr val="6B3E16"/>
+                </a:solidFill>
+                <a:latin typeface="Microsoft YaHei"/>
+                <a:ea typeface="Microsoft YaHei"/>
+              </a:rPr>
+              <a:t>建议图 1：train_loss 随 epoch 下降曲线（0.68 → 0.20），说明模型在学习</a:t>
+            </a:r>
+          </a:p>
+          <a:p>
+            <a:pPr algn="l">
+              <a:spcAft>
+                <a:spcPts val="300"/>
+              </a:spcAft>
+            </a:pPr>
+            <a:r>
+              <a:rPr sz="1300" b="0">
+                <a:solidFill>
+                  <a:srgbClr val="6B3E16"/>
+                </a:solidFill>
+                <a:latin typeface="Microsoft YaHei"/>
+                <a:ea typeface="Microsoft YaHei"/>
+              </a:rPr>
+              <a:t>建议图 2：混淆矩阵或错误图像联系表（突出漏检 14 张）</a:t>
+            </a:r>
+          </a:p>
+        </p:txBody>
+      </p:sp>
+      <p:sp>
+        <p:nvSpPr>
+          <p:cNvPr id="8" name="Rounded Rectangle 7"/>
+          <p:cNvSpPr/>
+          <p:nvPr/>
+        </p:nvSpPr>
+        <p:spPr>
+          <a:xfrm>
+            <a:off x="1478948" y="3692054"/>
+            <a:ext cx="11124000" cy="1872000"/>
+          </a:xfrm>
+          <a:prstGeom prst="roundRect">
+            <a:avLst/>
+          </a:prstGeom>
+          <a:solidFill>
+            <a:srgbClr val="D7F4EE"/>
+          </a:solidFill>
+          <a:ln>
+            <a:noFill/>
+          </a:ln>
+          <a:effectLst/>
+        </p:spPr>
+        <p:style>
+          <a:lnRef idx="1">
+            <a:schemeClr val="accent1"/>
+          </a:lnRef>
+          <a:fillRef idx="3">
+            <a:schemeClr val="accent1"/>
+          </a:fillRef>
+          <a:effectRef idx="2">
+            <a:schemeClr val="accent1"/>
+          </a:effectRef>
+          <a:fontRef idx="minor">
+            <a:schemeClr val="lt1"/>
+          </a:fontRef>
+        </p:style>
+        <p:txBody>
+          <a:bodyPr wrap="square" lIns="125999" tIns="108000" rIns="125999" bIns="108000" rtlCol="0" anchor="t"/>
+          <a:lstStyle/>
+          <a:p>
+            <a:pPr algn="l">
+              <a:spcAft>
+                <a:spcPts val="500"/>
+              </a:spcAft>
+            </a:pPr>
+            <a:r>
+              <a:rPr sz="1500" b="1">
+                <a:solidFill>
+                  <a:srgbClr val="123A3A"/>
+                </a:solidFill>
+                <a:latin typeface="Microsoft YaHei"/>
+                <a:ea typeface="Microsoft YaHei"/>
+              </a:rPr>
+              <a:t>这些数字怎样得到、表示什么？</a:t>
+            </a:r>
+          </a:p>
+          <a:p>
+            <a:pPr algn="l">
+              <a:spcAft>
+                <a:spcPts val="300"/>
+              </a:spcAft>
+            </a:pPr>
+            <a:r>
+              <a:rPr sz="1300" b="0">
+                <a:solidFill>
+                  <a:srgbClr val="123A3A"/>
+                </a:solidFill>
+                <a:latin typeface="Consolas"/>
+                <a:ea typeface="Microsoft YaHei"/>
+              </a:rPr>
+              <a:t>· 命令：python train.py --model cnn --epochs 8 --max-per-class 600 --seed 2026</a:t>
+            </a:r>
+          </a:p>
+          <a:p>
+            <a:pPr algn="l">
+              <a:spcAft>
+                <a:spcPts val="300"/>
+              </a:spcAft>
+            </a:pPr>
+            <a:r>
+              <a:rPr sz="1300" b="0">
+                <a:solidFill>
+                  <a:srgbClr val="123A3A"/>
+                </a:solidFill>
+                <a:latin typeface="Microsoft YaHei"/>
+                <a:ea typeface="Microsoft YaHei"/>
+              </a:rPr>
+              <a:t>· acc：分类正确的比例（0.943 = 测试 300 张中约 283 张正确）</a:t>
+            </a:r>
+          </a:p>
+          <a:p>
+            <a:pPr algn="l">
+              <a:spcAft>
+                <a:spcPts val="300"/>
+              </a:spcAft>
+            </a:pPr>
+            <a:r>
+              <a:rPr sz="1300" b="1">
+                <a:solidFill>
+                  <a:srgbClr val="123A3A"/>
+                </a:solidFill>
+                <a:latin typeface="Microsoft YaHei"/>
+                <a:ea typeface="Microsoft YaHei"/>
+              </a:rPr>
+              <a:t>· FN 漏检是最危险错误：14 张真实裂缝没被报出，不会送去人工复核</a:t>
+            </a:r>
+          </a:p>
+          <a:p>
+            <a:pPr algn="l">
+              <a:spcAft>
+                <a:spcPts val="300"/>
+              </a:spcAft>
+            </a:pPr>
+            <a:r>
+              <a:rPr sz="1300" b="0">
+                <a:solidFill>
+                  <a:srgbClr val="123A3A"/>
+                </a:solidFill>
+                <a:latin typeface="Microsoft YaHei"/>
+                <a:ea typeface="Microsoft YaHei"/>
+              </a:rPr>
+              <a:t>· FP 误报只增加复核量：CNN 从基线 150 降到 3，大幅减少无效复核</a:t>
+            </a:r>
+          </a:p>
+        </p:txBody>
+      </p:sp>
+      <p:sp>
+        <p:nvSpPr>
+          <p:cNvPr id="9" name="TextBox 8"/>
+          <p:cNvSpPr txBox="1"/>
+          <p:nvPr/>
+        </p:nvSpPr>
+        <p:spPr>
+          <a:xfrm>
+            <a:off x="540000" y="5652000"/>
+            <a:ext cx="11124000" cy="432000"/>
+          </a:xfrm>
+          <a:prstGeom prst="rect">
+            <a:avLst/>
+          </a:prstGeom>
+          <a:noFill/>
+          <a:ln>
+            <a:noFill/>
+          </a:ln>
+        </p:spPr>
+        <p:txBody>
+          <a:bodyPr wrap="square" lIns="108000" tIns="72000" rIns="108000" bIns="72000">
+            <a:spAutoFit/>
+          </a:bodyPr>
+          <a:lstStyle/>
+          <a:p>
+            <a:pPr algn="l">
+              <a:spcAft>
+                <a:spcPts val="300"/>
+              </a:spcAft>
+            </a:pPr>
+            <a:r>
+              <a:rPr sz="1300" b="1">
+                <a:solidFill>
+                  <a:srgbClr val="02C39A"/>
+                </a:solidFill>
+                <a:latin typeface="Microsoft YaHei"/>
+                <a:ea typeface="Microsoft YaHei"/>
+              </a:rPr>
+              <a:t>可复现：train.py 同一命令、同一 seed/划分可重新产生以上全部数字。</a:t>
+            </a:r>
+          </a:p>
+        </p:txBody>
+      </p:sp>
+    </p:spTree>
+  </p:cSld>
+  <p:clrMapOvr>
+    <a:masterClrMapping/>
+  </p:clrMapOvr>
+</p:sld>
+</file>
+
+<file path=ppt/slides/slide4.xml><?xml version="1.0" encoding="utf-8"?>
+<p:sld xmlns:a="http://schemas.openxmlformats.org/drawingml/2006/main" xmlns:r="http://schemas.openxmlformats.org/officeDocument/2006/relationships" xmlns:p="http://schemas.openxmlformats.org/presentationml/2006/main">
+  <p:cSld>
+    <p:spTree>
+      <p:nvGrpSpPr>
+        <p:cNvPr id="1" name=""/>
+        <p:cNvGrpSpPr/>
+        <p:nvPr/>
+      </p:nvGrpSpPr>
+      <p:grpSpPr>
+        <a:xfrm>
+          <a:off x="0" y="0"/>
+          <a:ext cx="0" cy="0"/>
+          <a:chOff x="0" y="0"/>
+          <a:chExt cx="0" cy="0"/>
+        </a:xfrm>
+      </p:grpSpPr>
+      <p:sp>
+        <p:nvSpPr>
+          <p:cNvPr id="2" name="Rectangle 1"/>
+          <p:cNvSpPr/>
+          <p:nvPr/>
+        </p:nvSpPr>
+        <p:spPr>
+          <a:xfrm>
+            <a:off x="-156000" y="81419"/>
+            <a:ext cx="12192000" cy="6858000"/>
+          </a:xfrm>
+          <a:prstGeom prst="rect">
+            <a:avLst/>
+          </a:prstGeom>
+          <a:solidFill>
+            <a:srgbClr val="F7FBFA"/>
+          </a:solidFill>
+          <a:ln>
+            <a:noFill/>
+          </a:ln>
+          <a:effectLst/>
+        </p:spPr>
+        <p:style>
+          <a:lnRef idx="1">
+            <a:schemeClr val="accent1"/>
+          </a:lnRef>
+          <a:fillRef idx="3">
+            <a:schemeClr val="accent1"/>
+          </a:fillRef>
+          <a:effectRef idx="2">
+            <a:schemeClr val="accent1"/>
+          </a:effectRef>
+          <a:fontRef idx="minor">
+            <a:schemeClr val="lt1"/>
+          </a:fontRef>
+        </p:style>
+        <p:txBody>
+          <a:bodyPr rtlCol="0" anchor="ctr"/>
+          <a:lstStyle/>
+          <a:p>
+            <a:pPr algn="ctr"/>
+            <a:endParaRPr/>
+          </a:p>
+        </p:txBody>
+      </p:sp>
+      <p:sp>
+        <p:nvSpPr>
+          <p:cNvPr id="3" name="TextBox 2"/>
+          <p:cNvSpPr txBox="1"/>
+          <p:nvPr/>
+        </p:nvSpPr>
+        <p:spPr>
+          <a:xfrm>
+            <a:off x="540000" y="234000"/>
+            <a:ext cx="5400000" cy="288000"/>
+          </a:xfrm>
+          <a:prstGeom prst="rect">
+            <a:avLst/>
+          </a:prstGeom>
+          <a:noFill/>
+          <a:ln>
+            <a:noFill/>
+          </a:ln>
+        </p:spPr>
+        <p:txBody>
+          <a:bodyPr wrap="square" lIns="108000" tIns="72000" rIns="108000" bIns="72000">
+            <a:spAutoFit/>
+          </a:bodyPr>
+          <a:lstStyle/>
+          <a:p>
+            <a:pPr algn="l">
+              <a:spcAft>
+                <a:spcPts val="300"/>
+              </a:spcAft>
+            </a:pPr>
+            <a:r>
+              <a:rPr sz="1400" b="1">
+                <a:solidFill>
+                  <a:srgbClr val="02C39A"/>
+                </a:solidFill>
+                <a:latin typeface="Microsoft YaHei"/>
+                <a:ea typeface="Microsoft YaHei"/>
+              </a:rPr>
+              <a:t>04 · 约 45 秒</a:t>
+            </a:r>
+          </a:p>
+        </p:txBody>
+      </p:sp>
+      <p:sp>
+        <p:nvSpPr>
+          <p:cNvPr id="4" name="TextBox 3"/>
+          <p:cNvSpPr txBox="1"/>
+          <p:nvPr/>
+        </p:nvSpPr>
+        <p:spPr>
+          <a:xfrm>
+            <a:off x="540000" y="522000"/>
+            <a:ext cx="11160000" cy="503999"/>
+          </a:xfrm>
+          <a:prstGeom prst="rect">
+            <a:avLst/>
+          </a:prstGeom>
+          <a:noFill/>
+          <a:ln>
+            <a:noFill/>
+          </a:ln>
+        </p:spPr>
+        <p:txBody>
+          <a:bodyPr wrap="square" lIns="108000" tIns="72000" rIns="108000" bIns="72000">
+            <a:spAutoFit/>
+          </a:bodyPr>
+          <a:lstStyle/>
+          <a:p>
+            <a:pPr algn="l">
+              <a:spcAft>
+                <a:spcPts val="300"/>
+              </a:spcAft>
+            </a:pPr>
+            <a:r>
+              <a:rPr sz="3000" b="1">
+                <a:solidFill>
+                  <a:srgbClr val="183B45"/>
+                </a:solidFill>
+                <a:latin typeface="Microsoft YaHei"/>
+                <a:ea typeface="Microsoft YaHei"/>
+              </a:rPr>
+              <a:t>失败、限制与下一问题</a:t>
+            </a:r>
+          </a:p>
+        </p:txBody>
+      </p:sp>
+      <p:sp>
+        <p:nvSpPr>
+          <p:cNvPr id="5" name="Rectangle 4"/>
+          <p:cNvSpPr/>
+          <p:nvPr/>
+        </p:nvSpPr>
+        <p:spPr>
+          <a:xfrm>
+            <a:off x="540000" y="1062000"/>
+            <a:ext cx="1440000" cy="43200"/>
+          </a:xfrm>
+          <a:prstGeom prst="rect">
+            <a:avLst/>
+          </a:prstGeom>
+          <a:solidFill>
+            <a:srgbClr val="02C39A"/>
+          </a:solidFill>
+          <a:ln>
+            <a:noFill/>
+          </a:ln>
+          <a:effectLst/>
+        </p:spPr>
+        <p:style>
+          <a:lnRef idx="1">
+            <a:schemeClr val="accent1"/>
+          </a:lnRef>
+          <a:fillRef idx="3">
+            <a:schemeClr val="accent1"/>
+          </a:fillRef>
+          <a:effectRef idx="2">
+            <a:schemeClr val="accent1"/>
+          </a:effectRef>
+          <a:fontRef idx="minor">
+            <a:schemeClr val="lt1"/>
+          </a:fontRef>
+        </p:style>
+        <p:txBody>
+          <a:bodyPr rtlCol="0" anchor="ctr"/>
+          <a:lstStyle/>
+          <a:p>
+            <a:pPr algn="ctr"/>
+            <a:endParaRPr/>
+          </a:p>
+        </p:txBody>
+      </p:sp>
+      <p:sp>
+        <p:nvSpPr>
+          <p:cNvPr id="6" name="Rounded Rectangle 5"/>
+          <p:cNvSpPr/>
+          <p:nvPr/>
+        </p:nvSpPr>
+        <p:spPr>
+          <a:xfrm>
+            <a:off x="540000" y="1188000"/>
+            <a:ext cx="11124000" cy="1368000"/>
+          </a:xfrm>
+          <a:prstGeom prst="roundRect">
+            <a:avLst/>
+          </a:prstGeom>
+          <a:solidFill>
+            <a:srgbClr val="FBE4C8"/>
+          </a:solidFill>
+          <a:ln>
+            <a:noFill/>
+          </a:ln>
+          <a:effectLst/>
+        </p:spPr>
+        <p:style>
+          <a:lnRef idx="1">
+            <a:schemeClr val="accent1"/>
+          </a:lnRef>
+          <a:fillRef idx="3">
+            <a:schemeClr val="accent1"/>
+          </a:fillRef>
+          <a:effectRef idx="2">
+            <a:schemeClr val="accent1"/>
+          </a:effectRef>
+          <a:fontRef idx="minor">
+            <a:schemeClr val="lt1"/>
+          </a:fontRef>
+        </p:style>
+        <p:txBody>
+          <a:bodyPr wrap="square" lIns="125999" tIns="108000" rIns="125999" bIns="108000" rtlCol="0" anchor="t"/>
+          <a:lstStyle/>
+          <a:p>
+            <a:pPr algn="l">
+              <a:spcAft>
+                <a:spcPts val="500"/>
+              </a:spcAft>
+            </a:pPr>
+            <a:r>
+              <a:rPr sz="1600" b="1">
+                <a:solidFill>
+                  <a:srgbClr val="6B3E16"/>
+                </a:solidFill>
+                <a:latin typeface="Microsoft YaHei"/>
+                <a:ea typeface="Microsoft YaHei"/>
+              </a:rPr>
+              <a:t>一个真实失败：漏检 14 张真实裂缝</a:t>
+            </a:r>
+          </a:p>
+          <a:p>
+            <a:pPr algn="l">
+              <a:spcAft>
+                <a:spcPts val="300"/>
+              </a:spcAft>
+            </a:pPr>
+            <a:r>
+              <a:rPr sz="1400" b="0">
+                <a:solidFill>
+                  <a:srgbClr val="6B3E16"/>
+                </a:solidFill>
+                <a:latin typeface="Microsoft YaHei"/>
+                <a:ea typeface="Microsoft YaHei"/>
+              </a:rPr>
+              <a:t>04283.jpg 在 2 epoch 与 8 epoch 都被漏检；这类真实裂缝不会被送去人工复核，是最需要优先看的图像</a:t>
+            </a:r>
+          </a:p>
+        </p:txBody>
+      </p:sp>
+      <p:sp>
+        <p:nvSpPr>
+          <p:cNvPr id="7" name="Rounded Rectangle 6"/>
+          <p:cNvSpPr/>
+          <p:nvPr/>
+        </p:nvSpPr>
+        <p:spPr>
+          <a:xfrm>
+            <a:off x="540000" y="2700000"/>
+            <a:ext cx="3456000" cy="3096000"/>
+          </a:xfrm>
+          <a:prstGeom prst="roundRect">
+            <a:avLst/>
+          </a:prstGeom>
+          <a:solidFill>
+            <a:srgbClr val="D7F4EE"/>
+          </a:solidFill>
+          <a:ln>
+            <a:noFill/>
+          </a:ln>
+          <a:effectLst/>
+        </p:spPr>
+        <p:style>
+          <a:lnRef idx="1">
+            <a:schemeClr val="accent1"/>
+          </a:lnRef>
+          <a:fillRef idx="3">
+            <a:schemeClr val="accent1"/>
+          </a:fillRef>
+          <a:effectRef idx="2">
+            <a:schemeClr val="accent1"/>
+          </a:effectRef>
+          <a:fontRef idx="minor">
+            <a:schemeClr val="lt1"/>
+          </a:fontRef>
+        </p:style>
+        <p:txBody>
+          <a:bodyPr wrap="square" lIns="125999" tIns="108000" rIns="125999" bIns="108000" rtlCol="0" anchor="t"/>
+          <a:lstStyle/>
+          <a:p>
+            <a:pPr algn="l">
+              <a:spcAft>
+                <a:spcPts val="500"/>
+              </a:spcAft>
+            </a:pPr>
+            <a:r>
+              <a:rPr sz="1500" b="1">
+                <a:solidFill>
+                  <a:srgbClr val="123A3A"/>
+                </a:solidFill>
+                <a:latin typeface="Microsoft YaHei"/>
+                <a:ea typeface="Microsoft YaHei"/>
+              </a:rPr>
+              <a:t>合理的失败场景</a:t>
+            </a:r>
+          </a:p>
+          <a:p>
+            <a:pPr algn="l">
+              <a:spcAft>
+                <a:spcPts val="300"/>
+              </a:spcAft>
+            </a:pPr>
+            <a:r>
+              <a:rPr sz="1300" b="0">
+                <a:solidFill>
+                  <a:srgbClr val="123A3A"/>
+                </a:solidFill>
+                <a:latin typeface="Microsoft YaHei"/>
+                <a:ea typeface="Microsoft YaHei"/>
+              </a:rPr>
+              <a:t>· 光照/阴影/污渍/划痕与裂缝纹理相似 → 误报</a:t>
+            </a:r>
+          </a:p>
+          <a:p>
+            <a:pPr algn="l">
+              <a:spcAft>
+                <a:spcPts val="300"/>
+              </a:spcAft>
+            </a:pPr>
+            <a:r>
+              <a:rPr sz="1300" b="0">
+                <a:solidFill>
+                  <a:srgbClr val="123A3A"/>
+                </a:solidFill>
+                <a:latin typeface="Microsoft YaHei"/>
+                <a:ea typeface="Microsoft YaHei"/>
+              </a:rPr>
+              <a:t>· 细裂缝 Resize 到 64×64 后细节丢失 → 漏检</a:t>
+            </a:r>
+          </a:p>
+          <a:p>
+            <a:pPr algn="l">
+              <a:spcAft>
+                <a:spcPts val="300"/>
+              </a:spcAft>
+            </a:pPr>
+            <a:r>
+              <a:rPr sz="1300" b="0">
+                <a:solidFill>
+                  <a:srgbClr val="123A3A"/>
+                </a:solidFill>
+                <a:latin typeface="Microsoft YaHei"/>
+                <a:ea typeface="Microsoft YaHei"/>
+              </a:rPr>
+              <a:t>· 切块数据泄漏：图像来自少量高分辨率源图切块，相邻块高度相似，patch 级随机划分可能让相关图像跨训练/测试边界 → 数字偏乐观</a:t>
+            </a:r>
+          </a:p>
+        </p:txBody>
+      </p:sp>
+      <p:sp>
+        <p:nvSpPr>
+          <p:cNvPr id="8" name="Rounded Rectangle 7"/>
+          <p:cNvSpPr/>
+          <p:nvPr/>
+        </p:nvSpPr>
+        <p:spPr>
+          <a:xfrm>
+            <a:off x="4374000" y="2700000"/>
+            <a:ext cx="3456000" cy="3096000"/>
+          </a:xfrm>
+          <a:prstGeom prst="roundRect">
+            <a:avLst/>
+          </a:prstGeom>
+          <a:solidFill>
+            <a:srgbClr val="C9E8F2"/>
+          </a:solidFill>
+          <a:ln>
+            <a:noFill/>
+          </a:ln>
+          <a:effectLst/>
+        </p:spPr>
+        <p:style>
+          <a:lnRef idx="1">
+            <a:schemeClr val="accent1"/>
+          </a:lnRef>
+          <a:fillRef idx="3">
+            <a:schemeClr val="accent1"/>
+          </a:fillRef>
+          <a:effectRef idx="2">
+            <a:schemeClr val="accent1"/>
+          </a:effectRef>
+          <a:fontRef idx="minor">
+            <a:schemeClr val="lt1"/>
+          </a:fontRef>
+        </p:style>
+        <p:txBody>
+          <a:bodyPr wrap="square" lIns="125999" tIns="108000" rIns="125999" bIns="108000" rtlCol="0" anchor="t"/>
+          <a:lstStyle/>
+          <a:p>
+            <a:pPr algn="l">
+              <a:spcAft>
+                <a:spcPts val="500"/>
+              </a:spcAft>
+            </a:pPr>
+            <a:r>
+              <a:rPr sz="1500" b="1">
+                <a:solidFill>
+                  <a:srgbClr val="173F5F"/>
+                </a:solidFill>
+                <a:latin typeface="Microsoft YaHei"/>
+                <a:ea typeface="Microsoft YaHei"/>
+              </a:rPr>
+              <a:t>证据不支持</a:t>
+            </a:r>
+          </a:p>
+          <a:p>
+            <a:pPr algn="l">
+              <a:spcAft>
+                <a:spcPts val="300"/>
+              </a:spcAft>
+            </a:pPr>
+            <a:r>
+              <a:rPr sz="1300" b="0">
+                <a:solidFill>
+                  <a:srgbClr val="173F5F"/>
+                </a:solidFill>
+                <a:latin typeface="Microsoft YaHei"/>
+                <a:ea typeface="Microsoft YaHei"/>
+              </a:rPr>
+              <a:t>· 不能替代现场检查 / 工程判断 / 安全决策</a:t>
+            </a:r>
+          </a:p>
+          <a:p>
+            <a:pPr algn="l">
+              <a:spcAft>
+                <a:spcPts val="300"/>
+              </a:spcAft>
+            </a:pPr>
+            <a:r>
+              <a:rPr sz="1300" b="0">
+                <a:solidFill>
+                  <a:srgbClr val="173F5F"/>
+                </a:solidFill>
+                <a:latin typeface="Microsoft YaHei"/>
+                <a:ea typeface="Microsoft YaHei"/>
+              </a:rPr>
+              <a:t>· 不能宣称“模型已证明结构安全”</a:t>
+            </a:r>
+          </a:p>
+          <a:p>
+            <a:pPr algn="l">
+              <a:spcAft>
+                <a:spcPts val="300"/>
+              </a:spcAft>
+            </a:pPr>
+            <a:r>
+              <a:rPr sz="1300" b="0">
+                <a:solidFill>
+                  <a:srgbClr val="173F5F"/>
+                </a:solidFill>
+                <a:latin typeface="Microsoft YaHei"/>
+                <a:ea typeface="Microsoft YaHei"/>
+              </a:rPr>
+              <a:t>· 切块泄漏下 acc 可能偏乐观，不能直接当生产指标</a:t>
+            </a:r>
+          </a:p>
+        </p:txBody>
+      </p:sp>
+      <p:sp>
+        <p:nvSpPr>
+          <p:cNvPr id="9" name="Rounded Rectangle 8"/>
+          <p:cNvSpPr/>
+          <p:nvPr/>
+        </p:nvSpPr>
+        <p:spPr>
+          <a:xfrm>
+            <a:off x="8208000" y="2700000"/>
+            <a:ext cx="3456000" cy="3096000"/>
+          </a:xfrm>
+          <a:prstGeom prst="roundRect">
+            <a:avLst/>
+          </a:prstGeom>
+          <a:solidFill>
+            <a:srgbClr val="FBE4C8"/>
+          </a:solidFill>
+          <a:ln>
+            <a:noFill/>
+          </a:ln>
+          <a:effectLst/>
+        </p:spPr>
+        <p:style>
+          <a:lnRef idx="1">
+            <a:schemeClr val="accent1"/>
+          </a:lnRef>
+          <a:fillRef idx="3">
+            <a:schemeClr val="accent1"/>
+          </a:fillRef>
+          <a:effectRef idx="2">
+            <a:schemeClr val="accent1"/>
+          </a:effectRef>
+          <a:fontRef idx="minor">
+            <a:schemeClr val="lt1"/>
+          </a:fontRef>
+        </p:style>
+        <p:txBody>
+          <a:bodyPr wrap="square" lIns="125999" tIns="108000" rIns="125999" bIns="108000" rtlCol="0" anchor="t"/>
+          <a:lstStyle/>
+          <a:p>
+            <a:pPr algn="l">
+              <a:spcAft>
+                <a:spcPts val="500"/>
+              </a:spcAft>
+            </a:pPr>
+            <a:r>
+              <a:rPr sz="1500" b="1">
+                <a:solidFill>
+                  <a:srgbClr val="6B3E16"/>
+                </a:solidFill>
+                <a:latin typeface="Microsoft YaHei"/>
+                <a:ea typeface="Microsoft YaHei"/>
+              </a:rPr>
+              <a:t>下一项最小检查</a:t>
+            </a:r>
+          </a:p>
+          <a:p>
+            <a:pPr algn="l">
+              <a:spcAft>
+                <a:spcPts val="300"/>
+              </a:spcAft>
+            </a:pPr>
+            <a:r>
+              <a:rPr sz="1300" b="0">
+                <a:solidFill>
+                  <a:srgbClr val="6B3E16"/>
+                </a:solidFill>
+                <a:latin typeface="Microsoft YaHei"/>
+                <a:ea typeface="Microsoft YaHei"/>
+              </a:rPr>
+              <a:t>· 统计漏检 14 张的共性（对比度、裂纹宽度、光照）</a:t>
+            </a:r>
+          </a:p>
+          <a:p>
+            <a:pPr algn="l">
+              <a:spcAft>
+                <a:spcPts val="300"/>
+              </a:spcAft>
+            </a:pPr>
+            <a:r>
+              <a:rPr sz="1300" b="0">
+                <a:solidFill>
+                  <a:srgbClr val="6B3E16"/>
+                </a:solidFill>
+                <a:latin typeface="Microsoft YaHei"/>
+                <a:ea typeface="Microsoft YaHei"/>
+              </a:rPr>
+              <a:t>· 数据增强：翻转 / 旋转 / 亮度扰动</a:t>
+            </a:r>
+          </a:p>
+          <a:p>
+            <a:pPr algn="l">
+              <a:spcAft>
+                <a:spcPts val="300"/>
+              </a:spcAft>
+            </a:pPr>
+            <a:r>
+              <a:rPr sz="1300" b="0">
+                <a:solidFill>
+                  <a:srgbClr val="6B3E16"/>
+                </a:solidFill>
+                <a:latin typeface="Microsoft YaHei"/>
+                <a:ea typeface="Microsoft YaHei"/>
+              </a:rPr>
+              <a:t>· 改用“按源图划分”重新评估，去掉泄漏</a:t>
+            </a:r>
+          </a:p>
+        </p:txBody>
+      </p:sp>
+      <p:sp>
+        <p:nvSpPr>
+          <p:cNvPr id="10" name="TextBox 9"/>
+          <p:cNvSpPr txBox="1"/>
+          <p:nvPr/>
+        </p:nvSpPr>
+        <p:spPr>
+          <a:xfrm>
+            <a:off x="540000" y="5976000"/>
+            <a:ext cx="11124000" cy="432000"/>
+          </a:xfrm>
+          <a:prstGeom prst="rect">
+            <a:avLst/>
+          </a:prstGeom>
+          <a:noFill/>
+          <a:ln>
+            <a:noFill/>
+          </a:ln>
+        </p:spPr>
+        <p:txBody>
+          <a:bodyPr wrap="square" lIns="108000" tIns="72000" rIns="108000" bIns="72000">
+            <a:spAutoFit/>
+          </a:bodyPr>
+          <a:lstStyle/>
+          <a:p>
+            <a:pPr algn="ctr">
+              <a:spcAft>
+                <a:spcPts val="300"/>
+              </a:spcAft>
+            </a:pPr>
+            <a:r>
+              <a:rPr sz="1400" b="1">
+                <a:solidFill>
+                  <a:srgbClr val="39545B"/>
+                </a:solidFill>
+                <a:latin typeface="Microsoft YaHei"/>
+                <a:ea typeface="Microsoft YaHei"/>
+              </a:rPr>
+              <a:t>准备回答：代码追踪 · 指标 · 失败 · 智能体贡献 · 小变化预测</a:t>
             </a:r>
           </a:p>
         </p:txBody>
@@ -5419,7 +6325,7 @@
 </file>
 
 <file path=ppt/theme/theme2.xml><?xml version="1.0" encoding="utf-8"?>
-<a:theme xmlns:a="http://schemas.openxmlformats.org/drawingml/2006/main" name="Office Theme">
+<a:theme xmlns:a="http://schemas.openxmlformats.org/drawingml/2006/main" name="Office 主题​​">
   <a:themeElements>
     <a:clrScheme name="Office">
       <a:dk1>
@@ -5429,44 +6335,44 @@
         <a:sysClr val="window" lastClr="FFFFFF"/>
       </a:lt1>
       <a:dk2>
-        <a:srgbClr val="1F497D"/>
+        <a:srgbClr val="44546A"/>
       </a:dk2>
       <a:lt2>
-        <a:srgbClr val="EEECE1"/>
+        <a:srgbClr val="E7E6E6"/>
       </a:lt2>
       <a:accent1>
-        <a:srgbClr val="4F81BD"/>
+        <a:srgbClr val="4472C4"/>
       </a:accent1>
       <a:accent2>
-        <a:srgbClr val="C0504D"/>
+        <a:srgbClr val="ED7D31"/>
       </a:accent2>
       <a:accent3>
-        <a:srgbClr val="9BBB59"/>
+        <a:srgbClr val="A5A5A5"/>
       </a:accent3>
       <a:accent4>
-        <a:srgbClr val="8064A2"/>
+        <a:srgbClr val="FFC000"/>
       </a:accent4>
       <a:accent5>
-        <a:srgbClr val="4BACC6"/>
+        <a:srgbClr val="5B9BD5"/>
       </a:accent5>
       <a:accent6>
-        <a:srgbClr val="F79646"/>
+        <a:srgbClr val="70AD47"/>
       </a:accent6>
       <a:hlink>
-        <a:srgbClr val="0000FF"/>
+        <a:srgbClr val="0563C1"/>
       </a:hlink>
       <a:folHlink>
-        <a:srgbClr val="800080"/>
+        <a:srgbClr val="954F72"/>
       </a:folHlink>
     </a:clrScheme>
     <a:fontScheme name="Office">
       <a:majorFont>
-        <a:latin typeface="Calibri"/>
+        <a:latin typeface="等线 Light" panose="020F0302020204030204"/>
         <a:ea typeface=""/>
         <a:cs typeface=""/>
-        <a:font script="Jpan" typeface="ＭＳ Ｐゴシック"/>
+        <a:font script="Jpan" typeface="游ゴシック Light"/>
         <a:font script="Hang" typeface="맑은 고딕"/>
-        <a:font script="Hans" typeface="宋体"/>
+        <a:font script="Hans" typeface="等线 Light"/>
         <a:font script="Hant" typeface="新細明體"/>
         <a:font script="Arab" typeface="Times New Roman"/>
         <a:font script="Hebr" typeface="Times New Roman"/>
@@ -5494,14 +6400,31 @@
         <a:font script="Viet" typeface="Times New Roman"/>
         <a:font script="Uigh" typeface="Microsoft Uighur"/>
         <a:font script="Geor" typeface="Sylfaen"/>
+        <a:font script="Armn" typeface="Arial"/>
+        <a:font script="Bugi" typeface="Leelawadee UI"/>
+        <a:font script="Bopo" typeface="Microsoft JhengHei"/>
+        <a:font script="Java" typeface="Javanese Text"/>
+        <a:font script="Lisu" typeface="Segoe UI"/>
+        <a:font script="Mymr" typeface="Myanmar Text"/>
+        <a:font script="Nkoo" typeface="Ebrima"/>
+        <a:font script="Olck" typeface="Nirmala UI"/>
+        <a:font script="Osma" typeface="Ebrima"/>
+        <a:font script="Phag" typeface="Phagspa"/>
+        <a:font script="Syrn" typeface="Estrangelo Edessa"/>
+        <a:font script="Syrj" typeface="Estrangelo Edessa"/>
+        <a:font script="Syre" typeface="Estrangelo Edessa"/>
+        <a:font script="Sora" typeface="Nirmala UI"/>
+        <a:font script="Tale" typeface="Microsoft Tai Le"/>
+        <a:font script="Talu" typeface="Microsoft New Tai Lue"/>
+        <a:font script="Tfng" typeface="Ebrima"/>
       </a:majorFont>
       <a:minorFont>
-        <a:latin typeface="Calibri"/>
+        <a:latin typeface="等线" panose="020F0502020204030204"/>
         <a:ea typeface=""/>
         <a:cs typeface=""/>
-        <a:font script="Jpan" typeface="ＭＳ Ｐゴシック"/>
+        <a:font script="Jpan" typeface="游ゴシック"/>
         <a:font script="Hang" typeface="맑은 고딕"/>
-        <a:font script="Hans" typeface="宋体"/>
+        <a:font script="Hans" typeface="等线"/>
         <a:font script="Hant" typeface="新細明體"/>
         <a:font script="Arab" typeface="Arial"/>
         <a:font script="Hebr" typeface="Arial"/>
@@ -5529,6 +6452,23 @@
         <a:font script="Viet" typeface="Arial"/>
         <a:font script="Uigh" typeface="Microsoft Uighur"/>
         <a:font script="Geor" typeface="Sylfaen"/>
+        <a:font script="Armn" typeface="Arial"/>
+        <a:font script="Bugi" typeface="Leelawadee UI"/>
+        <a:font script="Bopo" typeface="Microsoft JhengHei"/>
+        <a:font script="Java" typeface="Javanese Text"/>
+        <a:font script="Lisu" typeface="Segoe UI"/>
+        <a:font script="Mymr" typeface="Myanmar Text"/>
+        <a:font script="Nkoo" typeface="Ebrima"/>
+        <a:font script="Olck" typeface="Nirmala UI"/>
+        <a:font script="Osma" typeface="Ebrima"/>
+        <a:font script="Phag" typeface="Phagspa"/>
+        <a:font script="Syrn" typeface="Estrangelo Edessa"/>
+        <a:font script="Syrj" typeface="Estrangelo Edessa"/>
+        <a:font script="Syre" typeface="Estrangelo Edessa"/>
+        <a:font script="Sora" typeface="Nirmala UI"/>
+        <a:font script="Tale" typeface="Microsoft Tai Le"/>
+        <a:font script="Talu" typeface="Microsoft New Tai Lue"/>
+        <a:font script="Tfng" typeface="Ebrima"/>
       </a:minorFont>
     </a:fontScheme>
     <a:fmtScheme name="Office">
@@ -5540,200 +6480,141 @@
           <a:gsLst>
             <a:gs pos="0">
               <a:schemeClr val="phClr">
-                <a:tint val="50000"/>
-                <a:satMod val="300000"/>
+                <a:lumMod val="110000"/>
+                <a:satMod val="105000"/>
+                <a:tint val="67000"/>
               </a:schemeClr>
             </a:gs>
-            <a:gs pos="35000">
+            <a:gs pos="50000">
               <a:schemeClr val="phClr">
-                <a:tint val="37000"/>
-                <a:satMod val="300000"/>
+                <a:lumMod val="105000"/>
+                <a:satMod val="103000"/>
+                <a:tint val="73000"/>
               </a:schemeClr>
             </a:gs>
             <a:gs pos="100000">
               <a:schemeClr val="phClr">
-                <a:tint val="15000"/>
-                <a:satMod val="350000"/>
+                <a:lumMod val="105000"/>
+                <a:satMod val="109000"/>
+                <a:tint val="81000"/>
               </a:schemeClr>
             </a:gs>
           </a:gsLst>
-          <a:lin ang="16200000" scaled="1"/>
+          <a:lin ang="5400000" scaled="0"/>
         </a:gradFill>
         <a:gradFill rotWithShape="1">
           <a:gsLst>
             <a:gs pos="0">
               <a:schemeClr val="phClr">
-                <a:tint val="100000"/>
+                <a:satMod val="103000"/>
+                <a:lumMod val="102000"/>
+                <a:tint val="94000"/>
+              </a:schemeClr>
+            </a:gs>
+            <a:gs pos="50000">
+              <a:schemeClr val="phClr">
+                <a:satMod val="110000"/>
+                <a:lumMod val="100000"/>
                 <a:shade val="100000"/>
-                <a:satMod val="130000"/>
               </a:schemeClr>
             </a:gs>
             <a:gs pos="100000">
               <a:schemeClr val="phClr">
-                <a:tint val="50000"/>
-                <a:shade val="100000"/>
-                <a:satMod val="350000"/>
+                <a:lumMod val="99000"/>
+                <a:satMod val="120000"/>
+                <a:shade val="78000"/>
               </a:schemeClr>
             </a:gs>
           </a:gsLst>
-          <a:lin ang="16200000" scaled="0"/>
+          <a:lin ang="5400000" scaled="0"/>
         </a:gradFill>
       </a:fillStyleLst>
       <a:lnStyleLst>
-        <a:ln w="9525" cap="flat" cmpd="sng" algn="ctr">
-          <a:solidFill>
-            <a:schemeClr val="phClr">
-              <a:shade val="95000"/>
-              <a:satMod val="105000"/>
-            </a:schemeClr>
-          </a:solidFill>
-          <a:prstDash val="solid"/>
-        </a:ln>
-        <a:ln w="25400" cap="flat" cmpd="sng" algn="ctr">
+        <a:ln w="6350" cap="flat" cmpd="sng" algn="ctr">
           <a:solidFill>
             <a:schemeClr val="phClr"/>
           </a:solidFill>
           <a:prstDash val="solid"/>
+          <a:miter lim="800000"/>
         </a:ln>
-        <a:ln w="38100" cap="flat" cmpd="sng" algn="ctr">
+        <a:ln w="12700" cap="flat" cmpd="sng" algn="ctr">
           <a:solidFill>
             <a:schemeClr val="phClr"/>
           </a:solidFill>
           <a:prstDash val="solid"/>
+          <a:miter lim="800000"/>
+        </a:ln>
+        <a:ln w="19050" cap="flat" cmpd="sng" algn="ctr">
+          <a:solidFill>
+            <a:schemeClr val="phClr"/>
+          </a:solidFill>
+          <a:prstDash val="solid"/>
+          <a:miter lim="800000"/>
         </a:ln>
       </a:lnStyleLst>
       <a:effectStyleLst>
         <a:effectStyle>
+          <a:effectLst/>
+        </a:effectStyle>
+        <a:effectStyle>
+          <a:effectLst/>
+        </a:effectStyle>
+        <a:effectStyle>
           <a:effectLst>
-            <a:outerShdw blurRad="40000" dist="20000" dir="5400000" rotWithShape="0">
+            <a:outerShdw blurRad="57150" dist="19050" dir="5400000" algn="ctr" rotWithShape="0">
               <a:srgbClr val="000000">
-                <a:alpha val="38000"/>
+                <a:alpha val="63000"/>
               </a:srgbClr>
             </a:outerShdw>
           </a:effectLst>
-        </a:effectStyle>
-        <a:effectStyle>
-          <a:effectLst>
-            <a:outerShdw blurRad="40000" dist="23000" dir="5400000" rotWithShape="0">
-              <a:srgbClr val="000000">
-                <a:alpha val="35000"/>
-              </a:srgbClr>
-            </a:outerShdw>
-          </a:effectLst>
-        </a:effectStyle>
-        <a:effectStyle>
-          <a:effectLst>
-            <a:outerShdw blurRad="40000" dist="23000" dir="5400000" rotWithShape="0">
-              <a:srgbClr val="000000">
-                <a:alpha val="35000"/>
-              </a:srgbClr>
-            </a:outerShdw>
-          </a:effectLst>
-          <a:scene3d>
-            <a:camera prst="orthographicFront">
-              <a:rot lat="0" lon="0" rev="0"/>
-            </a:camera>
-            <a:lightRig rig="threePt" dir="t">
-              <a:rot lat="0" lon="0" rev="1200000"/>
-            </a:lightRig>
-          </a:scene3d>
-          <a:sp3d>
-            <a:bevelT w="63500" h="25400"/>
-          </a:sp3d>
         </a:effectStyle>
       </a:effectStyleLst>
       <a:bgFillStyleLst>
         <a:solidFill>
           <a:schemeClr val="phClr"/>
         </a:solidFill>
+        <a:solidFill>
+          <a:schemeClr val="phClr">
+            <a:tint val="95000"/>
+            <a:satMod val="170000"/>
+          </a:schemeClr>
+        </a:solidFill>
         <a:gradFill rotWithShape="1">
           <a:gsLst>
             <a:gs pos="0">
               <a:schemeClr val="phClr">
-                <a:tint val="40000"/>
-                <a:satMod val="350000"/>
+                <a:tint val="93000"/>
+                <a:satMod val="150000"/>
+                <a:shade val="98000"/>
+                <a:lumMod val="102000"/>
               </a:schemeClr>
             </a:gs>
-            <a:gs pos="40000">
+            <a:gs pos="50000">
               <a:schemeClr val="phClr">
-                <a:tint val="45000"/>
-                <a:shade val="99000"/>
-                <a:satMod val="350000"/>
+                <a:tint val="98000"/>
+                <a:satMod val="130000"/>
+                <a:shade val="90000"/>
+                <a:lumMod val="103000"/>
               </a:schemeClr>
             </a:gs>
             <a:gs pos="100000">
               <a:schemeClr val="phClr">
-                <a:shade val="20000"/>
-                <a:satMod val="255000"/>
+                <a:shade val="63000"/>
+                <a:satMod val="120000"/>
               </a:schemeClr>
             </a:gs>
           </a:gsLst>
-          <a:path path="circle">
-            <a:fillToRect l="50000" t="-80000" r="50000" b="180000"/>
-          </a:path>
-        </a:gradFill>
-        <a:gradFill rotWithShape="1">
-          <a:gsLst>
-            <a:gs pos="0">
-              <a:schemeClr val="phClr">
-                <a:tint val="80000"/>
-                <a:satMod val="300000"/>
-              </a:schemeClr>
-            </a:gs>
-            <a:gs pos="100000">
-              <a:schemeClr val="phClr">
-                <a:shade val="30000"/>
-                <a:satMod val="200000"/>
-              </a:schemeClr>
-            </a:gs>
-          </a:gsLst>
-          <a:path path="circle">
-            <a:fillToRect l="50000" t="50000" r="50000" b="50000"/>
-          </a:path>
+          <a:lin ang="5400000" scaled="0"/>
         </a:gradFill>
       </a:bgFillStyleLst>
     </a:fmtScheme>
   </a:themeElements>
-  <a:objectDefaults>
-    <a:spDef>
-      <a:spPr/>
-      <a:bodyPr/>
-      <a:lstStyle/>
-      <a:style>
-        <a:lnRef idx="1">
-          <a:schemeClr val="accent1"/>
-        </a:lnRef>
-        <a:fillRef idx="3">
-          <a:schemeClr val="accent1"/>
-        </a:fillRef>
-        <a:effectRef idx="2">
-          <a:schemeClr val="accent1"/>
-        </a:effectRef>
-        <a:fontRef idx="minor">
-          <a:schemeClr val="lt1"/>
-        </a:fontRef>
-      </a:style>
-    </a:spDef>
-    <a:lnDef>
-      <a:spPr/>
-      <a:bodyPr/>
-      <a:lstStyle/>
-      <a:style>
-        <a:lnRef idx="2">
-          <a:schemeClr val="accent1"/>
-        </a:lnRef>
-        <a:fillRef idx="0">
-          <a:schemeClr val="accent1"/>
-        </a:fillRef>
-        <a:effectRef idx="1">
-          <a:schemeClr val="accent1"/>
-        </a:effectRef>
-        <a:fontRef idx="minor">
-          <a:schemeClr val="tx1"/>
-        </a:fontRef>
-      </a:style>
-    </a:lnDef>
-  </a:objectDefaults>
+  <a:objectDefaults/>
   <a:extraClrSchemeLst/>
+  <a:extLst>
+    <a:ext uri="{05A4C25C-085E-4340-85A3-A5531E510DB2}">
+      <thm15:themeFamily xmlns:thm15="http://schemas.microsoft.com/office/thememl/2012/main" name="Office Theme" id="{62F939B6-93AF-4DB8-9C6B-D6C7DFDC589F}" vid="{4A3C46E8-61CC-4603-A589-7422A47A8E4A}"/>
+    </a:ext>
+  </a:extLst>
 </a:theme>
 </file>
--- a/presentation.pptx
+++ b/presentation.pptx
@@ -369,7 +369,32 @@
           <a:lstStyle/>
           <a:p>
             <a:r>
-              <a:t>45 秒：基线（多数类，acc 0.50）零训练、提供下限；CNN 用卷积核学习局部纹理、参数共享更稳健。二者同数据同划分同测试集。结合代码解释：两层卷积+池化逐步抽象特征；预处理统一到 3×64×64 张量。</a:t>
+              <a:rPr dirty="0"/>
+              <a:t>45 </a:t>
+            </a:r>
+            <a:r>
+              <a:rPr dirty="0" err="1"/>
+              <a:t>秒：基线（多数类，acc</a:t>
+            </a:r>
+            <a:r>
+              <a:rPr dirty="0"/>
+              <a:t> 0.50）零训练、提供下限；CNN </a:t>
+            </a:r>
+            <a:r>
+              <a:rPr dirty="0" err="1"/>
+              <a:t>用卷积核学习局部纹理、参数共享更稳健。二者同数据同划分同测试集。结合代码解释：两层卷积+池化逐步抽象特征；预处理统一到</a:t>
+            </a:r>
+            <a:r>
+              <a:rPr dirty="0"/>
+              <a:t> 3×64×64 </a:t>
+            </a:r>
+            <a:r>
+              <a:rPr dirty="0" err="1"/>
+              <a:t>张量</a:t>
+            </a:r>
+            <a:r>
+              <a:rPr dirty="0"/>
+              <a:t>。</a:t>
             </a:r>
           </a:p>
         </p:txBody>
@@ -713,7 +738,7 @@
           <a:p>
             <a:fld id="{5BCAD085-E8A6-8845-BD4E-CB4CCA059FC4}" type="datetimeFigureOut">
               <a:rPr lang="en-US" smtClean="0"/>
-              <a:t>8/19/2026</a:t>
+              <a:t>8/20/2026</a:t>
             </a:fld>
             <a:endParaRPr lang="en-US"/>
           </a:p>
@@ -881,7 +906,7 @@
           <a:p>
             <a:fld id="{5BCAD085-E8A6-8845-BD4E-CB4CCA059FC4}" type="datetimeFigureOut">
               <a:rPr lang="en-US" smtClean="0"/>
-              <a:t>8/19/2026</a:t>
+              <a:t>8/20/2026</a:t>
             </a:fld>
             <a:endParaRPr lang="en-US"/>
           </a:p>
@@ -1059,7 +1084,7 @@
           <a:p>
             <a:fld id="{5BCAD085-E8A6-8845-BD4E-CB4CCA059FC4}" type="datetimeFigureOut">
               <a:rPr lang="en-US" smtClean="0"/>
-              <a:t>8/19/2026</a:t>
+              <a:t>8/20/2026</a:t>
             </a:fld>
             <a:endParaRPr lang="en-US"/>
           </a:p>
@@ -1227,7 +1252,7 @@
           <a:p>
             <a:fld id="{5BCAD085-E8A6-8845-BD4E-CB4CCA059FC4}" type="datetimeFigureOut">
               <a:rPr lang="en-US" smtClean="0"/>
-              <a:t>8/19/2026</a:t>
+              <a:t>8/20/2026</a:t>
             </a:fld>
             <a:endParaRPr lang="en-US"/>
           </a:p>
@@ -1472,7 +1497,7 @@
           <a:p>
             <a:fld id="{5BCAD085-E8A6-8845-BD4E-CB4CCA059FC4}" type="datetimeFigureOut">
               <a:rPr lang="en-US" smtClean="0"/>
-              <a:t>8/19/2026</a:t>
+              <a:t>8/20/2026</a:t>
             </a:fld>
             <a:endParaRPr lang="en-US"/>
           </a:p>
@@ -1757,7 +1782,7 @@
           <a:p>
             <a:fld id="{5BCAD085-E8A6-8845-BD4E-CB4CCA059FC4}" type="datetimeFigureOut">
               <a:rPr lang="en-US" smtClean="0"/>
-              <a:t>8/19/2026</a:t>
+              <a:t>8/20/2026</a:t>
             </a:fld>
             <a:endParaRPr lang="en-US"/>
           </a:p>
@@ -2176,7 +2201,7 @@
           <a:p>
             <a:fld id="{5BCAD085-E8A6-8845-BD4E-CB4CCA059FC4}" type="datetimeFigureOut">
               <a:rPr lang="en-US" smtClean="0"/>
-              <a:t>8/19/2026</a:t>
+              <a:t>8/20/2026</a:t>
             </a:fld>
             <a:endParaRPr lang="en-US"/>
           </a:p>
@@ -2293,7 +2318,7 @@
           <a:p>
             <a:fld id="{5BCAD085-E8A6-8845-BD4E-CB4CCA059FC4}" type="datetimeFigureOut">
               <a:rPr lang="en-US" smtClean="0"/>
-              <a:t>8/19/2026</a:t>
+              <a:t>8/20/2026</a:t>
             </a:fld>
             <a:endParaRPr lang="en-US"/>
           </a:p>
@@ -2388,7 +2413,7 @@
           <a:p>
             <a:fld id="{5BCAD085-E8A6-8845-BD4E-CB4CCA059FC4}" type="datetimeFigureOut">
               <a:rPr lang="en-US" smtClean="0"/>
-              <a:t>8/19/2026</a:t>
+              <a:t>8/20/2026</a:t>
             </a:fld>
             <a:endParaRPr lang="en-US"/>
           </a:p>
@@ -2663,7 +2688,7 @@
           <a:p>
             <a:fld id="{5BCAD085-E8A6-8845-BD4E-CB4CCA059FC4}" type="datetimeFigureOut">
               <a:rPr lang="en-US" smtClean="0"/>
-              <a:t>8/19/2026</a:t>
+              <a:t>8/20/2026</a:t>
             </a:fld>
             <a:endParaRPr lang="en-US"/>
           </a:p>
@@ -2915,7 +2940,7 @@
           <a:p>
             <a:fld id="{5BCAD085-E8A6-8845-BD4E-CB4CCA059FC4}" type="datetimeFigureOut">
               <a:rPr lang="en-US" smtClean="0"/>
-              <a:t>8/19/2026</a:t>
+              <a:t>8/20/2026</a:t>
             </a:fld>
             <a:endParaRPr lang="en-US"/>
           </a:p>
@@ -3126,7 +3151,7 @@
           <a:p>
             <a:fld id="{5BCAD085-E8A6-8845-BD4E-CB4CCA059FC4}" type="datetimeFigureOut">
               <a:rPr lang="en-US" smtClean="0"/>
-              <a:t>8/19/2026</a:t>
+              <a:t>8/20/2026</a:t>
             </a:fld>
             <a:endParaRPr lang="en-US"/>
           </a:p>
@@ -5054,129 +5079,6 @@
                 <a:ea typeface="Microsoft YaHei"/>
               </a:rPr>
               <a:t>数据划分：600/类、75/25 → 训练 900 / 测试 300</a:t>
-            </a:r>
-          </a:p>
-        </p:txBody>
-      </p:sp>
-      <p:sp>
-        <p:nvSpPr>
-          <p:cNvPr id="7" name="Rounded Rectangle 6"/>
-          <p:cNvSpPr/>
-          <p:nvPr/>
-        </p:nvSpPr>
-        <p:spPr>
-          <a:xfrm>
-            <a:off x="6480000" y="1188000"/>
-            <a:ext cx="5184000" cy="2268000"/>
-          </a:xfrm>
-          <a:prstGeom prst="roundRect">
-            <a:avLst/>
-          </a:prstGeom>
-          <a:solidFill>
-            <a:srgbClr val="FBE4C8"/>
-          </a:solidFill>
-          <a:ln>
-            <a:noFill/>
-          </a:ln>
-          <a:effectLst/>
-        </p:spPr>
-        <p:style>
-          <a:lnRef idx="1">
-            <a:schemeClr val="accent1"/>
-          </a:lnRef>
-          <a:fillRef idx="3">
-            <a:schemeClr val="accent1"/>
-          </a:fillRef>
-          <a:effectRef idx="2">
-            <a:schemeClr val="accent1"/>
-          </a:effectRef>
-          <a:fontRef idx="minor">
-            <a:schemeClr val="lt1"/>
-          </a:fontRef>
-        </p:style>
-        <p:txBody>
-          <a:bodyPr wrap="square" lIns="125999" tIns="108000" rIns="125999" bIns="108000" rtlCol="0" anchor="t"/>
-          <a:lstStyle/>
-          <a:p>
-            <a:pPr algn="l">
-              <a:spcAft>
-                <a:spcPts val="500"/>
-              </a:spcAft>
-            </a:pPr>
-            <a:r>
-              <a:rPr sz="1600" b="1">
-                <a:solidFill>
-                  <a:srgbClr val="6B3E16"/>
-                </a:solidFill>
-                <a:latin typeface="Microsoft YaHei"/>
-                <a:ea typeface="Microsoft YaHei"/>
-              </a:rPr>
-              <a:t>可视化证据（占位）</a:t>
-            </a:r>
-          </a:p>
-          <a:p>
-            <a:pPr algn="l">
-              <a:spcAft>
-                <a:spcPts val="300"/>
-              </a:spcAft>
-            </a:pPr>
-            <a:r>
-              <a:rPr sz="1400" b="1">
-                <a:solidFill>
-                  <a:srgbClr val="6B3E16"/>
-                </a:solidFill>
-                <a:latin typeface="Microsoft YaHei"/>
-                <a:ea typeface="Microsoft YaHei"/>
-              </a:rPr>
-              <a:t>[ 请在此处插入真实的 Loss 曲线图 或 预测对比图 / 混淆矩阵 ]</a:t>
-            </a:r>
-          </a:p>
-          <a:p>
-            <a:pPr algn="l">
-              <a:spcAft>
-                <a:spcPts val="300"/>
-              </a:spcAft>
-            </a:pPr>
-            <a:endParaRPr sz="1400" b="1">
-              <a:solidFill>
-                <a:srgbClr val="6B3E16"/>
-              </a:solidFill>
-              <a:latin typeface="Microsoft YaHei"/>
-              <a:ea typeface="Microsoft YaHei"/>
-            </a:endParaRPr>
-          </a:p>
-          <a:p>
-            <a:pPr algn="l">
-              <a:spcAft>
-                <a:spcPts val="300"/>
-              </a:spcAft>
-            </a:pPr>
-            <a:r>
-              <a:rPr sz="1300" b="0">
-                <a:solidFill>
-                  <a:srgbClr val="6B3E16"/>
-                </a:solidFill>
-                <a:latin typeface="Microsoft YaHei"/>
-                <a:ea typeface="Microsoft YaHei"/>
-              </a:rPr>
-              <a:t>建议图 1：train_loss 随 epoch 下降曲线（0.68 → 0.20），说明模型在学习</a:t>
-            </a:r>
-          </a:p>
-          <a:p>
-            <a:pPr algn="l">
-              <a:spcAft>
-                <a:spcPts val="300"/>
-              </a:spcAft>
-            </a:pPr>
-            <a:r>
-              <a:rPr sz="1300" b="0">
-                <a:solidFill>
-                  <a:srgbClr val="6B3E16"/>
-                </a:solidFill>
-                <a:latin typeface="Microsoft YaHei"/>
-                <a:ea typeface="Microsoft YaHei"/>
-              </a:rPr>
-              <a:t>建议图 2：混淆矩阵或错误图像联系表（突出漏检 14 张）</a:t>
             </a:r>
           </a:p>
         </p:txBody>
